--- a/lecons/F2T/08_S02_L2_P3_Tropical_Grassland_Resources.pptx
+++ b/lecons/F2T/08_S02_L2_P3_Tropical_Grassland_Resources.pptx
@@ -55,9 +55,16 @@
     <p:sldId id="303" r:id="rId49"/>
     <p:sldId id="304" r:id="rId50"/>
     <p:sldId id="305" r:id="rId51"/>
+    <p:sldId id="306" r:id="rId52"/>
+    <p:sldId id="307" r:id="rId53"/>
+    <p:sldId id="308" r:id="rId54"/>
+    <p:sldId id="309" r:id="rId55"/>
+    <p:sldId id="310" r:id="rId56"/>
+    <p:sldId id="311" r:id="rId57"/>
+    <p:sldId id="312" r:id="rId58"/>
   </p:sldIdLst>
   <p:notesMasterIdLst>
-    <p:notesMasterId r:id="rId52"/>
+    <p:notesMasterId r:id="rId59"/>
   </p:notesMasterIdLst>
   <p:sldSz cx="12192000" cy="6858000"/>
   <p:notesSz cx="6858000" cy="12192000"/>
@@ -639,7 +646,7 @@
           <a:p>
             <a:r>
               <a:rPr lang="en-US" dirty="0"/>
-              <a:t>Listen carefully to this situation from real life. Ibrahim lives near the Lagdo lake. His uncle fishes in the lake, his father grows cotton, and his cousin guides tourists in the Bénoué National Park. A visitor says, "The savanna is a poor region." Think about it, because I am going to ask you some questions.</a:t>
+              <a:t>Listen carefully to this situation from real life. Ibrahim lives near the Lagdo lake. His uncle fishes in the lake, his father grows cotton, and his cousin guides tourists in the Bénoué National Park. A visitor says: "The savanna is a poor region." Ibrahim asks: "Is the savanna really poor? What resources does it have, and how do we use them?" Think about it, because I am going to ask you some questions.</a:t>
             </a:r>
             <a:endParaRPr lang="en-US" dirty="0"/>
           </a:p>
@@ -815,7 +822,7 @@
           <a:p>
             <a:r>
               <a:rPr lang="en-US" dirty="0"/>
-              <a:t>Good. A visitor thinks the savanna is poor, but it has many resources.</a:t>
+              <a:t>Good. Ibrahim does not agree that the savanna is poor, and wants to know its resources.</a:t>
             </a:r>
             <a:endParaRPr lang="en-US" dirty="0"/>
           </a:p>
@@ -903,7 +910,7 @@
           <a:p>
             <a:r>
               <a:rPr lang="en-US" dirty="0"/>
-              <a:t>Question 2: Name three resources in the situation. Think for a moment, then raise your hand to answer.</a:t>
+              <a:t>Question 2: Name three activities of Ibrahim's family. Think for a moment, then raise your hand to answer.</a:t>
             </a:r>
             <a:endParaRPr lang="en-US" dirty="0"/>
           </a:p>
@@ -991,7 +998,7 @@
           <a:p>
             <a:r>
               <a:rPr lang="en-US" dirty="0"/>
-              <a:t>Good. Fish, farmland for cotton, and wild animals.</a:t>
+              <a:t>Good. Fishing, cotton farming and tourism.</a:t>
             </a:r>
             <a:endParaRPr lang="en-US" dirty="0"/>
           </a:p>
@@ -1079,7 +1086,7 @@
           <a:p>
             <a:r>
               <a:rPr lang="en-US" dirty="0"/>
-              <a:t>Question 3: What can Ibrahim answer? Think for a moment, then raise your hand to answer.</a:t>
+              <a:t>Question 3: Where is the Bénoué National Park? Think for a moment, then raise your hand to answer.</a:t>
             </a:r>
             <a:endParaRPr lang="en-US" dirty="0"/>
           </a:p>
@@ -1167,7 +1174,7 @@
           <a:p>
             <a:r>
               <a:rPr lang="en-US" dirty="0"/>
-              <a:t>Good. He can say that the savanna gives food, money and jobs.</a:t>
+              <a:t>Good. In the North Region, near Garoua.</a:t>
             </a:r>
             <a:endParaRPr lang="en-US" dirty="0"/>
           </a:p>
@@ -1431,7 +1438,7 @@
           <a:p>
             <a:r>
               <a:rPr lang="en-US" dirty="0"/>
-              <a:t>Activity 1. Look carefully at this picture: cattle feed on the savanna grass. Observe every detail before I ask the question.</a:t>
+              <a:t>Activity 1. Look carefully at this picture: cattle. Observe every detail before I ask the question.</a:t>
             </a:r>
             <a:endParaRPr lang="en-US" dirty="0"/>
           </a:p>
@@ -1607,7 +1614,7 @@
           <a:p>
             <a:r>
               <a:rPr lang="en-US" dirty="0"/>
-              <a:t>Here is the question for Activity 1: What do these animals eat? Who rears them in North Cameroon? Take one minute to think and write your answer in your rough notebook.</a:t>
+              <a:t>Here is the question for Activity 1: What do these animals eat? Take one minute to think and write your answer in your rough notebook.</a:t>
             </a:r>
             <a:endParaRPr lang="en-US" dirty="0"/>
           </a:p>
@@ -1695,7 +1702,7 @@
           <a:p>
             <a:r>
               <a:rPr lang="en-US" dirty="0"/>
-              <a:t>Let us check the answer together. They eat grass. The Fulani (Mbororo) rear them.</a:t>
+              <a:t>Let us check the answer together. Grass.</a:t>
             </a:r>
             <a:endParaRPr lang="en-US" dirty="0"/>
           </a:p>
@@ -1871,7 +1878,7 @@
           <a:p>
             <a:r>
               <a:rPr lang="en-US" dirty="0"/>
-              <a:t>Here is the question for Activity 2: Which crop grows here? Why do farmers grow it? Take one minute to think and write your answer in your rough notebook.</a:t>
+              <a:t>Here is the question for Activity 2: Why do farmers grow cotton? Take one minute to think and write your answer in your rough notebook.</a:t>
             </a:r>
             <a:endParaRPr lang="en-US" dirty="0"/>
           </a:p>
@@ -1959,7 +1966,7 @@
           <a:p>
             <a:r>
               <a:rPr lang="en-US" dirty="0"/>
-              <a:t>Let us check the answer together. Cotton. Farmers sell it to earn money.</a:t>
+              <a:t>Let us check the answer together. To sell it and earn money.</a:t>
             </a:r>
             <a:endParaRPr lang="en-US" dirty="0"/>
           </a:p>
@@ -2047,7 +2054,7 @@
           <a:p>
             <a:r>
               <a:rPr lang="en-US" dirty="0"/>
-              <a:t>Activity 3. Look carefully at this picture: elephants in a savanna park. Observe every detail before I ask the question.</a:t>
+              <a:t>Activity 3. Look carefully at this picture: elephants. Observe every detail before I ask the question.</a:t>
             </a:r>
             <a:endParaRPr lang="en-US" dirty="0"/>
           </a:p>
@@ -2135,7 +2142,7 @@
           <a:p>
             <a:r>
               <a:rPr lang="en-US" dirty="0"/>
-              <a:t>Here is the question for Activity 3: Where can we see these animals in North Cameroon? Who comes to see them? Take one minute to think and write your answer in your rough notebook.</a:t>
+              <a:t>Here is the question for Activity 3: In which parks can we see these animals in North Cameroon? Take one minute to think and write your answer in your rough notebook.</a:t>
             </a:r>
             <a:endParaRPr lang="en-US" dirty="0"/>
           </a:p>
@@ -2223,7 +2230,7 @@
           <a:p>
             <a:r>
               <a:rPr lang="en-US" dirty="0"/>
-              <a:t>Let us check the answer together. In the Bénoué, Bouba Ndjida and Waza parks. Tourists come to see them.</a:t>
+              <a:t>Let us check the answer together. Bénoué, Bouba Ndjida and Waza.</a:t>
             </a:r>
             <a:endParaRPr lang="en-US" dirty="0"/>
           </a:p>
@@ -2311,7 +2318,7 @@
           <a:p>
             <a:r>
               <a:rPr lang="en-US" dirty="0"/>
-              <a:t>Activity 4. Look carefully at this picture: a lake made by a dam, seen from the sky. Observe every detail before I ask the question.</a:t>
+              <a:t>Activity 4. Look carefully at this picture: the Lagdo dam. Observe every detail before I ask the question.</a:t>
             </a:r>
             <a:endParaRPr lang="en-US" dirty="0"/>
           </a:p>
@@ -2399,7 +2406,7 @@
           <a:p>
             <a:r>
               <a:rPr lang="en-US" dirty="0"/>
-              <a:t>Here is the question for Activity 4: The Lagdo dam made a big lake on the Benue. Give two ways people use its water. Take one minute to think and write your answer in your rough notebook.</a:t>
+              <a:t>Here is the question for Activity 4: Give one way people use the water of the Lagdo lake. Take one minute to think and write your answer in your rough notebook.</a:t>
             </a:r>
             <a:endParaRPr lang="en-US" dirty="0"/>
           </a:p>
@@ -2575,7 +2582,7 @@
           <a:p>
             <a:r>
               <a:rPr lang="en-US" dirty="0"/>
-              <a:t>Let us check the answer together. For fishing and for electricity. Also to water the fields.</a:t>
+              <a:t>Let us check the answer together. Fishing (also electricity and irrigation).</a:t>
             </a:r>
             <a:endParaRPr lang="en-US" dirty="0"/>
           </a:p>
@@ -2663,7 +2670,7 @@
           <a:p>
             <a:r>
               <a:rPr lang="en-US" dirty="0"/>
-              <a:t>Activity 5. Look carefully at this picture: bags of charcoal for sale. Observe every detail before I ask the question.</a:t>
+              <a:t>Activity 5. Look carefully at this picture: bags of charcoal. Observe every detail before I ask the question.</a:t>
             </a:r>
             <a:endParaRPr lang="en-US" dirty="0"/>
           </a:p>
@@ -2839,7 +2846,7 @@
           <a:p>
             <a:r>
               <a:rPr lang="en-US" dirty="0"/>
-              <a:t>Let us check the answer together. Firewood, charcoal, shea butter and fruits.</a:t>
+              <a:t>Let us check the answer together. Firewood and charcoal (also shea butter).</a:t>
             </a:r>
             <a:endParaRPr lang="en-US" dirty="0"/>
           </a:p>
@@ -3103,7 +3110,7 @@
           <a:p>
             <a:r>
               <a:rPr lang="en-US" dirty="0"/>
-              <a:t>Let us copy Resources and Methods of Exploitation. The savanna has the following resources. On this slide we have Pasture and Farmland. Write each point on a new line, with the key term first, and explain it in your own words when we revise. When you finish, we go to the next slide.</a:t>
+              <a:t>Let us copy Types of Resources. The savanna has the following resources. Copy the point on Pasture on the left, then draw the diagram on the right: cattle. Give it a title and label it clearly.</a:t>
             </a:r>
             <a:endParaRPr lang="en-US" dirty="0"/>
           </a:p>
@@ -3191,7 +3198,7 @@
           <a:p>
             <a:r>
               <a:rPr lang="en-US" dirty="0"/>
-              <a:t>We continue with Resources and Methods of Exploitation. On this slide we have Wildlife, Water and Trees. Write each point on a new line, with the key term first, and explain it in your own words when we revise.</a:t>
+              <a:t>We continue with Types of Resources. On this slide we have Farmland. Write each point on a new line, with the key term first, and explain it in your own words when we revise.</a:t>
             </a:r>
             <a:endParaRPr lang="en-US" dirty="0"/>
           </a:p>
@@ -3279,7 +3286,7 @@
           <a:p>
             <a:r>
               <a:rPr lang="en-US" dirty="0"/>
-              <a:t>Now let us check what you have understood. Question 1: What is a resource? Answer in your exercise book.</a:t>
+              <a:t>Copy the point on Wildlife on the left, then draw the diagram on the right: elephants. Give it a title and label it clearly.</a:t>
             </a:r>
             <a:endParaRPr lang="en-US" dirty="0"/>
           </a:p>
@@ -3367,7 +3374,7 @@
           <a:p>
             <a:r>
               <a:rPr lang="en-US" dirty="0"/>
-              <a:t>The expected answer is: it is anything in nature that people can use. If you got it right, well done.</a:t>
+              <a:t>We continue with Types of Resources. On this slide we have Water and Wood. Write each point on a new line, with the key term first, and explain it in your own words when we revise.</a:t>
             </a:r>
             <a:endParaRPr lang="en-US" dirty="0"/>
           </a:p>
@@ -3543,7 +3550,7 @@
           <a:p>
             <a:r>
               <a:rPr lang="en-US" dirty="0"/>
-              <a:t>Now let us check what you have understood. Question 2: Give two resources of the savanna and how they are used. Answer in your exercise book.</a:t>
+              <a:t>Let us copy Methods of Exploitation. These resources are exploited as follows. On this slide we have Pasture. Write each point on a new line, with the key term first, and explain it in your own words when we revise.</a:t>
             </a:r>
             <a:endParaRPr lang="en-US" dirty="0"/>
           </a:p>
@@ -3631,7 +3638,7 @@
           <a:p>
             <a:r>
               <a:rPr lang="en-US" dirty="0"/>
-              <a:t>The expected answer is: grass for cattle; water of Lagdo for fishing and electricity. If you got it right, well done.</a:t>
+              <a:t>Copy the point on Farmland on the left, then draw the diagram on the right: a cotton field. Give it a title and label it clearly.</a:t>
             </a:r>
             <a:endParaRPr lang="en-US" dirty="0"/>
           </a:p>
@@ -3719,7 +3726,7 @@
           <a:p>
             <a:r>
               <a:rPr lang="en-US" dirty="0"/>
-              <a:t>For those who need more practice, fill in the blanks in your exercise book. The answers are: number 1, resource; number 2, cattle (animals); number 3, electricity.</a:t>
+              <a:t>We continue with Methods of Exploitation. On this slide we have Wildlife. Write each point on a new line, with the key term first, and explain it in your own words when we revise.</a:t>
             </a:r>
             <a:endParaRPr lang="en-US" dirty="0"/>
           </a:p>
@@ -3807,7 +3814,7 @@
           <a:p>
             <a:r>
               <a:rPr lang="en-US" dirty="0"/>
-              <a:t>For your homework: Ask a farmer or a herder in your area about his work: what he produces, which tools he uses and where he sells his products. We shall correct it at the beginning of our next lesson.</a:t>
+              <a:t>Copy the point on Water on the left, then draw the diagram on the right: the Lagdo dam. Give it a title and label it clearly.</a:t>
             </a:r>
             <a:endParaRPr lang="en-US" dirty="0"/>
           </a:p>
@@ -3895,7 +3902,7 @@
           <a:p>
             <a:r>
               <a:rPr lang="en-US" dirty="0"/>
-              <a:t>Our next lesson will be on Lesson 2 (Part 4): The Tropical Grassland Region: Human Activities. Thank you for your attention, and see you next time.</a:t>
+              <a:t>We continue with Methods of Exploitation. On this slide we have Wood. Write each point on a new line, with the key term first, and explain it in your own words when we revise.</a:t>
             </a:r>
             <a:endParaRPr lang="en-US" dirty="0"/>
           </a:p>
@@ -3983,7 +3990,7 @@
           <a:p>
             <a:r>
               <a:rPr lang="en-US" dirty="0"/>
-              <a:t>Let us play the bilingual game. I say a word in English, and you give me the French word. Then we do the reverse.</a:t>
+              <a:t>Now let us check what you have understood. Question 1: What is a resource? Answer in your exercise book.</a:t>
             </a:r>
             <a:endParaRPr lang="en-US" dirty="0"/>
           </a:p>
@@ -4071,7 +4078,7 @@
           <a:p>
             <a:r>
               <a:rPr lang="en-US" dirty="0"/>
-              <a:t>I record this information in the official logbook of the class after the lesson.</a:t>
+              <a:t>The expected answer is: it is anything in nature that people can use. If you got it right, well done.</a:t>
             </a:r>
             <a:endParaRPr lang="en-US" dirty="0"/>
           </a:p>
@@ -4159,7 +4166,7 @@
           <a:p>
             <a:r>
               <a:rPr lang="en-US" dirty="0"/>
-              <a:t>I complete the second page of the logbook: the matter taught, the evaluation, the homework and the attendance.</a:t>
+              <a:t>Now let us check what you have understood. Question 2: Give two resources of the savanna and how they are used. Answer in your exercise book.</a:t>
             </a:r>
             <a:endParaRPr lang="en-US" dirty="0"/>
           </a:p>
@@ -4247,7 +4254,7 @@
           <a:p>
             <a:r>
               <a:rPr lang="en-US" dirty="0"/>
-              <a:t>This slide is for me, the teacher: it gives the timing of the lesson and what to do if the projector is not available.</a:t>
+              <a:t>The expected answer is: grass for cattle; water of Lagdo for fishing and electricity. If you got it right, well done.</a:t>
             </a:r>
             <a:endParaRPr lang="en-US" dirty="0"/>
           </a:p>
@@ -4335,7 +4342,7 @@
           <a:p>
             <a:r>
               <a:rPr lang="en-US" dirty="0"/>
-              <a:t>Take your time to copy this part; we will continue together.</a:t>
+              <a:t>For those who need more practice, fill in the blanks in your exercise book. The answers are: number 1, resource; number 2, cattle (animals); number 3, electricity.</a:t>
             </a:r>
             <a:endParaRPr lang="en-US" dirty="0"/>
           </a:p>
@@ -4511,7 +4518,7 @@
           <a:p>
             <a:r>
               <a:rPr lang="en-US" dirty="0"/>
-              <a:t>These are the references and picture credits used to prepare this lesson.</a:t>
+              <a:t>For your homework: Ask a farmer or a herder in your area about his work: what he produces, which tools he uses and where he sells his products. We shall correct it at the beginning of our next lesson.</a:t>
             </a:r>
             <a:endParaRPr lang="en-US" dirty="0"/>
           </a:p>
@@ -4535,6 +4542,622 @@
             <a:fld id="{F7021451-1387-4CA6-816F-3879F97B5CBC}" type="slidenum">
               <a:rPr lang="en-US"/>
               <a:t>50</a:t>
+            </a:fld>
+            <a:endParaRPr lang="en-US"/>
+          </a:p>
+        </p:txBody>
+      </p:sp>
+    </p:spTree>
+    <p:extLst>
+      <p:ext uri="{BB962C8B-B14F-4D97-AF65-F5344CB8AC3E}">
+        <p14:creationId xmlns:p14="http://schemas.microsoft.com/office/powerpoint/2010/main" val="1024086991"/>
+      </p:ext>
+    </p:extLst>
+  </p:cSld>
+  <p:clrMapOvr>
+    <a:masterClrMapping/>
+  </p:clrMapOvr>
+</p:notes>
+</file>
+
+<file path=ppt/notesSlides/notesSlide51.xml><?xml version="1.0" encoding="utf-8"?>
+<p:notes xmlns:a="http://schemas.openxmlformats.org/drawingml/2006/main" xmlns:r="http://schemas.openxmlformats.org/officeDocument/2006/relationships" xmlns:p="http://schemas.openxmlformats.org/presentationml/2006/main">
+  <p:cSld>
+    <p:spTree>
+      <p:nvGrpSpPr>
+        <p:cNvPr id="1" name=""/>
+        <p:cNvGrpSpPr/>
+        <p:nvPr/>
+      </p:nvGrpSpPr>
+      <p:grpSpPr>
+        <a:xfrm>
+          <a:off x="0" y="0"/>
+          <a:ext cx="0" cy="0"/>
+          <a:chOff x="0" y="0"/>
+          <a:chExt cx="0" cy="0"/>
+        </a:xfrm>
+      </p:grpSpPr>
+      <p:sp>
+        <p:nvSpPr>
+          <p:cNvPr id="2" name="Slide Image Placeholder 1"/>
+          <p:cNvSpPr>
+            <a:spLocks noGrp="1" noRot="1" noChangeAspect="1"/>
+          </p:cNvSpPr>
+          <p:nvPr>
+            <p:ph type="sldImg"/>
+          </p:nvPr>
+        </p:nvSpPr>
+        <p:spPr/>
+      </p:sp>
+      <p:sp>
+        <p:nvSpPr>
+          <p:cNvPr id="3" name="Notes Placeholder 2"/>
+          <p:cNvSpPr>
+            <a:spLocks noGrp="1"/>
+          </p:cNvSpPr>
+          <p:nvPr>
+            <p:ph type="body" idx="1"/>
+          </p:nvPr>
+        </p:nvSpPr>
+        <p:spPr/>
+        <p:txBody>
+          <a:bodyPr/>
+          <a:lstStyle/>
+          <a:p>
+            <a:r>
+              <a:rPr lang="en-US" dirty="0"/>
+              <a:t>Our next lesson will be on Lesson 2 (Part 4): The Tropical Grassland Region: Human Activities. Thank you for your attention, and see you next time.</a:t>
+            </a:r>
+            <a:endParaRPr lang="en-US" dirty="0"/>
+          </a:p>
+        </p:txBody>
+      </p:sp>
+      <p:sp>
+        <p:nvSpPr>
+          <p:cNvPr id="4" name="Slide Number Placeholder 3"/>
+          <p:cNvSpPr>
+            <a:spLocks noGrp="1"/>
+          </p:cNvSpPr>
+          <p:nvPr>
+            <p:ph type="sldNum" sz="quarter" idx="10"/>
+          </p:nvPr>
+        </p:nvSpPr>
+        <p:spPr/>
+        <p:txBody>
+          <a:bodyPr/>
+          <a:lstStyle/>
+          <a:p>
+            <a:fld id="{F7021451-1387-4CA6-816F-3879F97B5CBC}" type="slidenum">
+              <a:rPr lang="en-US"/>
+              <a:t>51</a:t>
+            </a:fld>
+            <a:endParaRPr lang="en-US"/>
+          </a:p>
+        </p:txBody>
+      </p:sp>
+    </p:spTree>
+    <p:extLst>
+      <p:ext uri="{BB962C8B-B14F-4D97-AF65-F5344CB8AC3E}">
+        <p14:creationId xmlns:p14="http://schemas.microsoft.com/office/powerpoint/2010/main" val="1024086991"/>
+      </p:ext>
+    </p:extLst>
+  </p:cSld>
+  <p:clrMapOvr>
+    <a:masterClrMapping/>
+  </p:clrMapOvr>
+</p:notes>
+</file>
+
+<file path=ppt/notesSlides/notesSlide52.xml><?xml version="1.0" encoding="utf-8"?>
+<p:notes xmlns:a="http://schemas.openxmlformats.org/drawingml/2006/main" xmlns:r="http://schemas.openxmlformats.org/officeDocument/2006/relationships" xmlns:p="http://schemas.openxmlformats.org/presentationml/2006/main">
+  <p:cSld>
+    <p:spTree>
+      <p:nvGrpSpPr>
+        <p:cNvPr id="1" name=""/>
+        <p:cNvGrpSpPr/>
+        <p:nvPr/>
+      </p:nvGrpSpPr>
+      <p:grpSpPr>
+        <a:xfrm>
+          <a:off x="0" y="0"/>
+          <a:ext cx="0" cy="0"/>
+          <a:chOff x="0" y="0"/>
+          <a:chExt cx="0" cy="0"/>
+        </a:xfrm>
+      </p:grpSpPr>
+      <p:sp>
+        <p:nvSpPr>
+          <p:cNvPr id="2" name="Slide Image Placeholder 1"/>
+          <p:cNvSpPr>
+            <a:spLocks noGrp="1" noRot="1" noChangeAspect="1"/>
+          </p:cNvSpPr>
+          <p:nvPr>
+            <p:ph type="sldImg"/>
+          </p:nvPr>
+        </p:nvSpPr>
+        <p:spPr/>
+      </p:sp>
+      <p:sp>
+        <p:nvSpPr>
+          <p:cNvPr id="3" name="Notes Placeholder 2"/>
+          <p:cNvSpPr>
+            <a:spLocks noGrp="1"/>
+          </p:cNvSpPr>
+          <p:nvPr>
+            <p:ph type="body" idx="1"/>
+          </p:nvPr>
+        </p:nvSpPr>
+        <p:spPr/>
+        <p:txBody>
+          <a:bodyPr/>
+          <a:lstStyle/>
+          <a:p>
+            <a:r>
+              <a:rPr lang="en-US" dirty="0"/>
+              <a:t>Let us play the bilingual game. I say a word in English, and you give me the French word. Then we do the reverse.</a:t>
+            </a:r>
+            <a:endParaRPr lang="en-US" dirty="0"/>
+          </a:p>
+        </p:txBody>
+      </p:sp>
+      <p:sp>
+        <p:nvSpPr>
+          <p:cNvPr id="4" name="Slide Number Placeholder 3"/>
+          <p:cNvSpPr>
+            <a:spLocks noGrp="1"/>
+          </p:cNvSpPr>
+          <p:nvPr>
+            <p:ph type="sldNum" sz="quarter" idx="10"/>
+          </p:nvPr>
+        </p:nvSpPr>
+        <p:spPr/>
+        <p:txBody>
+          <a:bodyPr/>
+          <a:lstStyle/>
+          <a:p>
+            <a:fld id="{F7021451-1387-4CA6-816F-3879F97B5CBC}" type="slidenum">
+              <a:rPr lang="en-US"/>
+              <a:t>52</a:t>
+            </a:fld>
+            <a:endParaRPr lang="en-US"/>
+          </a:p>
+        </p:txBody>
+      </p:sp>
+    </p:spTree>
+    <p:extLst>
+      <p:ext uri="{BB962C8B-B14F-4D97-AF65-F5344CB8AC3E}">
+        <p14:creationId xmlns:p14="http://schemas.microsoft.com/office/powerpoint/2010/main" val="1024086991"/>
+      </p:ext>
+    </p:extLst>
+  </p:cSld>
+  <p:clrMapOvr>
+    <a:masterClrMapping/>
+  </p:clrMapOvr>
+</p:notes>
+</file>
+
+<file path=ppt/notesSlides/notesSlide53.xml><?xml version="1.0" encoding="utf-8"?>
+<p:notes xmlns:a="http://schemas.openxmlformats.org/drawingml/2006/main" xmlns:r="http://schemas.openxmlformats.org/officeDocument/2006/relationships" xmlns:p="http://schemas.openxmlformats.org/presentationml/2006/main">
+  <p:cSld>
+    <p:spTree>
+      <p:nvGrpSpPr>
+        <p:cNvPr id="1" name=""/>
+        <p:cNvGrpSpPr/>
+        <p:nvPr/>
+      </p:nvGrpSpPr>
+      <p:grpSpPr>
+        <a:xfrm>
+          <a:off x="0" y="0"/>
+          <a:ext cx="0" cy="0"/>
+          <a:chOff x="0" y="0"/>
+          <a:chExt cx="0" cy="0"/>
+        </a:xfrm>
+      </p:grpSpPr>
+      <p:sp>
+        <p:nvSpPr>
+          <p:cNvPr id="2" name="Slide Image Placeholder 1"/>
+          <p:cNvSpPr>
+            <a:spLocks noGrp="1" noRot="1" noChangeAspect="1"/>
+          </p:cNvSpPr>
+          <p:nvPr>
+            <p:ph type="sldImg"/>
+          </p:nvPr>
+        </p:nvSpPr>
+        <p:spPr/>
+      </p:sp>
+      <p:sp>
+        <p:nvSpPr>
+          <p:cNvPr id="3" name="Notes Placeholder 2"/>
+          <p:cNvSpPr>
+            <a:spLocks noGrp="1"/>
+          </p:cNvSpPr>
+          <p:nvPr>
+            <p:ph type="body" idx="1"/>
+          </p:nvPr>
+        </p:nvSpPr>
+        <p:spPr/>
+        <p:txBody>
+          <a:bodyPr/>
+          <a:lstStyle/>
+          <a:p>
+            <a:r>
+              <a:rPr lang="en-US" dirty="0"/>
+              <a:t>I record this information in the official logbook of the class after the lesson.</a:t>
+            </a:r>
+            <a:endParaRPr lang="en-US" dirty="0"/>
+          </a:p>
+        </p:txBody>
+      </p:sp>
+      <p:sp>
+        <p:nvSpPr>
+          <p:cNvPr id="4" name="Slide Number Placeholder 3"/>
+          <p:cNvSpPr>
+            <a:spLocks noGrp="1"/>
+          </p:cNvSpPr>
+          <p:nvPr>
+            <p:ph type="sldNum" sz="quarter" idx="10"/>
+          </p:nvPr>
+        </p:nvSpPr>
+        <p:spPr/>
+        <p:txBody>
+          <a:bodyPr/>
+          <a:lstStyle/>
+          <a:p>
+            <a:fld id="{F7021451-1387-4CA6-816F-3879F97B5CBC}" type="slidenum">
+              <a:rPr lang="en-US"/>
+              <a:t>53</a:t>
+            </a:fld>
+            <a:endParaRPr lang="en-US"/>
+          </a:p>
+        </p:txBody>
+      </p:sp>
+    </p:spTree>
+    <p:extLst>
+      <p:ext uri="{BB962C8B-B14F-4D97-AF65-F5344CB8AC3E}">
+        <p14:creationId xmlns:p14="http://schemas.microsoft.com/office/powerpoint/2010/main" val="1024086991"/>
+      </p:ext>
+    </p:extLst>
+  </p:cSld>
+  <p:clrMapOvr>
+    <a:masterClrMapping/>
+  </p:clrMapOvr>
+</p:notes>
+</file>
+
+<file path=ppt/notesSlides/notesSlide54.xml><?xml version="1.0" encoding="utf-8"?>
+<p:notes xmlns:a="http://schemas.openxmlformats.org/drawingml/2006/main" xmlns:r="http://schemas.openxmlformats.org/officeDocument/2006/relationships" xmlns:p="http://schemas.openxmlformats.org/presentationml/2006/main">
+  <p:cSld>
+    <p:spTree>
+      <p:nvGrpSpPr>
+        <p:cNvPr id="1" name=""/>
+        <p:cNvGrpSpPr/>
+        <p:nvPr/>
+      </p:nvGrpSpPr>
+      <p:grpSpPr>
+        <a:xfrm>
+          <a:off x="0" y="0"/>
+          <a:ext cx="0" cy="0"/>
+          <a:chOff x="0" y="0"/>
+          <a:chExt cx="0" cy="0"/>
+        </a:xfrm>
+      </p:grpSpPr>
+      <p:sp>
+        <p:nvSpPr>
+          <p:cNvPr id="2" name="Slide Image Placeholder 1"/>
+          <p:cNvSpPr>
+            <a:spLocks noGrp="1" noRot="1" noChangeAspect="1"/>
+          </p:cNvSpPr>
+          <p:nvPr>
+            <p:ph type="sldImg"/>
+          </p:nvPr>
+        </p:nvSpPr>
+        <p:spPr/>
+      </p:sp>
+      <p:sp>
+        <p:nvSpPr>
+          <p:cNvPr id="3" name="Notes Placeholder 2"/>
+          <p:cNvSpPr>
+            <a:spLocks noGrp="1"/>
+          </p:cNvSpPr>
+          <p:nvPr>
+            <p:ph type="body" idx="1"/>
+          </p:nvPr>
+        </p:nvSpPr>
+        <p:spPr/>
+        <p:txBody>
+          <a:bodyPr/>
+          <a:lstStyle/>
+          <a:p>
+            <a:r>
+              <a:rPr lang="en-US" dirty="0"/>
+              <a:t>I complete the second page of the logbook: the matter taught, the evaluation, the homework and the attendance.</a:t>
+            </a:r>
+            <a:endParaRPr lang="en-US" dirty="0"/>
+          </a:p>
+        </p:txBody>
+      </p:sp>
+      <p:sp>
+        <p:nvSpPr>
+          <p:cNvPr id="4" name="Slide Number Placeholder 3"/>
+          <p:cNvSpPr>
+            <a:spLocks noGrp="1"/>
+          </p:cNvSpPr>
+          <p:nvPr>
+            <p:ph type="sldNum" sz="quarter" idx="10"/>
+          </p:nvPr>
+        </p:nvSpPr>
+        <p:spPr/>
+        <p:txBody>
+          <a:bodyPr/>
+          <a:lstStyle/>
+          <a:p>
+            <a:fld id="{F7021451-1387-4CA6-816F-3879F97B5CBC}" type="slidenum">
+              <a:rPr lang="en-US"/>
+              <a:t>54</a:t>
+            </a:fld>
+            <a:endParaRPr lang="en-US"/>
+          </a:p>
+        </p:txBody>
+      </p:sp>
+    </p:spTree>
+    <p:extLst>
+      <p:ext uri="{BB962C8B-B14F-4D97-AF65-F5344CB8AC3E}">
+        <p14:creationId xmlns:p14="http://schemas.microsoft.com/office/powerpoint/2010/main" val="1024086991"/>
+      </p:ext>
+    </p:extLst>
+  </p:cSld>
+  <p:clrMapOvr>
+    <a:masterClrMapping/>
+  </p:clrMapOvr>
+</p:notes>
+</file>
+
+<file path=ppt/notesSlides/notesSlide55.xml><?xml version="1.0" encoding="utf-8"?>
+<p:notes xmlns:a="http://schemas.openxmlformats.org/drawingml/2006/main" xmlns:r="http://schemas.openxmlformats.org/officeDocument/2006/relationships" xmlns:p="http://schemas.openxmlformats.org/presentationml/2006/main">
+  <p:cSld>
+    <p:spTree>
+      <p:nvGrpSpPr>
+        <p:cNvPr id="1" name=""/>
+        <p:cNvGrpSpPr/>
+        <p:nvPr/>
+      </p:nvGrpSpPr>
+      <p:grpSpPr>
+        <a:xfrm>
+          <a:off x="0" y="0"/>
+          <a:ext cx="0" cy="0"/>
+          <a:chOff x="0" y="0"/>
+          <a:chExt cx="0" cy="0"/>
+        </a:xfrm>
+      </p:grpSpPr>
+      <p:sp>
+        <p:nvSpPr>
+          <p:cNvPr id="2" name="Slide Image Placeholder 1"/>
+          <p:cNvSpPr>
+            <a:spLocks noGrp="1" noRot="1" noChangeAspect="1"/>
+          </p:cNvSpPr>
+          <p:nvPr>
+            <p:ph type="sldImg"/>
+          </p:nvPr>
+        </p:nvSpPr>
+        <p:spPr/>
+      </p:sp>
+      <p:sp>
+        <p:nvSpPr>
+          <p:cNvPr id="3" name="Notes Placeholder 2"/>
+          <p:cNvSpPr>
+            <a:spLocks noGrp="1"/>
+          </p:cNvSpPr>
+          <p:nvPr>
+            <p:ph type="body" idx="1"/>
+          </p:nvPr>
+        </p:nvSpPr>
+        <p:spPr/>
+        <p:txBody>
+          <a:bodyPr/>
+          <a:lstStyle/>
+          <a:p>
+            <a:r>
+              <a:rPr lang="en-US" dirty="0"/>
+              <a:t>This slide is for me, the teacher: it gives the timing of the lesson and what to do if the projector is not available.</a:t>
+            </a:r>
+            <a:endParaRPr lang="en-US" dirty="0"/>
+          </a:p>
+        </p:txBody>
+      </p:sp>
+      <p:sp>
+        <p:nvSpPr>
+          <p:cNvPr id="4" name="Slide Number Placeholder 3"/>
+          <p:cNvSpPr>
+            <a:spLocks noGrp="1"/>
+          </p:cNvSpPr>
+          <p:nvPr>
+            <p:ph type="sldNum" sz="quarter" idx="10"/>
+          </p:nvPr>
+        </p:nvSpPr>
+        <p:spPr/>
+        <p:txBody>
+          <a:bodyPr/>
+          <a:lstStyle/>
+          <a:p>
+            <a:fld id="{F7021451-1387-4CA6-816F-3879F97B5CBC}" type="slidenum">
+              <a:rPr lang="en-US"/>
+              <a:t>55</a:t>
+            </a:fld>
+            <a:endParaRPr lang="en-US"/>
+          </a:p>
+        </p:txBody>
+      </p:sp>
+    </p:spTree>
+    <p:extLst>
+      <p:ext uri="{BB962C8B-B14F-4D97-AF65-F5344CB8AC3E}">
+        <p14:creationId xmlns:p14="http://schemas.microsoft.com/office/powerpoint/2010/main" val="1024086991"/>
+      </p:ext>
+    </p:extLst>
+  </p:cSld>
+  <p:clrMapOvr>
+    <a:masterClrMapping/>
+  </p:clrMapOvr>
+</p:notes>
+</file>
+
+<file path=ppt/notesSlides/notesSlide56.xml><?xml version="1.0" encoding="utf-8"?>
+<p:notes xmlns:a="http://schemas.openxmlformats.org/drawingml/2006/main" xmlns:r="http://schemas.openxmlformats.org/officeDocument/2006/relationships" xmlns:p="http://schemas.openxmlformats.org/presentationml/2006/main">
+  <p:cSld>
+    <p:spTree>
+      <p:nvGrpSpPr>
+        <p:cNvPr id="1" name=""/>
+        <p:cNvGrpSpPr/>
+        <p:nvPr/>
+      </p:nvGrpSpPr>
+      <p:grpSpPr>
+        <a:xfrm>
+          <a:off x="0" y="0"/>
+          <a:ext cx="0" cy="0"/>
+          <a:chOff x="0" y="0"/>
+          <a:chExt cx="0" cy="0"/>
+        </a:xfrm>
+      </p:grpSpPr>
+      <p:sp>
+        <p:nvSpPr>
+          <p:cNvPr id="2" name="Slide Image Placeholder 1"/>
+          <p:cNvSpPr>
+            <a:spLocks noGrp="1" noRot="1" noChangeAspect="1"/>
+          </p:cNvSpPr>
+          <p:nvPr>
+            <p:ph type="sldImg"/>
+          </p:nvPr>
+        </p:nvSpPr>
+        <p:spPr/>
+      </p:sp>
+      <p:sp>
+        <p:nvSpPr>
+          <p:cNvPr id="3" name="Notes Placeholder 2"/>
+          <p:cNvSpPr>
+            <a:spLocks noGrp="1"/>
+          </p:cNvSpPr>
+          <p:nvPr>
+            <p:ph type="body" idx="1"/>
+          </p:nvPr>
+        </p:nvSpPr>
+        <p:spPr/>
+        <p:txBody>
+          <a:bodyPr/>
+          <a:lstStyle/>
+          <a:p>
+            <a:r>
+              <a:rPr lang="en-US" dirty="0"/>
+              <a:t>Take your time to copy this part; we will continue together.</a:t>
+            </a:r>
+            <a:endParaRPr lang="en-US" dirty="0"/>
+          </a:p>
+        </p:txBody>
+      </p:sp>
+      <p:sp>
+        <p:nvSpPr>
+          <p:cNvPr id="4" name="Slide Number Placeholder 3"/>
+          <p:cNvSpPr>
+            <a:spLocks noGrp="1"/>
+          </p:cNvSpPr>
+          <p:nvPr>
+            <p:ph type="sldNum" sz="quarter" idx="10"/>
+          </p:nvPr>
+        </p:nvSpPr>
+        <p:spPr/>
+        <p:txBody>
+          <a:bodyPr/>
+          <a:lstStyle/>
+          <a:p>
+            <a:fld id="{F7021451-1387-4CA6-816F-3879F97B5CBC}" type="slidenum">
+              <a:rPr lang="en-US"/>
+              <a:t>56</a:t>
+            </a:fld>
+            <a:endParaRPr lang="en-US"/>
+          </a:p>
+        </p:txBody>
+      </p:sp>
+    </p:spTree>
+    <p:extLst>
+      <p:ext uri="{BB962C8B-B14F-4D97-AF65-F5344CB8AC3E}">
+        <p14:creationId xmlns:p14="http://schemas.microsoft.com/office/powerpoint/2010/main" val="1024086991"/>
+      </p:ext>
+    </p:extLst>
+  </p:cSld>
+  <p:clrMapOvr>
+    <a:masterClrMapping/>
+  </p:clrMapOvr>
+</p:notes>
+</file>
+
+<file path=ppt/notesSlides/notesSlide57.xml><?xml version="1.0" encoding="utf-8"?>
+<p:notes xmlns:a="http://schemas.openxmlformats.org/drawingml/2006/main" xmlns:r="http://schemas.openxmlformats.org/officeDocument/2006/relationships" xmlns:p="http://schemas.openxmlformats.org/presentationml/2006/main">
+  <p:cSld>
+    <p:spTree>
+      <p:nvGrpSpPr>
+        <p:cNvPr id="1" name=""/>
+        <p:cNvGrpSpPr/>
+        <p:nvPr/>
+      </p:nvGrpSpPr>
+      <p:grpSpPr>
+        <a:xfrm>
+          <a:off x="0" y="0"/>
+          <a:ext cx="0" cy="0"/>
+          <a:chOff x="0" y="0"/>
+          <a:chExt cx="0" cy="0"/>
+        </a:xfrm>
+      </p:grpSpPr>
+      <p:sp>
+        <p:nvSpPr>
+          <p:cNvPr id="2" name="Slide Image Placeholder 1"/>
+          <p:cNvSpPr>
+            <a:spLocks noGrp="1" noRot="1" noChangeAspect="1"/>
+          </p:cNvSpPr>
+          <p:nvPr>
+            <p:ph type="sldImg"/>
+          </p:nvPr>
+        </p:nvSpPr>
+        <p:spPr/>
+      </p:sp>
+      <p:sp>
+        <p:nvSpPr>
+          <p:cNvPr id="3" name="Notes Placeholder 2"/>
+          <p:cNvSpPr>
+            <a:spLocks noGrp="1"/>
+          </p:cNvSpPr>
+          <p:nvPr>
+            <p:ph type="body" idx="1"/>
+          </p:nvPr>
+        </p:nvSpPr>
+        <p:spPr/>
+        <p:txBody>
+          <a:bodyPr/>
+          <a:lstStyle/>
+          <a:p>
+            <a:r>
+              <a:rPr lang="en-US" dirty="0"/>
+              <a:t>These are the references and picture credits used to prepare this lesson.</a:t>
+            </a:r>
+            <a:endParaRPr lang="en-US" dirty="0"/>
+          </a:p>
+        </p:txBody>
+      </p:sp>
+      <p:sp>
+        <p:nvSpPr>
+          <p:cNvPr id="4" name="Slide Number Placeholder 3"/>
+          <p:cNvSpPr>
+            <a:spLocks noGrp="1"/>
+          </p:cNvSpPr>
+          <p:nvPr>
+            <p:ph type="sldNum" sz="quarter" idx="10"/>
+          </p:nvPr>
+        </p:nvSpPr>
+        <p:spPr/>
+        <p:txBody>
+          <a:bodyPr/>
+          <a:lstStyle/>
+          <a:p>
+            <a:fld id="{F7021451-1387-4CA6-816F-3879F97B5CBC}" type="slidenum">
+              <a:rPr lang="en-US"/>
+              <a:t>57</a:t>
             </a:fld>
             <a:endParaRPr lang="en-US"/>
           </a:p>
@@ -6243,7 +6866,7 @@
         <p:spPr>
           <a:xfrm>
             <a:off x="0" y="658368"/>
-            <a:ext cx="3840480" cy="5833872"/>
+            <a:ext cx="1463040" cy="5833872"/>
           </a:xfrm>
           <a:prstGeom prst="rect">
             <a:avLst/>
@@ -6258,8 +6881,8 @@
         </p:nvSpPr>
         <p:spPr>
           <a:xfrm>
-            <a:off x="4069080" y="1005840"/>
-            <a:ext cx="7802575" cy="731520"/>
+            <a:off x="1691640" y="1005840"/>
+            <a:ext cx="10180015" cy="731520"/>
           </a:xfrm>
           <a:prstGeom prst="rect">
             <a:avLst/>
@@ -6299,8 +6922,8 @@
         </p:nvSpPr>
         <p:spPr>
           <a:xfrm>
-            <a:off x="4069080" y="1783080"/>
-            <a:ext cx="7802575" cy="4663440"/>
+            <a:off x="1691640" y="1783080"/>
+            <a:ext cx="10180015" cy="4663440"/>
           </a:xfrm>
           <a:prstGeom prst="rect">
             <a:avLst/>
@@ -6327,7 +6950,7 @@
                 <a:ea typeface="Times New Roman" pitchFamily="34" charset="-122"/>
                 <a:cs typeface="Times New Roman" pitchFamily="34" charset="-120"/>
               </a:rPr>
-              <a:t>Ibrahim lives near the Lagdo lake. His uncle fishes in the lake, his father grows cotton, and his cousin guides tourists in the Bénoué National Park. A visitor says, "The savanna is a poor region."</a:t>
+              <a:t>Ibrahim lives near the Lagdo lake. His uncle fishes in the lake, his father grows cotton, and his cousin guides tourists in the Bénoué National Park. A visitor says: "The savanna is a poor region." Ibrahim asks: "Is the savanna really poor? What resources does it have, and how do we use them?"</a:t>
             </a:r>
             <a:endParaRPr lang="en-US" sz="4000" dirty="0"/>
           </a:p>
@@ -6765,7 +7388,7 @@
                 <a:ea typeface="Times New Roman" pitchFamily="34" charset="-122"/>
                 <a:cs typeface="Times New Roman" pitchFamily="34" charset="-120"/>
               </a:rPr>
-              <a:t>A visitor thinks the savanna is poor, but it has many resources.</a:t>
+              <a:t>Ibrahim does not agree that the savanna is poor, and wants to know its resources.</a:t>
             </a:r>
             <a:endParaRPr lang="en-US" sz="4000" dirty="0"/>
           </a:p>
@@ -6984,7 +7607,7 @@
                 <a:ea typeface="Times New Roman" pitchFamily="34" charset="-122"/>
                 <a:cs typeface="Times New Roman" pitchFamily="34" charset="-120"/>
               </a:rPr>
-              <a:t>Name three resources in the situation.</a:t>
+              <a:t>Name three activities of Ibrahim's family.</a:t>
             </a:r>
             <a:endParaRPr lang="en-US" sz="4000" dirty="0"/>
           </a:p>
@@ -7203,7 +7826,7 @@
                 <a:ea typeface="Times New Roman" pitchFamily="34" charset="-122"/>
                 <a:cs typeface="Times New Roman" pitchFamily="34" charset="-120"/>
               </a:rPr>
-              <a:t>Fish, farmland for cotton, and wild animals.</a:t>
+              <a:t>Fishing, cotton farming and tourism.</a:t>
             </a:r>
             <a:endParaRPr lang="en-US" sz="4000" dirty="0"/>
           </a:p>
@@ -7422,7 +8045,7 @@
                 <a:ea typeface="Times New Roman" pitchFamily="34" charset="-122"/>
                 <a:cs typeface="Times New Roman" pitchFamily="34" charset="-120"/>
               </a:rPr>
-              <a:t>What can Ibrahim answer?</a:t>
+              <a:t>Where is the Bénoué National Park?</a:t>
             </a:r>
             <a:endParaRPr lang="en-US" sz="4000" dirty="0"/>
           </a:p>
@@ -7641,7 +8264,7 @@
                 <a:ea typeface="Times New Roman" pitchFamily="34" charset="-122"/>
                 <a:cs typeface="Times New Roman" pitchFamily="34" charset="-120"/>
               </a:rPr>
-              <a:t>He can say that the savanna gives food, money and jobs.</a:t>
+              <a:t>In the North Region, near Garoua.</a:t>
             </a:r>
             <a:endParaRPr lang="en-US" sz="4000" dirty="0"/>
           </a:p>
@@ -8191,7 +8814,7 @@
                 <a:ea typeface="Calibri" pitchFamily="34" charset="-122"/>
                 <a:cs typeface="Calibri" pitchFamily="34" charset="-120"/>
               </a:rPr>
-              <a:t>1. PASTURE</a:t>
+              <a:t>1. TYPES OF RESOURCES</a:t>
             </a:r>
             <a:endParaRPr lang="en-US" sz="1400" dirty="0"/>
           </a:p>
@@ -8293,7 +8916,7 @@
                 <a:ea typeface="Times New Roman" pitchFamily="34" charset="-122"/>
                 <a:cs typeface="Times New Roman" pitchFamily="34" charset="-120"/>
               </a:rPr>
-              <a:t>Cattle feed on the savanna grass.</a:t>
+              <a:t>Cattle.</a:t>
             </a:r>
             <a:endParaRPr lang="en-US" sz="1800" dirty="0"/>
           </a:p>
@@ -9000,7 +9623,7 @@
                 <a:ea typeface="Calibri" pitchFamily="34" charset="-122"/>
                 <a:cs typeface="Calibri" pitchFamily="34" charset="-120"/>
               </a:rPr>
-              <a:t>1. PASTURE</a:t>
+              <a:t>1. TYPES OF RESOURCES</a:t>
             </a:r>
             <a:endParaRPr lang="en-US" sz="1400" dirty="0"/>
           </a:p>
@@ -9107,7 +9730,7 @@
                 <a:ea typeface="Times New Roman" pitchFamily="34" charset="-122"/>
                 <a:cs typeface="Times New Roman" pitchFamily="34" charset="-120"/>
               </a:rPr>
-              <a:t>What do these animals eat? Who rears them in North Cameroon?</a:t>
+              <a:t>What do these animals eat?</a:t>
             </a:r>
             <a:endParaRPr lang="en-US" sz="4000" dirty="0"/>
           </a:p>
@@ -9219,7 +9842,7 @@
                 <a:ea typeface="Calibri" pitchFamily="34" charset="-122"/>
                 <a:cs typeface="Calibri" pitchFamily="34" charset="-120"/>
               </a:rPr>
-              <a:t>1. PASTURE</a:t>
+              <a:t>1. TYPES OF RESOURCES</a:t>
             </a:r>
             <a:endParaRPr lang="en-US" sz="1400" dirty="0"/>
           </a:p>
@@ -9326,7 +9949,7 @@
                 <a:ea typeface="Times New Roman" pitchFamily="34" charset="-122"/>
                 <a:cs typeface="Times New Roman" pitchFamily="34" charset="-120"/>
               </a:rPr>
-              <a:t>They eat grass. The Fulani (Mbororo) rear them.</a:t>
+              <a:t>Grass.</a:t>
             </a:r>
             <a:endParaRPr lang="en-US" sz="4000" dirty="0"/>
           </a:p>
@@ -9438,7 +10061,7 @@
                 <a:ea typeface="Calibri" pitchFamily="34" charset="-122"/>
                 <a:cs typeface="Calibri" pitchFamily="34" charset="-120"/>
               </a:rPr>
-              <a:t>2. FARMLAND</a:t>
+              <a:t>1. TYPES OF RESOURCES</a:t>
             </a:r>
             <a:endParaRPr lang="en-US" sz="1400" dirty="0"/>
           </a:p>
@@ -9652,7 +10275,7 @@
                 <a:ea typeface="Calibri" pitchFamily="34" charset="-122"/>
                 <a:cs typeface="Calibri" pitchFamily="34" charset="-120"/>
               </a:rPr>
-              <a:t>2. FARMLAND</a:t>
+              <a:t>1. TYPES OF RESOURCES</a:t>
             </a:r>
             <a:endParaRPr lang="en-US" sz="1400" dirty="0"/>
           </a:p>
@@ -9759,7 +10382,7 @@
                 <a:ea typeface="Times New Roman" pitchFamily="34" charset="-122"/>
                 <a:cs typeface="Times New Roman" pitchFamily="34" charset="-120"/>
               </a:rPr>
-              <a:t>Which crop grows here? Why do farmers grow it?</a:t>
+              <a:t>Why do farmers grow cotton?</a:t>
             </a:r>
             <a:endParaRPr lang="en-US" sz="4000" dirty="0"/>
           </a:p>
@@ -9871,7 +10494,7 @@
                 <a:ea typeface="Calibri" pitchFamily="34" charset="-122"/>
                 <a:cs typeface="Calibri" pitchFamily="34" charset="-120"/>
               </a:rPr>
-              <a:t>2. FARMLAND</a:t>
+              <a:t>1. TYPES OF RESOURCES</a:t>
             </a:r>
             <a:endParaRPr lang="en-US" sz="1400" dirty="0"/>
           </a:p>
@@ -9978,7 +10601,7 @@
                 <a:ea typeface="Times New Roman" pitchFamily="34" charset="-122"/>
                 <a:cs typeface="Times New Roman" pitchFamily="34" charset="-120"/>
               </a:rPr>
-              <a:t>Cotton. Farmers sell it to earn money.</a:t>
+              <a:t>To sell it and earn money.</a:t>
             </a:r>
             <a:endParaRPr lang="en-US" sz="4000" dirty="0"/>
           </a:p>
@@ -10090,7 +10713,7 @@
                 <a:ea typeface="Calibri" pitchFamily="34" charset="-122"/>
                 <a:cs typeface="Calibri" pitchFamily="34" charset="-120"/>
               </a:rPr>
-              <a:t>3. WILDLIFE</a:t>
+              <a:t>1. TYPES OF RESOURCES</a:t>
             </a:r>
             <a:endParaRPr lang="en-US" sz="1400" dirty="0"/>
           </a:p>
@@ -10192,7 +10815,7 @@
                 <a:ea typeface="Times New Roman" pitchFamily="34" charset="-122"/>
                 <a:cs typeface="Times New Roman" pitchFamily="34" charset="-120"/>
               </a:rPr>
-              <a:t>Elephants in a savanna park.</a:t>
+              <a:t>Elephants.</a:t>
             </a:r>
             <a:endParaRPr lang="en-US" sz="1800" dirty="0"/>
           </a:p>
@@ -10304,7 +10927,7 @@
                 <a:ea typeface="Calibri" pitchFamily="34" charset="-122"/>
                 <a:cs typeface="Calibri" pitchFamily="34" charset="-120"/>
               </a:rPr>
-              <a:t>3. WILDLIFE</a:t>
+              <a:t>1. TYPES OF RESOURCES</a:t>
             </a:r>
             <a:endParaRPr lang="en-US" sz="1400" dirty="0"/>
           </a:p>
@@ -10411,7 +11034,7 @@
                 <a:ea typeface="Times New Roman" pitchFamily="34" charset="-122"/>
                 <a:cs typeface="Times New Roman" pitchFamily="34" charset="-120"/>
               </a:rPr>
-              <a:t>Where can we see these animals in North Cameroon? Who comes to see them?</a:t>
+              <a:t>In which parks can we see these animals in North Cameroon?</a:t>
             </a:r>
             <a:endParaRPr lang="en-US" sz="4000" dirty="0"/>
           </a:p>
@@ -10523,7 +11146,7 @@
                 <a:ea typeface="Calibri" pitchFamily="34" charset="-122"/>
                 <a:cs typeface="Calibri" pitchFamily="34" charset="-120"/>
               </a:rPr>
-              <a:t>3. WILDLIFE</a:t>
+              <a:t>1. TYPES OF RESOURCES</a:t>
             </a:r>
             <a:endParaRPr lang="en-US" sz="1400" dirty="0"/>
           </a:p>
@@ -10630,7 +11253,7 @@
                 <a:ea typeface="Times New Roman" pitchFamily="34" charset="-122"/>
                 <a:cs typeface="Times New Roman" pitchFamily="34" charset="-120"/>
               </a:rPr>
-              <a:t>In the Bénoué, Bouba Ndjida and Waza parks. Tourists come to see them.</a:t>
+              <a:t>Bénoué, Bouba Ndjida and Waza.</a:t>
             </a:r>
             <a:endParaRPr lang="en-US" sz="4000" dirty="0"/>
           </a:p>
@@ -10742,7 +11365,7 @@
                 <a:ea typeface="Calibri" pitchFamily="34" charset="-122"/>
                 <a:cs typeface="Calibri" pitchFamily="34" charset="-120"/>
               </a:rPr>
-              <a:t>4. WATER</a:t>
+              <a:t>2. METHODS OF EXPLOITATION</a:t>
             </a:r>
             <a:endParaRPr lang="en-US" sz="1400" dirty="0"/>
           </a:p>
@@ -10844,7 +11467,7 @@
                 <a:ea typeface="Times New Roman" pitchFamily="34" charset="-122"/>
                 <a:cs typeface="Times New Roman" pitchFamily="34" charset="-120"/>
               </a:rPr>
-              <a:t>A lake made by a dam, seen from the sky.</a:t>
+              <a:t>The Lagdo dam.</a:t>
             </a:r>
             <a:endParaRPr lang="en-US" sz="1800" dirty="0"/>
           </a:p>
@@ -10956,7 +11579,7 @@
                 <a:ea typeface="Calibri" pitchFamily="34" charset="-122"/>
                 <a:cs typeface="Calibri" pitchFamily="34" charset="-120"/>
               </a:rPr>
-              <a:t>4. WATER</a:t>
+              <a:t>2. METHODS OF EXPLOITATION</a:t>
             </a:r>
             <a:endParaRPr lang="en-US" sz="1400" dirty="0"/>
           </a:p>
@@ -11063,7 +11686,7 @@
                 <a:ea typeface="Times New Roman" pitchFamily="34" charset="-122"/>
                 <a:cs typeface="Times New Roman" pitchFamily="34" charset="-120"/>
               </a:rPr>
-              <a:t>The Lagdo dam made a big lake on the Benue. Give two ways people use its water.</a:t>
+              <a:t>Give one way people use the water of the Lagdo lake.</a:t>
             </a:r>
             <a:endParaRPr lang="en-US" sz="4000" dirty="0"/>
           </a:p>
@@ -12184,7 +12807,7 @@
                 <a:ea typeface="Calibri" pitchFamily="34" charset="-122"/>
                 <a:cs typeface="Calibri" pitchFamily="34" charset="-120"/>
               </a:rPr>
-              <a:t>4. WATER</a:t>
+              <a:t>2. METHODS OF EXPLOITATION</a:t>
             </a:r>
             <a:endParaRPr lang="en-US" sz="1400" dirty="0"/>
           </a:p>
@@ -12291,7 +12914,7 @@
                 <a:ea typeface="Times New Roman" pitchFamily="34" charset="-122"/>
                 <a:cs typeface="Times New Roman" pitchFamily="34" charset="-120"/>
               </a:rPr>
-              <a:t>For fishing and for electricity. Also to water the fields.</a:t>
+              <a:t>Fishing (also electricity and irrigation).</a:t>
             </a:r>
             <a:endParaRPr lang="en-US" sz="4000" dirty="0"/>
           </a:p>
@@ -12403,7 +13026,7 @@
                 <a:ea typeface="Calibri" pitchFamily="34" charset="-122"/>
                 <a:cs typeface="Calibri" pitchFamily="34" charset="-120"/>
               </a:rPr>
-              <a:t>5. TREES</a:t>
+              <a:t>2. METHODS OF EXPLOITATION</a:t>
             </a:r>
             <a:endParaRPr lang="en-US" sz="1400" dirty="0"/>
           </a:p>
@@ -12505,7 +13128,7 @@
                 <a:ea typeface="Times New Roman" pitchFamily="34" charset="-122"/>
                 <a:cs typeface="Times New Roman" pitchFamily="34" charset="-120"/>
               </a:rPr>
-              <a:t>Bags of charcoal for sale.</a:t>
+              <a:t>Bags of charcoal.</a:t>
             </a:r>
             <a:endParaRPr lang="en-US" sz="1800" dirty="0"/>
           </a:p>
@@ -12617,7 +13240,7 @@
                 <a:ea typeface="Calibri" pitchFamily="34" charset="-122"/>
                 <a:cs typeface="Calibri" pitchFamily="34" charset="-120"/>
               </a:rPr>
-              <a:t>5. TREES</a:t>
+              <a:t>2. METHODS OF EXPLOITATION</a:t>
             </a:r>
             <a:endParaRPr lang="en-US" sz="1400" dirty="0"/>
           </a:p>
@@ -12836,7 +13459,7 @@
                 <a:ea typeface="Calibri" pitchFamily="34" charset="-122"/>
                 <a:cs typeface="Calibri" pitchFamily="34" charset="-120"/>
               </a:rPr>
-              <a:t>5. TREES</a:t>
+              <a:t>2. METHODS OF EXPLOITATION</a:t>
             </a:r>
             <a:endParaRPr lang="en-US" sz="1400" dirty="0"/>
           </a:p>
@@ -12943,7 +13566,7 @@
                 <a:ea typeface="Times New Roman" pitchFamily="34" charset="-122"/>
                 <a:cs typeface="Times New Roman" pitchFamily="34" charset="-120"/>
               </a:rPr>
-              <a:t>Firewood, charcoal, shea butter and fruits.</a:t>
+              <a:t>Firewood and charcoal (also shea butter).</a:t>
             </a:r>
             <a:endParaRPr lang="en-US" sz="4000" dirty="0"/>
           </a:p>
@@ -13154,7 +13777,7 @@
               <a:buNone/>
             </a:pPr>
             <a:r>
-              <a:rPr lang="en-US" sz="4000" b="1" dirty="0">
+              <a:rPr lang="en-US" sz="3200" b="1" dirty="0">
                 <a:solidFill>
                   <a:srgbClr val="111111"/>
                 </a:solidFill>
@@ -13164,7 +13787,7 @@
               </a:rPr>
               <a:t>Topic: Man in His Environment</a:t>
             </a:r>
-            <a:endParaRPr lang="en-US" sz="4000" dirty="0"/>
+            <a:endParaRPr lang="en-US" sz="3200" dirty="0"/>
           </a:p>
           <a:p>
             <a:pPr algn="l" indent="0" marL="0">
@@ -13174,7 +13797,7 @@
               <a:buNone/>
             </a:pPr>
             <a:r>
-              <a:rPr lang="en-US" sz="4000" b="1" dirty="0">
+              <a:rPr lang="en-US" sz="3200" b="1" dirty="0">
                 <a:solidFill>
                   <a:srgbClr val="111111"/>
                 </a:solidFill>
@@ -13184,7 +13807,7 @@
               </a:rPr>
               <a:t>Sub-topic: Natural Regions</a:t>
             </a:r>
-            <a:endParaRPr lang="en-US" sz="4000" dirty="0"/>
+            <a:endParaRPr lang="en-US" sz="3200" dirty="0"/>
           </a:p>
           <a:p>
             <a:pPr algn="l" indent="0" marL="0">
@@ -13194,7 +13817,7 @@
               <a:buNone/>
             </a:pPr>
             <a:r>
-              <a:rPr lang="en-US" sz="4000" b="1" dirty="0">
+              <a:rPr lang="en-US" sz="3200" b="1" dirty="0">
                 <a:solidFill>
                   <a:srgbClr val="990011"/>
                 </a:solidFill>
@@ -13204,7 +13827,7 @@
               </a:rPr>
               <a:t>Lesson 2 (Part 3): The Tropical Grassland Region: Types of Resources and Methods of Exploitation</a:t>
             </a:r>
-            <a:endParaRPr lang="en-US" sz="4000" dirty="0"/>
+            <a:endParaRPr lang="en-US" sz="3200" dirty="0"/>
           </a:p>
         </p:txBody>
       </p:sp>
@@ -13337,7 +13960,7 @@
         <p:spPr>
           <a:xfrm>
             <a:off x="0" y="658368"/>
-            <a:ext cx="5120640" cy="5833872"/>
+            <a:ext cx="3840480" cy="5833872"/>
           </a:xfrm>
           <a:prstGeom prst="rect">
             <a:avLst/>
@@ -13352,8 +13975,8 @@
         </p:nvSpPr>
         <p:spPr>
           <a:xfrm>
-            <a:off x="5349240" y="1005840"/>
-            <a:ext cx="6522415" cy="731520"/>
+            <a:off x="4069080" y="1005840"/>
+            <a:ext cx="7802575" cy="731520"/>
           </a:xfrm>
           <a:prstGeom prst="rect">
             <a:avLst/>
@@ -13393,8 +14016,8 @@
         </p:nvSpPr>
         <p:spPr>
           <a:xfrm>
-            <a:off x="5349240" y="1783080"/>
-            <a:ext cx="6522415" cy="4663440"/>
+            <a:off x="4069080" y="1783080"/>
+            <a:ext cx="7802575" cy="4663440"/>
           </a:xfrm>
           <a:prstGeom prst="rect">
             <a:avLst/>
@@ -13426,11 +14049,12 @@
             <a:endParaRPr lang="en-US" sz="4000" dirty="0"/>
           </a:p>
           <a:p>
-            <a:pPr algn="l" indent="0" marL="0">
+            <a:pPr algn="l" marL="342900" indent="-342900">
               <a:spcAft>
                 <a:spcPts val="800"/>
               </a:spcAft>
-              <a:buNone/>
+              <a:buSzPct val="100000"/>
+              <a:buChar char="•"/>
             </a:pPr>
             <a:r>
               <a:rPr lang="en-US" sz="4000" b="1" dirty="0">
@@ -13443,11 +14067,12 @@
               </a:rPr>
               <a:t>Resource: </a:t>
             </a:r>
-            <a:pPr algn="l" indent="0" marL="0">
+            <a:pPr algn="l" marL="342900" indent="-342900">
               <a:spcAft>
                 <a:spcPts val="800"/>
               </a:spcAft>
-              <a:buNone/>
+              <a:buSzPct val="100000"/>
+              <a:buChar char="•"/>
             </a:pPr>
             <a:r>
               <a:rPr lang="en-US" sz="4000" dirty="0">
@@ -13463,11 +14088,12 @@
             <a:endParaRPr lang="en-US" sz="4000" dirty="0"/>
           </a:p>
           <a:p>
-            <a:pPr algn="l" indent="0" marL="0">
+            <a:pPr algn="l" marL="342900" indent="-342900">
               <a:spcAft>
                 <a:spcPts val="800"/>
               </a:spcAft>
-              <a:buNone/>
+              <a:buSzPct val="100000"/>
+              <a:buChar char="•"/>
             </a:pPr>
             <a:r>
               <a:rPr lang="en-US" sz="4000" b="1" dirty="0">
@@ -13480,11 +14106,12 @@
               </a:rPr>
               <a:t>Exploitation: </a:t>
             </a:r>
-            <a:pPr algn="l" indent="0" marL="0">
+            <a:pPr algn="l" marL="342900" indent="-342900">
               <a:spcAft>
                 <a:spcPts val="800"/>
               </a:spcAft>
-              <a:buNone/>
+              <a:buSzPct val="100000"/>
+              <a:buChar char="•"/>
             </a:pPr>
             <a:r>
               <a:rPr lang="en-US" sz="4000" dirty="0">
@@ -13613,9 +14240,131 @@
           </a:p>
         </p:txBody>
       </p:sp>
+      <p:sp>
+        <p:nvSpPr>
+          <p:cNvPr id="3" name="Text 1"/>
+          <p:cNvSpPr/>
+          <p:nvPr/>
+        </p:nvSpPr>
+        <p:spPr>
+          <a:xfrm>
+            <a:off x="365760" y="1005840"/>
+            <a:ext cx="11460175" cy="731520"/>
+          </a:xfrm>
+          <a:prstGeom prst="rect">
+            <a:avLst/>
+          </a:prstGeom>
+          <a:noFill/>
+          <a:ln/>
+        </p:spPr>
+        <p:txBody>
+          <a:bodyPr wrap="square" lIns="0" tIns="0" rIns="0" bIns="0" rtlCol="0" anchor="ctr">
+            <a:normAutofit/>
+          </a:bodyPr>
+          <a:lstStyle/>
+          <a:p>
+            <a:pPr algn="ctr" indent="0" marL="0">
+              <a:buNone/>
+            </a:pPr>
+            <a:r>
+              <a:rPr lang="en-US" sz="3600" b="1" dirty="0">
+                <a:solidFill>
+                  <a:srgbClr val="990011"/>
+                </a:solidFill>
+                <a:latin typeface="Times New Roman" pitchFamily="34" charset="0"/>
+                <a:ea typeface="Times New Roman" pitchFamily="34" charset="-122"/>
+                <a:cs typeface="Times New Roman" pitchFamily="34" charset="-120"/>
+              </a:rPr>
+              <a:t>1. Types of Resources</a:t>
+            </a:r>
+            <a:endParaRPr lang="en-US" sz="3600" dirty="0"/>
+          </a:p>
+        </p:txBody>
+      </p:sp>
+      <p:sp>
+        <p:nvSpPr>
+          <p:cNvPr id="4" name="Text 2"/>
+          <p:cNvSpPr/>
+          <p:nvPr/>
+        </p:nvSpPr>
+        <p:spPr>
+          <a:xfrm>
+            <a:off x="365760" y="1783080"/>
+            <a:ext cx="4846320" cy="4617720"/>
+          </a:xfrm>
+          <a:prstGeom prst="rect">
+            <a:avLst/>
+          </a:prstGeom>
+          <a:noFill/>
+          <a:ln/>
+        </p:spPr>
+        <p:txBody>
+          <a:bodyPr wrap="square" lIns="0" tIns="0" rIns="0" bIns="0" rtlCol="0" anchor="t"/>
+          <a:lstStyle/>
+          <a:p>
+            <a:pPr algn="l" indent="0" marL="0">
+              <a:spcAft>
+                <a:spcPts val="800"/>
+              </a:spcAft>
+              <a:buNone/>
+            </a:pPr>
+            <a:r>
+              <a:rPr lang="en-US" sz="3600" i="1" dirty="0">
+                <a:solidFill>
+                  <a:srgbClr val="111111"/>
+                </a:solidFill>
+                <a:latin typeface="Times New Roman" pitchFamily="34" charset="0"/>
+                <a:ea typeface="Times New Roman" pitchFamily="34" charset="-122"/>
+                <a:cs typeface="Times New Roman" pitchFamily="34" charset="-120"/>
+              </a:rPr>
+              <a:t>The savanna has the following resources:</a:t>
+            </a:r>
+            <a:endParaRPr lang="en-US" sz="3600" dirty="0"/>
+          </a:p>
+          <a:p>
+            <a:pPr algn="l" marL="342900" indent="-342900">
+              <a:spcAft>
+                <a:spcPts val="800"/>
+              </a:spcAft>
+              <a:buSzPct val="100000"/>
+              <a:buChar char="•"/>
+            </a:pPr>
+            <a:r>
+              <a:rPr lang="en-US" sz="3600" b="1" dirty="0">
+                <a:solidFill>
+                  <a:srgbClr val="111111"/>
+                </a:solidFill>
+                <a:latin typeface="Times New Roman" pitchFamily="34" charset="0"/>
+                <a:ea typeface="Times New Roman" pitchFamily="34" charset="-122"/>
+                <a:cs typeface="Times New Roman" pitchFamily="34" charset="-120"/>
+              </a:rPr>
+              <a:t>Pasture: </a:t>
+            </a:r>
+            <a:pPr algn="l" marL="342900" indent="-342900">
+              <a:spcAft>
+                <a:spcPts val="800"/>
+              </a:spcAft>
+              <a:buSzPct val="100000"/>
+              <a:buChar char="•"/>
+            </a:pPr>
+            <a:r>
+              <a:rPr lang="en-US" sz="3600" dirty="0">
+                <a:solidFill>
+                  <a:srgbClr val="111111"/>
+                </a:solidFill>
+                <a:latin typeface="Times New Roman" pitchFamily="34" charset="0"/>
+                <a:ea typeface="Times New Roman" pitchFamily="34" charset="-122"/>
+                <a:cs typeface="Times New Roman" pitchFamily="34" charset="-120"/>
+              </a:rPr>
+              <a:t>Grass for cattle, sheep and goats.</a:t>
+            </a:r>
+            <a:endParaRPr lang="en-US" sz="3600" dirty="0"/>
+          </a:p>
+        </p:txBody>
+      </p:sp>
       <p:pic>
         <p:nvPicPr>
-          <p:cNvPr id="3" name="Image 0" descr="/home/claude/f4/img/minesec_sheet.png">    </p:cNvPr>
+          <p:cNvPr id="5" name="Image 0" descr="/home/claude/f4/img/v2/f2t_cattle.jpg">    </p:cNvPr>
           <p:cNvPicPr>
             <a:picLocks noChangeAspect="1"/>
           </p:cNvPicPr>
@@ -13629,8 +14378,8 @@
         </p:blipFill>
         <p:spPr>
           <a:xfrm>
-            <a:off x="0" y="658368"/>
-            <a:ext cx="3840480" cy="5833872"/>
+            <a:off x="5349240" y="2069407"/>
+            <a:ext cx="6659575" cy="3697594"/>
           </a:xfrm>
           <a:prstGeom prst="rect">
             <a:avLst/>
@@ -13639,14 +14388,14 @@
       </p:pic>
       <p:sp>
         <p:nvSpPr>
-          <p:cNvPr id="4" name="Text 1"/>
+          <p:cNvPr id="6" name="Text 3"/>
           <p:cNvSpPr/>
           <p:nvPr/>
         </p:nvSpPr>
         <p:spPr>
           <a:xfrm>
-            <a:off x="4069080" y="1005840"/>
-            <a:ext cx="7802575" cy="731520"/>
+            <a:off x="5349240" y="6089904"/>
+            <a:ext cx="6659575" cy="347472"/>
           </a:xfrm>
           <a:prstGeom prst="rect">
             <a:avLst/>
@@ -13655,142 +14404,24 @@
           <a:ln/>
         </p:spPr>
         <p:txBody>
-          <a:bodyPr wrap="square" lIns="0" tIns="0" rIns="0" bIns="0" rtlCol="0" anchor="ctr">
-            <a:normAutofit/>
-          </a:bodyPr>
+          <a:bodyPr wrap="square" lIns="0" tIns="0" rIns="0" bIns="0" rtlCol="0" anchor="ctr"/>
           <a:lstStyle/>
           <a:p>
             <a:pPr algn="ctr" indent="0" marL="0">
               <a:buNone/>
             </a:pPr>
             <a:r>
-              <a:rPr lang="en-US" sz="3600" b="1" dirty="0">
-                <a:solidFill>
-                  <a:srgbClr val="990011"/>
+              <a:rPr lang="en-US" sz="1600" i="1" dirty="0">
+                <a:solidFill>
+                  <a:srgbClr val="555555"/>
                 </a:solidFill>
                 <a:latin typeface="Times New Roman" pitchFamily="34" charset="0"/>
                 <a:ea typeface="Times New Roman" pitchFamily="34" charset="-122"/>
                 <a:cs typeface="Times New Roman" pitchFamily="34" charset="-120"/>
               </a:rPr>
-              <a:t>1. Resources and Methods of Exploitation</a:t>
-            </a:r>
-            <a:endParaRPr lang="en-US" sz="3600" dirty="0"/>
-          </a:p>
-        </p:txBody>
-      </p:sp>
-      <p:sp>
-        <p:nvSpPr>
-          <p:cNvPr id="5" name="Text 2"/>
-          <p:cNvSpPr/>
-          <p:nvPr/>
-        </p:nvSpPr>
-        <p:spPr>
-          <a:xfrm>
-            <a:off x="4069080" y="1783080"/>
-            <a:ext cx="7802575" cy="4663440"/>
-          </a:xfrm>
-          <a:prstGeom prst="rect">
-            <a:avLst/>
-          </a:prstGeom>
-          <a:noFill/>
-          <a:ln/>
-        </p:spPr>
-        <p:txBody>
-          <a:bodyPr wrap="square" lIns="0" tIns="0" rIns="0" bIns="0" rtlCol="0" anchor="t"/>
-          <a:lstStyle/>
-          <a:p>
-            <a:pPr algn="l" indent="0" marL="0">
-              <a:spcAft>
-                <a:spcPts val="800"/>
-              </a:spcAft>
-              <a:buNone/>
-            </a:pPr>
-            <a:r>
-              <a:rPr lang="en-US" sz="4000" i="1" dirty="0">
-                <a:solidFill>
-                  <a:srgbClr val="111111"/>
-                </a:solidFill>
-                <a:latin typeface="Times New Roman" pitchFamily="34" charset="0"/>
-                <a:ea typeface="Times New Roman" pitchFamily="34" charset="-122"/>
-                <a:cs typeface="Times New Roman" pitchFamily="34" charset="-120"/>
-              </a:rPr>
-              <a:t>The savanna has the following resources:</a:t>
-            </a:r>
-            <a:endParaRPr lang="en-US" sz="4000" dirty="0"/>
-          </a:p>
-          <a:p>
-            <a:pPr algn="l" indent="0" marL="0">
-              <a:spcAft>
-                <a:spcPts val="800"/>
-              </a:spcAft>
-              <a:buNone/>
-            </a:pPr>
-            <a:r>
-              <a:rPr lang="en-US" sz="4000" b="1" dirty="0">
-                <a:solidFill>
-                  <a:srgbClr val="111111"/>
-                </a:solidFill>
-                <a:latin typeface="Times New Roman" pitchFamily="34" charset="0"/>
-                <a:ea typeface="Times New Roman" pitchFamily="34" charset="-122"/>
-                <a:cs typeface="Times New Roman" pitchFamily="34" charset="-120"/>
-              </a:rPr>
-              <a:t>Pasture: </a:t>
-            </a:r>
-            <a:pPr algn="l" indent="0" marL="0">
-              <a:spcAft>
-                <a:spcPts val="800"/>
-              </a:spcAft>
-              <a:buNone/>
-            </a:pPr>
-            <a:r>
-              <a:rPr lang="en-US" sz="4000" dirty="0">
-                <a:solidFill>
-                  <a:srgbClr val="111111"/>
-                </a:solidFill>
-                <a:latin typeface="Times New Roman" pitchFamily="34" charset="0"/>
-                <a:ea typeface="Times New Roman" pitchFamily="34" charset="-122"/>
-                <a:cs typeface="Times New Roman" pitchFamily="34" charset="-120"/>
-              </a:rPr>
-              <a:t>The grass feeds cattle, sheep and goats kept by herders.</a:t>
-            </a:r>
-            <a:endParaRPr lang="en-US" sz="4000" dirty="0"/>
-          </a:p>
-          <a:p>
-            <a:pPr algn="l" indent="0" marL="0">
-              <a:spcAft>
-                <a:spcPts val="800"/>
-              </a:spcAft>
-              <a:buNone/>
-            </a:pPr>
-            <a:r>
-              <a:rPr lang="en-US" sz="4000" b="1" dirty="0">
-                <a:solidFill>
-                  <a:srgbClr val="111111"/>
-                </a:solidFill>
-                <a:latin typeface="Times New Roman" pitchFamily="34" charset="0"/>
-                <a:ea typeface="Times New Roman" pitchFamily="34" charset="-122"/>
-                <a:cs typeface="Times New Roman" pitchFamily="34" charset="-120"/>
-              </a:rPr>
-              <a:t>Farmland: </a:t>
-            </a:r>
-            <a:pPr algn="l" indent="0" marL="0">
-              <a:spcAft>
-                <a:spcPts val="800"/>
-              </a:spcAft>
-              <a:buNone/>
-            </a:pPr>
-            <a:r>
-              <a:rPr lang="en-US" sz="4000" dirty="0">
-                <a:solidFill>
-                  <a:srgbClr val="111111"/>
-                </a:solidFill>
-                <a:latin typeface="Times New Roman" pitchFamily="34" charset="0"/>
-                <a:ea typeface="Times New Roman" pitchFamily="34" charset="-122"/>
-                <a:cs typeface="Times New Roman" pitchFamily="34" charset="-120"/>
-              </a:rPr>
-              <a:t>Farmers use the land to grow cotton, maize and sorghum.</a:t>
-            </a:r>
-            <a:endParaRPr lang="en-US" sz="4000" dirty="0"/>
+              <a:t>Illustration: cattle</a:t>
+            </a:r>
+            <a:endParaRPr lang="en-US" sz="1600" dirty="0"/>
           </a:p>
         </p:txBody>
       </p:sp>
@@ -13923,7 +14554,7 @@
         <p:spPr>
           <a:xfrm>
             <a:off x="0" y="658368"/>
-            <a:ext cx="3840480" cy="5833872"/>
+            <a:ext cx="5120640" cy="5833872"/>
           </a:xfrm>
           <a:prstGeom prst="rect">
             <a:avLst/>
@@ -13938,8 +14569,8 @@
         </p:nvSpPr>
         <p:spPr>
           <a:xfrm>
-            <a:off x="4069080" y="1005840"/>
-            <a:ext cx="7802575" cy="731520"/>
+            <a:off x="5349240" y="1005840"/>
+            <a:ext cx="6522415" cy="731520"/>
           </a:xfrm>
           <a:prstGeom prst="rect">
             <a:avLst/>
@@ -13965,7 +14596,7 @@
                 <a:ea typeface="Times New Roman" pitchFamily="34" charset="-122"/>
                 <a:cs typeface="Times New Roman" pitchFamily="34" charset="-120"/>
               </a:rPr>
-              <a:t>1. Resources and Methods of Exploitation (continued)</a:t>
+              <a:t>1. Types of Resources</a:t>
             </a:r>
             <a:endParaRPr lang="en-US" sz="3600" dirty="0"/>
           </a:p>
@@ -13979,8 +14610,8 @@
         </p:nvSpPr>
         <p:spPr>
           <a:xfrm>
-            <a:off x="4069080" y="1783080"/>
-            <a:ext cx="7802575" cy="4663440"/>
+            <a:off x="5349240" y="1783080"/>
+            <a:ext cx="6522415" cy="4663440"/>
           </a:xfrm>
           <a:prstGeom prst="rect">
             <a:avLst/>
@@ -13992,11 +14623,12 @@
           <a:bodyPr wrap="square" lIns="0" tIns="0" rIns="0" bIns="0" rtlCol="0" anchor="t"/>
           <a:lstStyle/>
           <a:p>
-            <a:pPr algn="l" indent="0" marL="0">
+            <a:pPr algn="l" marL="342900" indent="-342900">
               <a:spcAft>
                 <a:spcPts val="800"/>
               </a:spcAft>
-              <a:buNone/>
+              <a:buSzPct val="100000"/>
+              <a:buChar char="•"/>
             </a:pPr>
             <a:r>
               <a:rPr lang="en-US" sz="4000" b="1" dirty="0">
@@ -14007,13 +14639,14 @@
                 <a:ea typeface="Times New Roman" pitchFamily="34" charset="-122"/>
                 <a:cs typeface="Times New Roman" pitchFamily="34" charset="-120"/>
               </a:rPr>
-              <a:t>Wildlife: </a:t>
-            </a:r>
-            <a:pPr algn="l" indent="0" marL="0">
+              <a:t>Farmland: </a:t>
+            </a:r>
+            <a:pPr algn="l" marL="342900" indent="-342900">
               <a:spcAft>
                 <a:spcPts val="800"/>
               </a:spcAft>
-              <a:buNone/>
+              <a:buSzPct val="100000"/>
+              <a:buChar char="•"/>
             </a:pPr>
             <a:r>
               <a:rPr lang="en-US" sz="4000" dirty="0">
@@ -14024,81 +14657,7 @@
                 <a:ea typeface="Times New Roman" pitchFamily="34" charset="-122"/>
                 <a:cs typeface="Times New Roman" pitchFamily="34" charset="-120"/>
               </a:rPr>
-              <a:t>Animals in national parks such as the Benue attract tourists.</a:t>
-            </a:r>
-            <a:endParaRPr lang="en-US" sz="4000" dirty="0"/>
-          </a:p>
-          <a:p>
-            <a:pPr algn="l" indent="0" marL="0">
-              <a:spcAft>
-                <a:spcPts val="800"/>
-              </a:spcAft>
-              <a:buNone/>
-            </a:pPr>
-            <a:r>
-              <a:rPr lang="en-US" sz="4000" b="1" dirty="0">
-                <a:solidFill>
-                  <a:srgbClr val="111111"/>
-                </a:solidFill>
-                <a:latin typeface="Times New Roman" pitchFamily="34" charset="0"/>
-                <a:ea typeface="Times New Roman" pitchFamily="34" charset="-122"/>
-                <a:cs typeface="Times New Roman" pitchFamily="34" charset="-120"/>
-              </a:rPr>
-              <a:t>Water: </a:t>
-            </a:r>
-            <a:pPr algn="l" indent="0" marL="0">
-              <a:spcAft>
-                <a:spcPts val="800"/>
-              </a:spcAft>
-              <a:buNone/>
-            </a:pPr>
-            <a:r>
-              <a:rPr lang="en-US" sz="4000" dirty="0">
-                <a:solidFill>
-                  <a:srgbClr val="111111"/>
-                </a:solidFill>
-                <a:latin typeface="Times New Roman" pitchFamily="34" charset="0"/>
-                <a:ea typeface="Times New Roman" pitchFamily="34" charset="-122"/>
-                <a:cs typeface="Times New Roman" pitchFamily="34" charset="-120"/>
-              </a:rPr>
-              <a:t>Rivers and the Lagdo Dam give water, fish and electricity.</a:t>
-            </a:r>
-            <a:endParaRPr lang="en-US" sz="4000" dirty="0"/>
-          </a:p>
-          <a:p>
-            <a:pPr algn="l" indent="0" marL="0">
-              <a:spcAft>
-                <a:spcPts val="800"/>
-              </a:spcAft>
-              <a:buNone/>
-            </a:pPr>
-            <a:r>
-              <a:rPr lang="en-US" sz="4000" b="1" dirty="0">
-                <a:solidFill>
-                  <a:srgbClr val="111111"/>
-                </a:solidFill>
-                <a:latin typeface="Times New Roman" pitchFamily="34" charset="0"/>
-                <a:ea typeface="Times New Roman" pitchFamily="34" charset="-122"/>
-                <a:cs typeface="Times New Roman" pitchFamily="34" charset="-120"/>
-              </a:rPr>
-              <a:t>Trees: </a:t>
-            </a:r>
-            <a:pPr algn="l" indent="0" marL="0">
-              <a:spcAft>
-                <a:spcPts val="800"/>
-              </a:spcAft>
-              <a:buNone/>
-            </a:pPr>
-            <a:r>
-              <a:rPr lang="en-US" sz="4000" dirty="0">
-                <a:solidFill>
-                  <a:srgbClr val="111111"/>
-                </a:solidFill>
-                <a:latin typeface="Times New Roman" pitchFamily="34" charset="0"/>
-                <a:ea typeface="Times New Roman" pitchFamily="34" charset="-122"/>
-                <a:cs typeface="Times New Roman" pitchFamily="34" charset="-120"/>
-              </a:rPr>
-              <a:t>Trees give firewood, charcoal and shea butter.</a:t>
+              <a:t>Good for cotton, maize, sorghum and groundnuts.</a:t>
             </a:r>
             <a:endParaRPr lang="en-US" sz="4000" dirty="0"/>
           </a:p>
@@ -14210,15 +14769,117 @@
                 <a:ea typeface="Calibri" pitchFamily="34" charset="-122"/>
                 <a:cs typeface="Calibri" pitchFamily="34" charset="-120"/>
               </a:rPr>
-              <a:t>FORMATIVE EVALUATION</a:t>
+              <a:t>BOARD SUMMARY</a:t>
             </a:r>
             <a:endParaRPr lang="en-US" sz="1400" dirty="0"/>
+          </a:p>
+        </p:txBody>
+      </p:sp>
+      <p:sp>
+        <p:nvSpPr>
+          <p:cNvPr id="3" name="Text 1"/>
+          <p:cNvSpPr/>
+          <p:nvPr/>
+        </p:nvSpPr>
+        <p:spPr>
+          <a:xfrm>
+            <a:off x="365760" y="1005840"/>
+            <a:ext cx="11460175" cy="731520"/>
+          </a:xfrm>
+          <a:prstGeom prst="rect">
+            <a:avLst/>
+          </a:prstGeom>
+          <a:noFill/>
+          <a:ln/>
+        </p:spPr>
+        <p:txBody>
+          <a:bodyPr wrap="square" lIns="0" tIns="0" rIns="0" bIns="0" rtlCol="0" anchor="ctr">
+            <a:normAutofit/>
+          </a:bodyPr>
+          <a:lstStyle/>
+          <a:p>
+            <a:pPr algn="ctr" indent="0" marL="0">
+              <a:buNone/>
+            </a:pPr>
+            <a:r>
+              <a:rPr lang="en-US" sz="3600" b="1" dirty="0">
+                <a:solidFill>
+                  <a:srgbClr val="990011"/>
+                </a:solidFill>
+                <a:latin typeface="Times New Roman" pitchFamily="34" charset="0"/>
+                <a:ea typeface="Times New Roman" pitchFamily="34" charset="-122"/>
+                <a:cs typeface="Times New Roman" pitchFamily="34" charset="-120"/>
+              </a:rPr>
+              <a:t>1. Types of Resources</a:t>
+            </a:r>
+            <a:endParaRPr lang="en-US" sz="3600" dirty="0"/>
+          </a:p>
+        </p:txBody>
+      </p:sp>
+      <p:sp>
+        <p:nvSpPr>
+          <p:cNvPr id="4" name="Text 2"/>
+          <p:cNvSpPr/>
+          <p:nvPr/>
+        </p:nvSpPr>
+        <p:spPr>
+          <a:xfrm>
+            <a:off x="365760" y="1783080"/>
+            <a:ext cx="4846320" cy="4617720"/>
+          </a:xfrm>
+          <a:prstGeom prst="rect">
+            <a:avLst/>
+          </a:prstGeom>
+          <a:noFill/>
+          <a:ln/>
+        </p:spPr>
+        <p:txBody>
+          <a:bodyPr wrap="square" lIns="0" tIns="0" rIns="0" bIns="0" rtlCol="0" anchor="t"/>
+          <a:lstStyle/>
+          <a:p>
+            <a:pPr algn="l" marL="342900" indent="-342900">
+              <a:spcAft>
+                <a:spcPts val="800"/>
+              </a:spcAft>
+              <a:buSzPct val="100000"/>
+              <a:buChar char="•"/>
+            </a:pPr>
+            <a:r>
+              <a:rPr lang="en-US" sz="3600" b="1" dirty="0">
+                <a:solidFill>
+                  <a:srgbClr val="111111"/>
+                </a:solidFill>
+                <a:latin typeface="Times New Roman" pitchFamily="34" charset="0"/>
+                <a:ea typeface="Times New Roman" pitchFamily="34" charset="-122"/>
+                <a:cs typeface="Times New Roman" pitchFamily="34" charset="-120"/>
+              </a:rPr>
+              <a:t>Wildlife: </a:t>
+            </a:r>
+            <a:pPr algn="l" marL="342900" indent="-342900">
+              <a:spcAft>
+                <a:spcPts val="800"/>
+              </a:spcAft>
+              <a:buSzPct val="100000"/>
+              <a:buChar char="•"/>
+            </a:pPr>
+            <a:r>
+              <a:rPr lang="en-US" sz="3600" dirty="0">
+                <a:solidFill>
+                  <a:srgbClr val="111111"/>
+                </a:solidFill>
+                <a:latin typeface="Times New Roman" pitchFamily="34" charset="0"/>
+                <a:ea typeface="Times New Roman" pitchFamily="34" charset="-122"/>
+                <a:cs typeface="Times New Roman" pitchFamily="34" charset="-120"/>
+              </a:rPr>
+              <a:t>Elephants, lions and antelopes.</a:t>
+            </a:r>
+            <a:endParaRPr lang="en-US" sz="3600" dirty="0"/>
           </a:p>
         </p:txBody>
       </p:sp>
       <p:pic>
         <p:nvPicPr>
-          <p:cNvPr id="3" name="Image 0" descr="/home/claude/f4/img/minesec_sheet.png">    </p:cNvPr>
+          <p:cNvPr id="5" name="Image 0" descr="/home/claude/f4/img/v2/f2t_elephants.jpg">    </p:cNvPr>
           <p:cNvPicPr>
             <a:picLocks noChangeAspect="1"/>
           </p:cNvPicPr>
@@ -14232,8 +14893,8 @@
         </p:blipFill>
         <p:spPr>
           <a:xfrm>
-            <a:off x="0" y="658368"/>
-            <a:ext cx="5120640" cy="5833872"/>
+            <a:off x="5349240" y="2069407"/>
+            <a:ext cx="6659575" cy="3697594"/>
           </a:xfrm>
           <a:prstGeom prst="rect">
             <a:avLst/>
@@ -14242,14 +14903,14 @@
       </p:pic>
       <p:sp>
         <p:nvSpPr>
-          <p:cNvPr id="4" name="Text 1"/>
+          <p:cNvPr id="6" name="Text 3"/>
           <p:cNvSpPr/>
           <p:nvPr/>
         </p:nvSpPr>
         <p:spPr>
           <a:xfrm>
-            <a:off x="5349240" y="1005840"/>
-            <a:ext cx="6522415" cy="731520"/>
+            <a:off x="5349240" y="6089904"/>
+            <a:ext cx="6659575" cy="347472"/>
           </a:xfrm>
           <a:prstGeom prst="rect">
             <a:avLst/>
@@ -14258,68 +14919,24 @@
           <a:ln/>
         </p:spPr>
         <p:txBody>
-          <a:bodyPr wrap="square" lIns="0" tIns="0" rIns="0" bIns="0" rtlCol="0" anchor="ctr">
-            <a:normAutofit/>
-          </a:bodyPr>
+          <a:bodyPr wrap="square" lIns="0" tIns="0" rIns="0" bIns="0" rtlCol="0" anchor="ctr"/>
           <a:lstStyle/>
           <a:p>
             <a:pPr algn="ctr" indent="0" marL="0">
               <a:buNone/>
             </a:pPr>
             <a:r>
-              <a:rPr lang="en-US" sz="3600" b="1" dirty="0">
-                <a:solidFill>
-                  <a:srgbClr val="990011"/>
+              <a:rPr lang="en-US" sz="1600" i="1" dirty="0">
+                <a:solidFill>
+                  <a:srgbClr val="555555"/>
                 </a:solidFill>
                 <a:latin typeface="Times New Roman" pitchFamily="34" charset="0"/>
                 <a:ea typeface="Times New Roman" pitchFamily="34" charset="-122"/>
                 <a:cs typeface="Times New Roman" pitchFamily="34" charset="-120"/>
               </a:rPr>
-              <a:t>Evaluation 1</a:t>
-            </a:r>
-            <a:endParaRPr lang="en-US" sz="3600" dirty="0"/>
-          </a:p>
-        </p:txBody>
-      </p:sp>
-      <p:sp>
-        <p:nvSpPr>
-          <p:cNvPr id="5" name="Text 2"/>
-          <p:cNvSpPr/>
-          <p:nvPr/>
-        </p:nvSpPr>
-        <p:spPr>
-          <a:xfrm>
-            <a:off x="5349240" y="1783080"/>
-            <a:ext cx="6522415" cy="4663440"/>
-          </a:xfrm>
-          <a:prstGeom prst="rect">
-            <a:avLst/>
-          </a:prstGeom>
-          <a:noFill/>
-          <a:ln/>
-        </p:spPr>
-        <p:txBody>
-          <a:bodyPr wrap="square" lIns="0" tIns="0" rIns="0" bIns="0" rtlCol="0" anchor="t"/>
-          <a:lstStyle/>
-          <a:p>
-            <a:pPr algn="l" indent="0" marL="0">
-              <a:spcAft>
-                <a:spcPts val="800"/>
-              </a:spcAft>
-              <a:buNone/>
-            </a:pPr>
-            <a:r>
-              <a:rPr lang="en-US" sz="4000" dirty="0">
-                <a:solidFill>
-                  <a:srgbClr val="111111"/>
-                </a:solidFill>
-                <a:latin typeface="Times New Roman" pitchFamily="34" charset="0"/>
-                <a:ea typeface="Times New Roman" pitchFamily="34" charset="-122"/>
-                <a:cs typeface="Times New Roman" pitchFamily="34" charset="-120"/>
-              </a:rPr>
-              <a:t>What is a resource?</a:t>
-            </a:r>
-            <a:endParaRPr lang="en-US" sz="4000" dirty="0"/>
+              <a:t>Illustration: elephants</a:t>
+            </a:r>
+            <a:endParaRPr lang="en-US" sz="1600" dirty="0"/>
           </a:p>
         </p:txBody>
       </p:sp>
@@ -14429,7 +15046,7 @@
                 <a:ea typeface="Calibri" pitchFamily="34" charset="-122"/>
                 <a:cs typeface="Calibri" pitchFamily="34" charset="-120"/>
               </a:rPr>
-              <a:t>FORMATIVE EVALUATION</a:t>
+              <a:t>BOARD SUMMARY</a:t>
             </a:r>
             <a:endParaRPr lang="en-US" sz="1400" dirty="0"/>
           </a:p>
@@ -14494,7 +15111,7 @@
                 <a:ea typeface="Times New Roman" pitchFamily="34" charset="-122"/>
                 <a:cs typeface="Times New Roman" pitchFamily="34" charset="-120"/>
               </a:rPr>
-              <a:t>Expected Answer</a:t>
+              <a:t>1. Types of Resources</a:t>
             </a:r>
             <a:endParaRPr lang="en-US" sz="3600" dirty="0"/>
           </a:p>
@@ -14521,14 +15138,15 @@
           <a:bodyPr wrap="square" lIns="0" tIns="0" rIns="0" bIns="0" rtlCol="0" anchor="t"/>
           <a:lstStyle/>
           <a:p>
-            <a:pPr algn="l" indent="0" marL="0">
+            <a:pPr algn="l" marL="342900" indent="-342900">
               <a:spcAft>
                 <a:spcPts val="800"/>
               </a:spcAft>
-              <a:buNone/>
+              <a:buSzPct val="100000"/>
+              <a:buChar char="•"/>
             </a:pPr>
             <a:r>
-              <a:rPr lang="en-US" sz="4000" dirty="0">
+              <a:rPr lang="en-US" sz="4000" b="1" dirty="0">
                 <a:solidFill>
                   <a:srgbClr val="111111"/>
                 </a:solidFill>
@@ -14536,7 +15154,64 @@
                 <a:ea typeface="Times New Roman" pitchFamily="34" charset="-122"/>
                 <a:cs typeface="Times New Roman" pitchFamily="34" charset="-120"/>
               </a:rPr>
-              <a:t>It is anything in nature that people can use.</a:t>
+              <a:t>Water: </a:t>
+            </a:r>
+            <a:pPr algn="l" marL="342900" indent="-342900">
+              <a:spcAft>
+                <a:spcPts val="800"/>
+              </a:spcAft>
+              <a:buSzPct val="100000"/>
+              <a:buChar char="•"/>
+            </a:pPr>
+            <a:r>
+              <a:rPr lang="en-US" sz="4000" dirty="0">
+                <a:solidFill>
+                  <a:srgbClr val="111111"/>
+                </a:solidFill>
+                <a:latin typeface="Times New Roman" pitchFamily="34" charset="0"/>
+                <a:ea typeface="Times New Roman" pitchFamily="34" charset="-122"/>
+                <a:cs typeface="Times New Roman" pitchFamily="34" charset="-120"/>
+              </a:rPr>
+              <a:t>Rivers and lakes such as the Benue and Lagdo.</a:t>
+            </a:r>
+            <a:endParaRPr lang="en-US" sz="4000" dirty="0"/>
+          </a:p>
+          <a:p>
+            <a:pPr algn="l" marL="342900" indent="-342900">
+              <a:spcAft>
+                <a:spcPts val="800"/>
+              </a:spcAft>
+              <a:buSzPct val="100000"/>
+              <a:buChar char="•"/>
+            </a:pPr>
+            <a:r>
+              <a:rPr lang="en-US" sz="4000" b="1" dirty="0">
+                <a:solidFill>
+                  <a:srgbClr val="111111"/>
+                </a:solidFill>
+                <a:latin typeface="Times New Roman" pitchFamily="34" charset="0"/>
+                <a:ea typeface="Times New Roman" pitchFamily="34" charset="-122"/>
+                <a:cs typeface="Times New Roman" pitchFamily="34" charset="-120"/>
+              </a:rPr>
+              <a:t>Wood: </a:t>
+            </a:r>
+            <a:pPr algn="l" marL="342900" indent="-342900">
+              <a:spcAft>
+                <a:spcPts val="800"/>
+              </a:spcAft>
+              <a:buSzPct val="100000"/>
+              <a:buChar char="•"/>
+            </a:pPr>
+            <a:r>
+              <a:rPr lang="en-US" sz="4000" dirty="0">
+                <a:solidFill>
+                  <a:srgbClr val="111111"/>
+                </a:solidFill>
+                <a:latin typeface="Times New Roman" pitchFamily="34" charset="0"/>
+                <a:ea typeface="Times New Roman" pitchFamily="34" charset="-122"/>
+                <a:cs typeface="Times New Roman" pitchFamily="34" charset="-120"/>
+              </a:rPr>
+              <a:t>Firewood, charcoal and shea trees.</a:t>
             </a:r>
             <a:endParaRPr lang="en-US" sz="4000" dirty="0"/>
           </a:p>
@@ -14887,7 +15562,7 @@
                 <a:ea typeface="Calibri" pitchFamily="34" charset="-122"/>
                 <a:cs typeface="Calibri" pitchFamily="34" charset="-120"/>
               </a:rPr>
-              <a:t>FORMATIVE EVALUATION</a:t>
+              <a:t>BOARD SUMMARY</a:t>
             </a:r>
             <a:endParaRPr lang="en-US" sz="1400" dirty="0"/>
           </a:p>
@@ -14952,7 +15627,7 @@
                 <a:ea typeface="Times New Roman" pitchFamily="34" charset="-122"/>
                 <a:cs typeface="Times New Roman" pitchFamily="34" charset="-120"/>
               </a:rPr>
-              <a:t>Evaluation 2</a:t>
+              <a:t>2. Methods of Exploitation</a:t>
             </a:r>
             <a:endParaRPr lang="en-US" sz="3600" dirty="0"/>
           </a:p>
@@ -14986,7 +15661,7 @@
               <a:buNone/>
             </a:pPr>
             <a:r>
-              <a:rPr lang="en-US" sz="4000" dirty="0">
+              <a:rPr lang="en-US" sz="4000" i="1" dirty="0">
                 <a:solidFill>
                   <a:srgbClr val="111111"/>
                 </a:solidFill>
@@ -14994,7 +15669,46 @@
                 <a:ea typeface="Times New Roman" pitchFamily="34" charset="-122"/>
                 <a:cs typeface="Times New Roman" pitchFamily="34" charset="-120"/>
               </a:rPr>
-              <a:t>Give two resources of the savanna and how they are used.</a:t>
+              <a:t>These resources are exploited as follows:</a:t>
+            </a:r>
+            <a:endParaRPr lang="en-US" sz="4000" dirty="0"/>
+          </a:p>
+          <a:p>
+            <a:pPr algn="l" marL="342900" indent="-342900">
+              <a:spcAft>
+                <a:spcPts val="800"/>
+              </a:spcAft>
+              <a:buSzPct val="100000"/>
+              <a:buChar char="•"/>
+            </a:pPr>
+            <a:r>
+              <a:rPr lang="en-US" sz="4000" b="1" dirty="0">
+                <a:solidFill>
+                  <a:srgbClr val="111111"/>
+                </a:solidFill>
+                <a:latin typeface="Times New Roman" pitchFamily="34" charset="0"/>
+                <a:ea typeface="Times New Roman" pitchFamily="34" charset="-122"/>
+                <a:cs typeface="Times New Roman" pitchFamily="34" charset="-120"/>
+              </a:rPr>
+              <a:t>Pasture: </a:t>
+            </a:r>
+            <a:pPr algn="l" marL="342900" indent="-342900">
+              <a:spcAft>
+                <a:spcPts val="800"/>
+              </a:spcAft>
+              <a:buSzPct val="100000"/>
+              <a:buChar char="•"/>
+            </a:pPr>
+            <a:r>
+              <a:rPr lang="en-US" sz="4000" dirty="0">
+                <a:solidFill>
+                  <a:srgbClr val="111111"/>
+                </a:solidFill>
+                <a:latin typeface="Times New Roman" pitchFamily="34" charset="0"/>
+                <a:ea typeface="Times New Roman" pitchFamily="34" charset="-122"/>
+                <a:cs typeface="Times New Roman" pitchFamily="34" charset="-120"/>
+              </a:rPr>
+              <a:t>Herders graze their animals.</a:t>
             </a:r>
             <a:endParaRPr lang="en-US" sz="4000" dirty="0"/>
           </a:p>
@@ -15106,15 +15820,117 @@
                 <a:ea typeface="Calibri" pitchFamily="34" charset="-122"/>
                 <a:cs typeface="Calibri" pitchFamily="34" charset="-120"/>
               </a:rPr>
-              <a:t>FORMATIVE EVALUATION</a:t>
+              <a:t>BOARD SUMMARY</a:t>
             </a:r>
             <a:endParaRPr lang="en-US" sz="1400" dirty="0"/>
+          </a:p>
+        </p:txBody>
+      </p:sp>
+      <p:sp>
+        <p:nvSpPr>
+          <p:cNvPr id="3" name="Text 1"/>
+          <p:cNvSpPr/>
+          <p:nvPr/>
+        </p:nvSpPr>
+        <p:spPr>
+          <a:xfrm>
+            <a:off x="365760" y="1005840"/>
+            <a:ext cx="11460175" cy="731520"/>
+          </a:xfrm>
+          <a:prstGeom prst="rect">
+            <a:avLst/>
+          </a:prstGeom>
+          <a:noFill/>
+          <a:ln/>
+        </p:spPr>
+        <p:txBody>
+          <a:bodyPr wrap="square" lIns="0" tIns="0" rIns="0" bIns="0" rtlCol="0" anchor="ctr">
+            <a:normAutofit/>
+          </a:bodyPr>
+          <a:lstStyle/>
+          <a:p>
+            <a:pPr algn="ctr" indent="0" marL="0">
+              <a:buNone/>
+            </a:pPr>
+            <a:r>
+              <a:rPr lang="en-US" sz="3600" b="1" dirty="0">
+                <a:solidFill>
+                  <a:srgbClr val="990011"/>
+                </a:solidFill>
+                <a:latin typeface="Times New Roman" pitchFamily="34" charset="0"/>
+                <a:ea typeface="Times New Roman" pitchFamily="34" charset="-122"/>
+                <a:cs typeface="Times New Roman" pitchFamily="34" charset="-120"/>
+              </a:rPr>
+              <a:t>2. Methods of Exploitation</a:t>
+            </a:r>
+            <a:endParaRPr lang="en-US" sz="3600" dirty="0"/>
+          </a:p>
+        </p:txBody>
+      </p:sp>
+      <p:sp>
+        <p:nvSpPr>
+          <p:cNvPr id="4" name="Text 2"/>
+          <p:cNvSpPr/>
+          <p:nvPr/>
+        </p:nvSpPr>
+        <p:spPr>
+          <a:xfrm>
+            <a:off x="365760" y="1783080"/>
+            <a:ext cx="4846320" cy="4617720"/>
+          </a:xfrm>
+          <a:prstGeom prst="rect">
+            <a:avLst/>
+          </a:prstGeom>
+          <a:noFill/>
+          <a:ln/>
+        </p:spPr>
+        <p:txBody>
+          <a:bodyPr wrap="square" lIns="0" tIns="0" rIns="0" bIns="0" rtlCol="0" anchor="t"/>
+          <a:lstStyle/>
+          <a:p>
+            <a:pPr algn="l" marL="342900" indent="-342900">
+              <a:spcAft>
+                <a:spcPts val="800"/>
+              </a:spcAft>
+              <a:buSzPct val="100000"/>
+              <a:buChar char="•"/>
+            </a:pPr>
+            <a:r>
+              <a:rPr lang="en-US" sz="3600" b="1" dirty="0">
+                <a:solidFill>
+                  <a:srgbClr val="111111"/>
+                </a:solidFill>
+                <a:latin typeface="Times New Roman" pitchFamily="34" charset="0"/>
+                <a:ea typeface="Times New Roman" pitchFamily="34" charset="-122"/>
+                <a:cs typeface="Times New Roman" pitchFamily="34" charset="-120"/>
+              </a:rPr>
+              <a:t>Farmland: </a:t>
+            </a:r>
+            <a:pPr algn="l" marL="342900" indent="-342900">
+              <a:spcAft>
+                <a:spcPts val="800"/>
+              </a:spcAft>
+              <a:buSzPct val="100000"/>
+              <a:buChar char="•"/>
+            </a:pPr>
+            <a:r>
+              <a:rPr lang="en-US" sz="3600" dirty="0">
+                <a:solidFill>
+                  <a:srgbClr val="111111"/>
+                </a:solidFill>
+                <a:latin typeface="Times New Roman" pitchFamily="34" charset="0"/>
+                <a:ea typeface="Times New Roman" pitchFamily="34" charset="-122"/>
+                <a:cs typeface="Times New Roman" pitchFamily="34" charset="-120"/>
+              </a:rPr>
+              <a:t>Farmers use hoes, oxen and tractors.</a:t>
+            </a:r>
+            <a:endParaRPr lang="en-US" sz="3600" dirty="0"/>
           </a:p>
         </p:txBody>
       </p:sp>
       <p:pic>
         <p:nvPicPr>
-          <p:cNvPr id="3" name="Image 0" descr="/home/claude/f4/img/minesec_sheet.png">    </p:cNvPr>
+          <p:cNvPr id="5" name="Image 0" descr="/home/claude/f4/img/v2/f2t_cotton_field.jpg">    </p:cNvPr>
           <p:cNvPicPr>
             <a:picLocks noChangeAspect="1"/>
           </p:cNvPicPr>
@@ -15128,8 +15944,8 @@
         </p:blipFill>
         <p:spPr>
           <a:xfrm>
-            <a:off x="0" y="658368"/>
-            <a:ext cx="5120640" cy="5833872"/>
+            <a:off x="5349240" y="2071212"/>
+            <a:ext cx="6659575" cy="3693983"/>
           </a:xfrm>
           <a:prstGeom prst="rect">
             <a:avLst/>
@@ -15138,14 +15954,14 @@
       </p:pic>
       <p:sp>
         <p:nvSpPr>
-          <p:cNvPr id="4" name="Text 1"/>
+          <p:cNvPr id="6" name="Text 3"/>
           <p:cNvSpPr/>
           <p:nvPr/>
         </p:nvSpPr>
         <p:spPr>
           <a:xfrm>
-            <a:off x="5349240" y="1005840"/>
-            <a:ext cx="6522415" cy="731520"/>
+            <a:off x="5349240" y="6089904"/>
+            <a:ext cx="6659575" cy="347472"/>
           </a:xfrm>
           <a:prstGeom prst="rect">
             <a:avLst/>
@@ -15154,68 +15970,24 @@
           <a:ln/>
         </p:spPr>
         <p:txBody>
-          <a:bodyPr wrap="square" lIns="0" tIns="0" rIns="0" bIns="0" rtlCol="0" anchor="ctr">
-            <a:normAutofit/>
-          </a:bodyPr>
+          <a:bodyPr wrap="square" lIns="0" tIns="0" rIns="0" bIns="0" rtlCol="0" anchor="ctr"/>
           <a:lstStyle/>
           <a:p>
             <a:pPr algn="ctr" indent="0" marL="0">
               <a:buNone/>
             </a:pPr>
             <a:r>
-              <a:rPr lang="en-US" sz="3600" b="1" dirty="0">
-                <a:solidFill>
-                  <a:srgbClr val="990011"/>
+              <a:rPr lang="en-US" sz="1600" i="1" dirty="0">
+                <a:solidFill>
+                  <a:srgbClr val="555555"/>
                 </a:solidFill>
                 <a:latin typeface="Times New Roman" pitchFamily="34" charset="0"/>
                 <a:ea typeface="Times New Roman" pitchFamily="34" charset="-122"/>
                 <a:cs typeface="Times New Roman" pitchFamily="34" charset="-120"/>
               </a:rPr>
-              <a:t>Expected Answer</a:t>
-            </a:r>
-            <a:endParaRPr lang="en-US" sz="3600" dirty="0"/>
-          </a:p>
-        </p:txBody>
-      </p:sp>
-      <p:sp>
-        <p:nvSpPr>
-          <p:cNvPr id="5" name="Text 2"/>
-          <p:cNvSpPr/>
-          <p:nvPr/>
-        </p:nvSpPr>
-        <p:spPr>
-          <a:xfrm>
-            <a:off x="5349240" y="1783080"/>
-            <a:ext cx="6522415" cy="4663440"/>
-          </a:xfrm>
-          <a:prstGeom prst="rect">
-            <a:avLst/>
-          </a:prstGeom>
-          <a:noFill/>
-          <a:ln/>
-        </p:spPr>
-        <p:txBody>
-          <a:bodyPr wrap="square" lIns="0" tIns="0" rIns="0" bIns="0" rtlCol="0" anchor="t"/>
-          <a:lstStyle/>
-          <a:p>
-            <a:pPr algn="l" indent="0" marL="0">
-              <a:spcAft>
-                <a:spcPts val="800"/>
-              </a:spcAft>
-              <a:buNone/>
-            </a:pPr>
-            <a:r>
-              <a:rPr lang="en-US" sz="4000" dirty="0">
-                <a:solidFill>
-                  <a:srgbClr val="111111"/>
-                </a:solidFill>
-                <a:latin typeface="Times New Roman" pitchFamily="34" charset="0"/>
-                <a:ea typeface="Times New Roman" pitchFamily="34" charset="-122"/>
-                <a:cs typeface="Times New Roman" pitchFamily="34" charset="-120"/>
-              </a:rPr>
-              <a:t>Grass for cattle; water of Lagdo for fishing and electricity.</a:t>
-            </a:r>
-            <a:endParaRPr lang="en-US" sz="4000" dirty="0"/>
+              <a:t>Illustration: a cotton field</a:t>
+            </a:r>
+            <a:endParaRPr lang="en-US" sz="1600" dirty="0"/>
           </a:p>
         </p:txBody>
       </p:sp>
@@ -15325,7 +16097,7 @@
                 <a:ea typeface="Calibri" pitchFamily="34" charset="-122"/>
                 <a:cs typeface="Calibri" pitchFamily="34" charset="-120"/>
               </a:rPr>
-              <a:t>REMEDIATION</a:t>
+              <a:t>BOARD SUMMARY</a:t>
             </a:r>
             <a:endParaRPr lang="en-US" sz="1400" dirty="0"/>
           </a:p>
@@ -15348,7 +16120,7 @@
         <p:spPr>
           <a:xfrm>
             <a:off x="0" y="658368"/>
-            <a:ext cx="2468880" cy="5833872"/>
+            <a:ext cx="5120640" cy="5833872"/>
           </a:xfrm>
           <a:prstGeom prst="rect">
             <a:avLst/>
@@ -15363,8 +16135,8 @@
         </p:nvSpPr>
         <p:spPr>
           <a:xfrm>
-            <a:off x="2697480" y="1005840"/>
-            <a:ext cx="9174175" cy="731520"/>
+            <a:off x="5349240" y="1005840"/>
+            <a:ext cx="6522415" cy="731520"/>
           </a:xfrm>
           <a:prstGeom prst="rect">
             <a:avLst/>
@@ -15390,7 +16162,7 @@
                 <a:ea typeface="Times New Roman" pitchFamily="34" charset="-122"/>
                 <a:cs typeface="Times New Roman" pitchFamily="34" charset="-120"/>
               </a:rPr>
-              <a:t>Remediation</a:t>
+              <a:t>2. Methods of Exploitation</a:t>
             </a:r>
             <a:endParaRPr lang="en-US" sz="3600" dirty="0"/>
           </a:p>
@@ -15404,8 +16176,8 @@
         </p:nvSpPr>
         <p:spPr>
           <a:xfrm>
-            <a:off x="2697480" y="1783080"/>
-            <a:ext cx="9174175" cy="4663440"/>
+            <a:off x="5349240" y="1783080"/>
+            <a:ext cx="6522415" cy="4663440"/>
           </a:xfrm>
           <a:prstGeom prst="rect">
             <a:avLst/>
@@ -15416,37 +16188,16 @@
         <p:txBody>
           <a:bodyPr wrap="square" lIns="0" tIns="0" rIns="0" bIns="0" rtlCol="0" anchor="t"/>
           <a:lstStyle/>
-          <a:p>
-            <a:pPr algn="l" indent="0" marL="0">
-              <a:spcAft>
-                <a:spcPts val="800"/>
-              </a:spcAft>
-              <a:buNone/>
-            </a:pPr>
-            <a:r>
-              <a:rPr lang="en-US" sz="4000" b="1" dirty="0">
-                <a:solidFill>
-                  <a:srgbClr val="111111"/>
-                </a:solidFill>
-                <a:latin typeface="Times New Roman" pitchFamily="34" charset="0"/>
-                <a:ea typeface="Times New Roman" pitchFamily="34" charset="-122"/>
-                <a:cs typeface="Times New Roman" pitchFamily="34" charset="-120"/>
-              </a:rPr>
-              <a:t>Fill in the blanks:</a:t>
-            </a:r>
-            <a:endParaRPr lang="en-US" sz="4000" dirty="0"/>
-          </a:p>
           <a:p>
             <a:pPr algn="l" marL="342900" indent="-342900">
               <a:spcAft>
                 <a:spcPts val="800"/>
               </a:spcAft>
               <a:buSzPct val="100000"/>
-              <a:buFont typeface="+mj-lt"/>
-              <a:buAutoNum type="arabicPeriod" startAt="1"/>
+              <a:buChar char="•"/>
             </a:pPr>
             <a:r>
-              <a:rPr lang="en-US" sz="4000" dirty="0">
+              <a:rPr lang="en-US" sz="4000" b="1" dirty="0">
                 <a:solidFill>
                   <a:srgbClr val="111111"/>
                 </a:solidFill>
@@ -15454,18 +16205,14 @@
                 <a:ea typeface="Times New Roman" pitchFamily="34" charset="-122"/>
                 <a:cs typeface="Times New Roman" pitchFamily="34" charset="-120"/>
               </a:rPr>
-              <a:t>Anything in nature that people can use is a ______.</a:t>
-            </a:r>
-            <a:endParaRPr lang="en-US" sz="4000" dirty="0"/>
-          </a:p>
-          <a:p>
+              <a:t>Wildlife: </a:t>
+            </a:r>
             <a:pPr algn="l" marL="342900" indent="-342900">
               <a:spcAft>
                 <a:spcPts val="800"/>
               </a:spcAft>
               <a:buSzPct val="100000"/>
-              <a:buFont typeface="+mj-lt"/>
-              <a:buAutoNum type="arabicPeriod" startAt="1"/>
+              <a:buChar char="•"/>
             </a:pPr>
             <a:r>
               <a:rPr lang="en-US" sz="4000" dirty="0">
@@ -15476,29 +16223,7 @@
                 <a:ea typeface="Times New Roman" pitchFamily="34" charset="-122"/>
                 <a:cs typeface="Times New Roman" pitchFamily="34" charset="-120"/>
               </a:rPr>
-              <a:t>The grass is used to feed ______.</a:t>
-            </a:r>
-            <a:endParaRPr lang="en-US" sz="4000" dirty="0"/>
-          </a:p>
-          <a:p>
-            <a:pPr algn="l" marL="342900" indent="-342900">
-              <a:spcAft>
-                <a:spcPts val="800"/>
-              </a:spcAft>
-              <a:buSzPct val="100000"/>
-              <a:buFont typeface="+mj-lt"/>
-              <a:buAutoNum type="arabicPeriod" startAt="1"/>
-            </a:pPr>
-            <a:r>
-              <a:rPr lang="en-US" sz="4000" dirty="0">
-                <a:solidFill>
-                  <a:srgbClr val="111111"/>
-                </a:solidFill>
-                <a:latin typeface="Times New Roman" pitchFamily="34" charset="0"/>
-                <a:ea typeface="Times New Roman" pitchFamily="34" charset="-122"/>
-                <a:cs typeface="Times New Roman" pitchFamily="34" charset="-120"/>
-              </a:rPr>
-              <a:t>The Lagdo dam produces fish and ______.</a:t>
+              <a:t>National parks receive tourists.</a:t>
             </a:r>
             <a:endParaRPr lang="en-US" sz="4000" dirty="0"/>
           </a:p>
@@ -15610,15 +16335,117 @@
                 <a:ea typeface="Calibri" pitchFamily="34" charset="-122"/>
                 <a:cs typeface="Calibri" pitchFamily="34" charset="-120"/>
               </a:rPr>
-              <a:t>HOMEWORK</a:t>
+              <a:t>BOARD SUMMARY</a:t>
             </a:r>
             <a:endParaRPr lang="en-US" sz="1400" dirty="0"/>
+          </a:p>
+        </p:txBody>
+      </p:sp>
+      <p:sp>
+        <p:nvSpPr>
+          <p:cNvPr id="3" name="Text 1"/>
+          <p:cNvSpPr/>
+          <p:nvPr/>
+        </p:nvSpPr>
+        <p:spPr>
+          <a:xfrm>
+            <a:off x="365760" y="1005840"/>
+            <a:ext cx="11460175" cy="731520"/>
+          </a:xfrm>
+          <a:prstGeom prst="rect">
+            <a:avLst/>
+          </a:prstGeom>
+          <a:noFill/>
+          <a:ln/>
+        </p:spPr>
+        <p:txBody>
+          <a:bodyPr wrap="square" lIns="0" tIns="0" rIns="0" bIns="0" rtlCol="0" anchor="ctr">
+            <a:normAutofit/>
+          </a:bodyPr>
+          <a:lstStyle/>
+          <a:p>
+            <a:pPr algn="ctr" indent="0" marL="0">
+              <a:buNone/>
+            </a:pPr>
+            <a:r>
+              <a:rPr lang="en-US" sz="3600" b="1" dirty="0">
+                <a:solidFill>
+                  <a:srgbClr val="990011"/>
+                </a:solidFill>
+                <a:latin typeface="Times New Roman" pitchFamily="34" charset="0"/>
+                <a:ea typeface="Times New Roman" pitchFamily="34" charset="-122"/>
+                <a:cs typeface="Times New Roman" pitchFamily="34" charset="-120"/>
+              </a:rPr>
+              <a:t>2. Methods of Exploitation</a:t>
+            </a:r>
+            <a:endParaRPr lang="en-US" sz="3600" dirty="0"/>
+          </a:p>
+        </p:txBody>
+      </p:sp>
+      <p:sp>
+        <p:nvSpPr>
+          <p:cNvPr id="4" name="Text 2"/>
+          <p:cNvSpPr/>
+          <p:nvPr/>
+        </p:nvSpPr>
+        <p:spPr>
+          <a:xfrm>
+            <a:off x="365760" y="1783080"/>
+            <a:ext cx="4846320" cy="4617720"/>
+          </a:xfrm>
+          <a:prstGeom prst="rect">
+            <a:avLst/>
+          </a:prstGeom>
+          <a:noFill/>
+          <a:ln/>
+        </p:spPr>
+        <p:txBody>
+          <a:bodyPr wrap="square" lIns="0" tIns="0" rIns="0" bIns="0" rtlCol="0" anchor="t"/>
+          <a:lstStyle/>
+          <a:p>
+            <a:pPr algn="l" marL="342900" indent="-342900">
+              <a:spcAft>
+                <a:spcPts val="800"/>
+              </a:spcAft>
+              <a:buSzPct val="100000"/>
+              <a:buChar char="•"/>
+            </a:pPr>
+            <a:r>
+              <a:rPr lang="en-US" sz="3600" b="1" dirty="0">
+                <a:solidFill>
+                  <a:srgbClr val="111111"/>
+                </a:solidFill>
+                <a:latin typeface="Times New Roman" pitchFamily="34" charset="0"/>
+                <a:ea typeface="Times New Roman" pitchFamily="34" charset="-122"/>
+                <a:cs typeface="Times New Roman" pitchFamily="34" charset="-120"/>
+              </a:rPr>
+              <a:t>Water: </a:t>
+            </a:r>
+            <a:pPr algn="l" marL="342900" indent="-342900">
+              <a:spcAft>
+                <a:spcPts val="800"/>
+              </a:spcAft>
+              <a:buSzPct val="100000"/>
+              <a:buChar char="•"/>
+            </a:pPr>
+            <a:r>
+              <a:rPr lang="en-US" sz="3600" dirty="0">
+                <a:solidFill>
+                  <a:srgbClr val="111111"/>
+                </a:solidFill>
+                <a:latin typeface="Times New Roman" pitchFamily="34" charset="0"/>
+                <a:ea typeface="Times New Roman" pitchFamily="34" charset="-122"/>
+                <a:cs typeface="Times New Roman" pitchFamily="34" charset="-120"/>
+              </a:rPr>
+              <a:t>Dams, irrigation and fishing.</a:t>
+            </a:r>
+            <a:endParaRPr lang="en-US" sz="3600" dirty="0"/>
           </a:p>
         </p:txBody>
       </p:sp>
       <p:pic>
         <p:nvPicPr>
-          <p:cNvPr id="3" name="Image 0" descr="/home/claude/f4/img/minesec_sheet.png">    </p:cNvPr>
+          <p:cNvPr id="5" name="Image 0" descr="/home/claude/f4/img/v2/f2t_lagdo.jpg">    </p:cNvPr>
           <p:cNvPicPr>
             <a:picLocks noChangeAspect="1"/>
           </p:cNvPicPr>
@@ -15632,8 +16459,8 @@
         </p:blipFill>
         <p:spPr>
           <a:xfrm>
-            <a:off x="0" y="658368"/>
-            <a:ext cx="5120640" cy="5833872"/>
+            <a:off x="5349240" y="2071212"/>
+            <a:ext cx="6659575" cy="3693983"/>
           </a:xfrm>
           <a:prstGeom prst="rect">
             <a:avLst/>
@@ -15642,14 +16469,14 @@
       </p:pic>
       <p:sp>
         <p:nvSpPr>
-          <p:cNvPr id="4" name="Text 1"/>
+          <p:cNvPr id="6" name="Text 3"/>
           <p:cNvSpPr/>
           <p:nvPr/>
         </p:nvSpPr>
         <p:spPr>
           <a:xfrm>
-            <a:off x="5349240" y="1005840"/>
-            <a:ext cx="6522415" cy="731520"/>
+            <a:off x="5349240" y="6089904"/>
+            <a:ext cx="6659575" cy="347472"/>
           </a:xfrm>
           <a:prstGeom prst="rect">
             <a:avLst/>
@@ -15658,68 +16485,24 @@
           <a:ln/>
         </p:spPr>
         <p:txBody>
-          <a:bodyPr wrap="square" lIns="0" tIns="0" rIns="0" bIns="0" rtlCol="0" anchor="ctr">
-            <a:normAutofit/>
-          </a:bodyPr>
+          <a:bodyPr wrap="square" lIns="0" tIns="0" rIns="0" bIns="0" rtlCol="0" anchor="ctr"/>
           <a:lstStyle/>
           <a:p>
             <a:pPr algn="ctr" indent="0" marL="0">
               <a:buNone/>
             </a:pPr>
             <a:r>
-              <a:rPr lang="en-US" sz="3600" b="1" dirty="0">
-                <a:solidFill>
-                  <a:srgbClr val="990011"/>
+              <a:rPr lang="en-US" sz="1600" i="1" dirty="0">
+                <a:solidFill>
+                  <a:srgbClr val="555555"/>
                 </a:solidFill>
                 <a:latin typeface="Times New Roman" pitchFamily="34" charset="0"/>
                 <a:ea typeface="Times New Roman" pitchFamily="34" charset="-122"/>
                 <a:cs typeface="Times New Roman" pitchFamily="34" charset="-120"/>
               </a:rPr>
-              <a:t>Homework</a:t>
-            </a:r>
-            <a:endParaRPr lang="en-US" sz="3600" dirty="0"/>
-          </a:p>
-        </p:txBody>
-      </p:sp>
-      <p:sp>
-        <p:nvSpPr>
-          <p:cNvPr id="5" name="Text 2"/>
-          <p:cNvSpPr/>
-          <p:nvPr/>
-        </p:nvSpPr>
-        <p:spPr>
-          <a:xfrm>
-            <a:off x="5349240" y="1783080"/>
-            <a:ext cx="6522415" cy="4663440"/>
-          </a:xfrm>
-          <a:prstGeom prst="rect">
-            <a:avLst/>
-          </a:prstGeom>
-          <a:noFill/>
-          <a:ln/>
-        </p:spPr>
-        <p:txBody>
-          <a:bodyPr wrap="square" lIns="0" tIns="0" rIns="0" bIns="0" rtlCol="0" anchor="t"/>
-          <a:lstStyle/>
-          <a:p>
-            <a:pPr algn="l" indent="0" marL="0">
-              <a:spcAft>
-                <a:spcPts val="800"/>
-              </a:spcAft>
-              <a:buNone/>
-            </a:pPr>
-            <a:r>
-              <a:rPr lang="en-US" sz="4000" dirty="0">
-                <a:solidFill>
-                  <a:srgbClr val="111111"/>
-                </a:solidFill>
-                <a:latin typeface="Times New Roman" pitchFamily="34" charset="0"/>
-                <a:ea typeface="Times New Roman" pitchFamily="34" charset="-122"/>
-                <a:cs typeface="Times New Roman" pitchFamily="34" charset="-120"/>
-              </a:rPr>
-              <a:t>Ask a farmer or a herder in your area about his work: what he produces, which tools he uses and where he sells his products.</a:t>
-            </a:r>
-            <a:endParaRPr lang="en-US" sz="4000" dirty="0"/>
+              <a:t>Illustration: the Lagdo dam</a:t>
+            </a:r>
+            <a:endParaRPr lang="en-US" sz="1600" dirty="0"/>
           </a:p>
         </p:txBody>
       </p:sp>
@@ -15829,7 +16612,7 @@
                 <a:ea typeface="Calibri" pitchFamily="34" charset="-122"/>
                 <a:cs typeface="Calibri" pitchFamily="34" charset="-120"/>
               </a:rPr>
-              <a:t>NEXT LESSON</a:t>
+              <a:t>BOARD SUMMARY</a:t>
             </a:r>
             <a:endParaRPr lang="en-US" sz="1400" dirty="0"/>
           </a:p>
@@ -15894,7 +16677,7 @@
                 <a:ea typeface="Times New Roman" pitchFamily="34" charset="-122"/>
                 <a:cs typeface="Times New Roman" pitchFamily="34" charset="-120"/>
               </a:rPr>
-              <a:t>Next Lesson</a:t>
+              <a:t>2. Methods of Exploitation</a:t>
             </a:r>
             <a:endParaRPr lang="en-US" sz="3600" dirty="0"/>
           </a:p>
@@ -15918,14 +16701,15 @@
           <a:ln/>
         </p:spPr>
         <p:txBody>
-          <a:bodyPr wrap="square" lIns="0" tIns="0" rIns="0" bIns="0" rtlCol="0" anchor="ctr"/>
-          <a:lstStyle/>
-          <a:p>
-            <a:pPr algn="ctr" indent="0" marL="0">
+          <a:bodyPr wrap="square" lIns="0" tIns="0" rIns="0" bIns="0" rtlCol="0" anchor="t"/>
+          <a:lstStyle/>
+          <a:p>
+            <a:pPr algn="l" marL="342900" indent="-342900">
               <a:spcAft>
                 <a:spcPts val="800"/>
               </a:spcAft>
-              <a:buNone/>
+              <a:buSzPct val="100000"/>
+              <a:buChar char="•"/>
             </a:pPr>
             <a:r>
               <a:rPr lang="en-US" sz="4000" b="1" dirty="0">
@@ -15936,27 +16720,25 @@
                 <a:ea typeface="Times New Roman" pitchFamily="34" charset="-122"/>
                 <a:cs typeface="Times New Roman" pitchFamily="34" charset="-120"/>
               </a:rPr>
-              <a:t>Our next lesson will be on:</a:t>
-            </a:r>
-            <a:endParaRPr lang="en-US" sz="4000" dirty="0"/>
-          </a:p>
-          <a:p>
-            <a:pPr algn="ctr" indent="0" marL="0">
+              <a:t>Wood: </a:t>
+            </a:r>
+            <a:pPr algn="l" marL="342900" indent="-342900">
               <a:spcAft>
                 <a:spcPts val="800"/>
               </a:spcAft>
-              <a:buNone/>
+              <a:buSzPct val="100000"/>
+              <a:buChar char="•"/>
             </a:pPr>
             <a:r>
-              <a:rPr lang="en-US" sz="4000" b="1" dirty="0">
-                <a:solidFill>
-                  <a:srgbClr val="990011"/>
+              <a:rPr lang="en-US" sz="4000" dirty="0">
+                <a:solidFill>
+                  <a:srgbClr val="111111"/>
                 </a:solidFill>
                 <a:latin typeface="Times New Roman" pitchFamily="34" charset="0"/>
                 <a:ea typeface="Times New Roman" pitchFamily="34" charset="-122"/>
                 <a:cs typeface="Times New Roman" pitchFamily="34" charset="-120"/>
               </a:rPr>
-              <a:t>Lesson 2 (Part 4): The Tropical Grassland Region: Human Activities</a:t>
+              <a:t>Trees are cut and burnt into charcoal.</a:t>
             </a:r>
             <a:endParaRPr lang="en-US" sz="4000" dirty="0"/>
           </a:p>
@@ -16068,6 +16850,1844 @@
                 <a:ea typeface="Calibri" pitchFamily="34" charset="-122"/>
                 <a:cs typeface="Calibri" pitchFamily="34" charset="-120"/>
               </a:rPr>
+              <a:t>FORMATIVE EVALUATION</a:t>
+            </a:r>
+            <a:endParaRPr lang="en-US" sz="1400" dirty="0"/>
+          </a:p>
+        </p:txBody>
+      </p:sp>
+      <p:pic>
+        <p:nvPicPr>
+          <p:cNvPr id="3" name="Image 0" descr="/home/claude/f4/img/minesec_sheet.png">    </p:cNvPr>
+          <p:cNvPicPr>
+            <a:picLocks noChangeAspect="1"/>
+          </p:cNvPicPr>
+          <p:nvPr/>
+        </p:nvPicPr>
+        <p:blipFill>
+          <a:blip r:embed="rId1"/>
+          <a:stretch>
+            <a:fillRect/>
+          </a:stretch>
+        </p:blipFill>
+        <p:spPr>
+          <a:xfrm>
+            <a:off x="0" y="658368"/>
+            <a:ext cx="5120640" cy="5833872"/>
+          </a:xfrm>
+          <a:prstGeom prst="rect">
+            <a:avLst/>
+          </a:prstGeom>
+        </p:spPr>
+      </p:pic>
+      <p:sp>
+        <p:nvSpPr>
+          <p:cNvPr id="4" name="Text 1"/>
+          <p:cNvSpPr/>
+          <p:nvPr/>
+        </p:nvSpPr>
+        <p:spPr>
+          <a:xfrm>
+            <a:off x="5349240" y="1005840"/>
+            <a:ext cx="6522415" cy="731520"/>
+          </a:xfrm>
+          <a:prstGeom prst="rect">
+            <a:avLst/>
+          </a:prstGeom>
+          <a:noFill/>
+          <a:ln/>
+        </p:spPr>
+        <p:txBody>
+          <a:bodyPr wrap="square" lIns="0" tIns="0" rIns="0" bIns="0" rtlCol="0" anchor="ctr">
+            <a:normAutofit/>
+          </a:bodyPr>
+          <a:lstStyle/>
+          <a:p>
+            <a:pPr algn="ctr" indent="0" marL="0">
+              <a:buNone/>
+            </a:pPr>
+            <a:r>
+              <a:rPr lang="en-US" sz="3600" b="1" dirty="0">
+                <a:solidFill>
+                  <a:srgbClr val="990011"/>
+                </a:solidFill>
+                <a:latin typeface="Times New Roman" pitchFamily="34" charset="0"/>
+                <a:ea typeface="Times New Roman" pitchFamily="34" charset="-122"/>
+                <a:cs typeface="Times New Roman" pitchFamily="34" charset="-120"/>
+              </a:rPr>
+              <a:t>Evaluation 1</a:t>
+            </a:r>
+            <a:endParaRPr lang="en-US" sz="3600" dirty="0"/>
+          </a:p>
+        </p:txBody>
+      </p:sp>
+      <p:sp>
+        <p:nvSpPr>
+          <p:cNvPr id="5" name="Text 2"/>
+          <p:cNvSpPr/>
+          <p:nvPr/>
+        </p:nvSpPr>
+        <p:spPr>
+          <a:xfrm>
+            <a:off x="5349240" y="1783080"/>
+            <a:ext cx="6522415" cy="4663440"/>
+          </a:xfrm>
+          <a:prstGeom prst="rect">
+            <a:avLst/>
+          </a:prstGeom>
+          <a:noFill/>
+          <a:ln/>
+        </p:spPr>
+        <p:txBody>
+          <a:bodyPr wrap="square" lIns="0" tIns="0" rIns="0" bIns="0" rtlCol="0" anchor="t"/>
+          <a:lstStyle/>
+          <a:p>
+            <a:pPr algn="l" indent="0" marL="0">
+              <a:spcAft>
+                <a:spcPts val="800"/>
+              </a:spcAft>
+              <a:buNone/>
+            </a:pPr>
+            <a:r>
+              <a:rPr lang="en-US" sz="4000" dirty="0">
+                <a:solidFill>
+                  <a:srgbClr val="111111"/>
+                </a:solidFill>
+                <a:latin typeface="Times New Roman" pitchFamily="34" charset="0"/>
+                <a:ea typeface="Times New Roman" pitchFamily="34" charset="-122"/>
+                <a:cs typeface="Times New Roman" pitchFamily="34" charset="-120"/>
+              </a:rPr>
+              <a:t>What is a resource?</a:t>
+            </a:r>
+            <a:endParaRPr lang="en-US" sz="4000" dirty="0"/>
+          </a:p>
+        </p:txBody>
+      </p:sp>
+      <p:sp>
+        <p:nvSpPr>
+          <p:cNvPr id="25" name="Slide Number Placeholder 0"/>
+          <p:cNvSpPr>
+            <a:spLocks noGrp="1"/>
+          </p:cNvSpPr>
+          <p:nvPr>
+            <p:ph type="sldNum" sz="quarter" idx="4294967295"/>
+          </p:nvPr>
+        </p:nvSpPr>
+        <p:spPr>
+          <a:xfrm>
+            <a:off x="27432" y="91440"/>
+            <a:ext cx="585216" cy="475488"/>
+          </a:xfrm>
+          <a:prstGeom prst="rect">
+            <a:avLst/>
+          </a:prstGeom>
+          <a:extLst>
+            <a:ext uri="{C572A759-6A51-4108-AA02-DFA0A04FC94B}">
+              <ma14:wrappingTextBoxFlag xmlns:ma14="http://schemas.microsoft.com/office/mac/drawingml/2011/main" val="0"/>
+            </a:ext>
+          </a:extLst>
+        </p:spPr>
+        <p:txBody>
+          <a:bodyPr/>
+          <a:lstStyle>
+            <a:lvl1pPr>
+              <a:defRPr sz="2000">
+                <a:solidFill>
+                  <a:srgbClr val="FFFFFF"/>
+                </a:solidFill>
+                <a:latin typeface="Calibri"/>
+                <a:ea typeface="Calibri"/>
+                <a:cs typeface="Calibri"/>
+              </a:defRPr>
+            </a:lvl1pPr>
+          </a:lstStyle>
+          <a:p>
+            <a:pPr algn="ctr"/>
+            <a:fld id="{F7021451-1387-4CA6-816F-3879F97B5CBC}" type="slidenum">
+              <a:rPr b="1" lang="en-US"/>
+              <a:t>45</a:t>
+            </a:fld>
+            <a:endParaRPr lang="en-US"/>
+          </a:p>
+        </p:txBody>
+      </p:sp>
+    </p:spTree>
+  </p:cSld>
+  <p:clrMapOvr>
+    <a:masterClrMapping/>
+  </p:clrMapOvr>
+</p:sld>
+</file>
+
+<file path=ppt/slides/slide46.xml><?xml version="1.0" encoding="utf-8"?>
+<p:sld xmlns:a="http://schemas.openxmlformats.org/drawingml/2006/main" xmlns:r="http://schemas.openxmlformats.org/officeDocument/2006/relationships" xmlns:p="http://schemas.openxmlformats.org/presentationml/2006/main">
+  <p:cSld name="Slide 46">
+    <p:spTree>
+      <p:nvGrpSpPr>
+        <p:cNvPr id="1" name=""/>
+        <p:cNvGrpSpPr/>
+        <p:nvPr/>
+      </p:nvGrpSpPr>
+      <p:grpSpPr>
+        <a:xfrm>
+          <a:off x="0" y="0"/>
+          <a:ext cx="0" cy="0"/>
+          <a:chOff x="0" y="0"/>
+          <a:chExt cx="0" cy="0"/>
+        </a:xfrm>
+      </p:grpSpPr>
+      <p:sp>
+        <p:nvSpPr>
+          <p:cNvPr id="2" name="Text 0"/>
+          <p:cNvSpPr/>
+          <p:nvPr/>
+        </p:nvSpPr>
+        <p:spPr>
+          <a:xfrm>
+            <a:off x="457200" y="713232"/>
+            <a:ext cx="11368735" cy="274320"/>
+          </a:xfrm>
+          <a:prstGeom prst="rect">
+            <a:avLst/>
+          </a:prstGeom>
+          <a:noFill/>
+          <a:ln/>
+        </p:spPr>
+        <p:txBody>
+          <a:bodyPr wrap="square" lIns="0" tIns="0" rIns="0" bIns="0" rtlCol="0" anchor="ctr"/>
+          <a:lstStyle/>
+          <a:p>
+            <a:pPr algn="r" indent="0" marL="0">
+              <a:buNone/>
+            </a:pPr>
+            <a:r>
+              <a:rPr lang="en-US" sz="1400" b="1" dirty="0">
+                <a:solidFill>
+                  <a:srgbClr val="1C3F6E"/>
+                </a:solidFill>
+                <a:latin typeface="Calibri" pitchFamily="34" charset="0"/>
+                <a:ea typeface="Calibri" pitchFamily="34" charset="-122"/>
+                <a:cs typeface="Calibri" pitchFamily="34" charset="-120"/>
+              </a:rPr>
+              <a:t>FORMATIVE EVALUATION</a:t>
+            </a:r>
+            <a:endParaRPr lang="en-US" sz="1400" dirty="0"/>
+          </a:p>
+        </p:txBody>
+      </p:sp>
+      <p:pic>
+        <p:nvPicPr>
+          <p:cNvPr id="3" name="Image 0" descr="/home/claude/f4/img/minesec_sheet.png">    </p:cNvPr>
+          <p:cNvPicPr>
+            <a:picLocks noChangeAspect="1"/>
+          </p:cNvPicPr>
+          <p:nvPr/>
+        </p:nvPicPr>
+        <p:blipFill>
+          <a:blip r:embed="rId1"/>
+          <a:stretch>
+            <a:fillRect/>
+          </a:stretch>
+        </p:blipFill>
+        <p:spPr>
+          <a:xfrm>
+            <a:off x="0" y="658368"/>
+            <a:ext cx="5120640" cy="5833872"/>
+          </a:xfrm>
+          <a:prstGeom prst="rect">
+            <a:avLst/>
+          </a:prstGeom>
+        </p:spPr>
+      </p:pic>
+      <p:sp>
+        <p:nvSpPr>
+          <p:cNvPr id="4" name="Text 1"/>
+          <p:cNvSpPr/>
+          <p:nvPr/>
+        </p:nvSpPr>
+        <p:spPr>
+          <a:xfrm>
+            <a:off x="5349240" y="1005840"/>
+            <a:ext cx="6522415" cy="731520"/>
+          </a:xfrm>
+          <a:prstGeom prst="rect">
+            <a:avLst/>
+          </a:prstGeom>
+          <a:noFill/>
+          <a:ln/>
+        </p:spPr>
+        <p:txBody>
+          <a:bodyPr wrap="square" lIns="0" tIns="0" rIns="0" bIns="0" rtlCol="0" anchor="ctr">
+            <a:normAutofit/>
+          </a:bodyPr>
+          <a:lstStyle/>
+          <a:p>
+            <a:pPr algn="ctr" indent="0" marL="0">
+              <a:buNone/>
+            </a:pPr>
+            <a:r>
+              <a:rPr lang="en-US" sz="3600" b="1" dirty="0">
+                <a:solidFill>
+                  <a:srgbClr val="990011"/>
+                </a:solidFill>
+                <a:latin typeface="Times New Roman" pitchFamily="34" charset="0"/>
+                <a:ea typeface="Times New Roman" pitchFamily="34" charset="-122"/>
+                <a:cs typeface="Times New Roman" pitchFamily="34" charset="-120"/>
+              </a:rPr>
+              <a:t>Expected Answer</a:t>
+            </a:r>
+            <a:endParaRPr lang="en-US" sz="3600" dirty="0"/>
+          </a:p>
+        </p:txBody>
+      </p:sp>
+      <p:sp>
+        <p:nvSpPr>
+          <p:cNvPr id="5" name="Text 2"/>
+          <p:cNvSpPr/>
+          <p:nvPr/>
+        </p:nvSpPr>
+        <p:spPr>
+          <a:xfrm>
+            <a:off x="5349240" y="1783080"/>
+            <a:ext cx="6522415" cy="4663440"/>
+          </a:xfrm>
+          <a:prstGeom prst="rect">
+            <a:avLst/>
+          </a:prstGeom>
+          <a:noFill/>
+          <a:ln/>
+        </p:spPr>
+        <p:txBody>
+          <a:bodyPr wrap="square" lIns="0" tIns="0" rIns="0" bIns="0" rtlCol="0" anchor="t"/>
+          <a:lstStyle/>
+          <a:p>
+            <a:pPr algn="l" indent="0" marL="0">
+              <a:spcAft>
+                <a:spcPts val="800"/>
+              </a:spcAft>
+              <a:buNone/>
+            </a:pPr>
+            <a:r>
+              <a:rPr lang="en-US" sz="4000" dirty="0">
+                <a:solidFill>
+                  <a:srgbClr val="111111"/>
+                </a:solidFill>
+                <a:latin typeface="Times New Roman" pitchFamily="34" charset="0"/>
+                <a:ea typeface="Times New Roman" pitchFamily="34" charset="-122"/>
+                <a:cs typeface="Times New Roman" pitchFamily="34" charset="-120"/>
+              </a:rPr>
+              <a:t>It is anything in nature that people can use.</a:t>
+            </a:r>
+            <a:endParaRPr lang="en-US" sz="4000" dirty="0"/>
+          </a:p>
+        </p:txBody>
+      </p:sp>
+      <p:sp>
+        <p:nvSpPr>
+          <p:cNvPr id="25" name="Slide Number Placeholder 0"/>
+          <p:cNvSpPr>
+            <a:spLocks noGrp="1"/>
+          </p:cNvSpPr>
+          <p:nvPr>
+            <p:ph type="sldNum" sz="quarter" idx="4294967295"/>
+          </p:nvPr>
+        </p:nvSpPr>
+        <p:spPr>
+          <a:xfrm>
+            <a:off x="27432" y="91440"/>
+            <a:ext cx="585216" cy="475488"/>
+          </a:xfrm>
+          <a:prstGeom prst="rect">
+            <a:avLst/>
+          </a:prstGeom>
+          <a:extLst>
+            <a:ext uri="{C572A759-6A51-4108-AA02-DFA0A04FC94B}">
+              <ma14:wrappingTextBoxFlag xmlns:ma14="http://schemas.microsoft.com/office/mac/drawingml/2011/main" val="0"/>
+            </a:ext>
+          </a:extLst>
+        </p:spPr>
+        <p:txBody>
+          <a:bodyPr/>
+          <a:lstStyle>
+            <a:lvl1pPr>
+              <a:defRPr sz="2000">
+                <a:solidFill>
+                  <a:srgbClr val="FFFFFF"/>
+                </a:solidFill>
+                <a:latin typeface="Calibri"/>
+                <a:ea typeface="Calibri"/>
+                <a:cs typeface="Calibri"/>
+              </a:defRPr>
+            </a:lvl1pPr>
+          </a:lstStyle>
+          <a:p>
+            <a:pPr algn="ctr"/>
+            <a:fld id="{F7021451-1387-4CA6-816F-3879F97B5CBC}" type="slidenum">
+              <a:rPr b="1" lang="en-US"/>
+              <a:t>46</a:t>
+            </a:fld>
+            <a:endParaRPr lang="en-US"/>
+          </a:p>
+        </p:txBody>
+      </p:sp>
+    </p:spTree>
+  </p:cSld>
+  <p:clrMapOvr>
+    <a:masterClrMapping/>
+  </p:clrMapOvr>
+</p:sld>
+</file>
+
+<file path=ppt/slides/slide47.xml><?xml version="1.0" encoding="utf-8"?>
+<p:sld xmlns:a="http://schemas.openxmlformats.org/drawingml/2006/main" xmlns:r="http://schemas.openxmlformats.org/officeDocument/2006/relationships" xmlns:p="http://schemas.openxmlformats.org/presentationml/2006/main">
+  <p:cSld name="Slide 47">
+    <p:spTree>
+      <p:nvGrpSpPr>
+        <p:cNvPr id="1" name=""/>
+        <p:cNvGrpSpPr/>
+        <p:nvPr/>
+      </p:nvGrpSpPr>
+      <p:grpSpPr>
+        <a:xfrm>
+          <a:off x="0" y="0"/>
+          <a:ext cx="0" cy="0"/>
+          <a:chOff x="0" y="0"/>
+          <a:chExt cx="0" cy="0"/>
+        </a:xfrm>
+      </p:grpSpPr>
+      <p:sp>
+        <p:nvSpPr>
+          <p:cNvPr id="2" name="Text 0"/>
+          <p:cNvSpPr/>
+          <p:nvPr/>
+        </p:nvSpPr>
+        <p:spPr>
+          <a:xfrm>
+            <a:off x="457200" y="713232"/>
+            <a:ext cx="11368735" cy="274320"/>
+          </a:xfrm>
+          <a:prstGeom prst="rect">
+            <a:avLst/>
+          </a:prstGeom>
+          <a:noFill/>
+          <a:ln/>
+        </p:spPr>
+        <p:txBody>
+          <a:bodyPr wrap="square" lIns="0" tIns="0" rIns="0" bIns="0" rtlCol="0" anchor="ctr"/>
+          <a:lstStyle/>
+          <a:p>
+            <a:pPr algn="r" indent="0" marL="0">
+              <a:buNone/>
+            </a:pPr>
+            <a:r>
+              <a:rPr lang="en-US" sz="1400" b="1" dirty="0">
+                <a:solidFill>
+                  <a:srgbClr val="1C3F6E"/>
+                </a:solidFill>
+                <a:latin typeface="Calibri" pitchFamily="34" charset="0"/>
+                <a:ea typeface="Calibri" pitchFamily="34" charset="-122"/>
+                <a:cs typeface="Calibri" pitchFamily="34" charset="-120"/>
+              </a:rPr>
+              <a:t>FORMATIVE EVALUATION</a:t>
+            </a:r>
+            <a:endParaRPr lang="en-US" sz="1400" dirty="0"/>
+          </a:p>
+        </p:txBody>
+      </p:sp>
+      <p:pic>
+        <p:nvPicPr>
+          <p:cNvPr id="3" name="Image 0" descr="/home/claude/f4/img/minesec_sheet.png">    </p:cNvPr>
+          <p:cNvPicPr>
+            <a:picLocks noChangeAspect="1"/>
+          </p:cNvPicPr>
+          <p:nvPr/>
+        </p:nvPicPr>
+        <p:blipFill>
+          <a:blip r:embed="rId1"/>
+          <a:stretch>
+            <a:fillRect/>
+          </a:stretch>
+        </p:blipFill>
+        <p:spPr>
+          <a:xfrm>
+            <a:off x="0" y="658368"/>
+            <a:ext cx="5120640" cy="5833872"/>
+          </a:xfrm>
+          <a:prstGeom prst="rect">
+            <a:avLst/>
+          </a:prstGeom>
+        </p:spPr>
+      </p:pic>
+      <p:sp>
+        <p:nvSpPr>
+          <p:cNvPr id="4" name="Text 1"/>
+          <p:cNvSpPr/>
+          <p:nvPr/>
+        </p:nvSpPr>
+        <p:spPr>
+          <a:xfrm>
+            <a:off x="5349240" y="1005840"/>
+            <a:ext cx="6522415" cy="731520"/>
+          </a:xfrm>
+          <a:prstGeom prst="rect">
+            <a:avLst/>
+          </a:prstGeom>
+          <a:noFill/>
+          <a:ln/>
+        </p:spPr>
+        <p:txBody>
+          <a:bodyPr wrap="square" lIns="0" tIns="0" rIns="0" bIns="0" rtlCol="0" anchor="ctr">
+            <a:normAutofit/>
+          </a:bodyPr>
+          <a:lstStyle/>
+          <a:p>
+            <a:pPr algn="ctr" indent="0" marL="0">
+              <a:buNone/>
+            </a:pPr>
+            <a:r>
+              <a:rPr lang="en-US" sz="3600" b="1" dirty="0">
+                <a:solidFill>
+                  <a:srgbClr val="990011"/>
+                </a:solidFill>
+                <a:latin typeface="Times New Roman" pitchFamily="34" charset="0"/>
+                <a:ea typeface="Times New Roman" pitchFamily="34" charset="-122"/>
+                <a:cs typeface="Times New Roman" pitchFamily="34" charset="-120"/>
+              </a:rPr>
+              <a:t>Evaluation 2</a:t>
+            </a:r>
+            <a:endParaRPr lang="en-US" sz="3600" dirty="0"/>
+          </a:p>
+        </p:txBody>
+      </p:sp>
+      <p:sp>
+        <p:nvSpPr>
+          <p:cNvPr id="5" name="Text 2"/>
+          <p:cNvSpPr/>
+          <p:nvPr/>
+        </p:nvSpPr>
+        <p:spPr>
+          <a:xfrm>
+            <a:off x="5349240" y="1783080"/>
+            <a:ext cx="6522415" cy="4663440"/>
+          </a:xfrm>
+          <a:prstGeom prst="rect">
+            <a:avLst/>
+          </a:prstGeom>
+          <a:noFill/>
+          <a:ln/>
+        </p:spPr>
+        <p:txBody>
+          <a:bodyPr wrap="square" lIns="0" tIns="0" rIns="0" bIns="0" rtlCol="0" anchor="t"/>
+          <a:lstStyle/>
+          <a:p>
+            <a:pPr algn="l" indent="0" marL="0">
+              <a:spcAft>
+                <a:spcPts val="800"/>
+              </a:spcAft>
+              <a:buNone/>
+            </a:pPr>
+            <a:r>
+              <a:rPr lang="en-US" sz="4000" dirty="0">
+                <a:solidFill>
+                  <a:srgbClr val="111111"/>
+                </a:solidFill>
+                <a:latin typeface="Times New Roman" pitchFamily="34" charset="0"/>
+                <a:ea typeface="Times New Roman" pitchFamily="34" charset="-122"/>
+                <a:cs typeface="Times New Roman" pitchFamily="34" charset="-120"/>
+              </a:rPr>
+              <a:t>Give two resources of the savanna and how they are used.</a:t>
+            </a:r>
+            <a:endParaRPr lang="en-US" sz="4000" dirty="0"/>
+          </a:p>
+        </p:txBody>
+      </p:sp>
+      <p:sp>
+        <p:nvSpPr>
+          <p:cNvPr id="25" name="Slide Number Placeholder 0"/>
+          <p:cNvSpPr>
+            <a:spLocks noGrp="1"/>
+          </p:cNvSpPr>
+          <p:nvPr>
+            <p:ph type="sldNum" sz="quarter" idx="4294967295"/>
+          </p:nvPr>
+        </p:nvSpPr>
+        <p:spPr>
+          <a:xfrm>
+            <a:off x="27432" y="91440"/>
+            <a:ext cx="585216" cy="475488"/>
+          </a:xfrm>
+          <a:prstGeom prst="rect">
+            <a:avLst/>
+          </a:prstGeom>
+          <a:extLst>
+            <a:ext uri="{C572A759-6A51-4108-AA02-DFA0A04FC94B}">
+              <ma14:wrappingTextBoxFlag xmlns:ma14="http://schemas.microsoft.com/office/mac/drawingml/2011/main" val="0"/>
+            </a:ext>
+          </a:extLst>
+        </p:spPr>
+        <p:txBody>
+          <a:bodyPr/>
+          <a:lstStyle>
+            <a:lvl1pPr>
+              <a:defRPr sz="2000">
+                <a:solidFill>
+                  <a:srgbClr val="FFFFFF"/>
+                </a:solidFill>
+                <a:latin typeface="Calibri"/>
+                <a:ea typeface="Calibri"/>
+                <a:cs typeface="Calibri"/>
+              </a:defRPr>
+            </a:lvl1pPr>
+          </a:lstStyle>
+          <a:p>
+            <a:pPr algn="ctr"/>
+            <a:fld id="{F7021451-1387-4CA6-816F-3879F97B5CBC}" type="slidenum">
+              <a:rPr b="1" lang="en-US"/>
+              <a:t>47</a:t>
+            </a:fld>
+            <a:endParaRPr lang="en-US"/>
+          </a:p>
+        </p:txBody>
+      </p:sp>
+    </p:spTree>
+  </p:cSld>
+  <p:clrMapOvr>
+    <a:masterClrMapping/>
+  </p:clrMapOvr>
+</p:sld>
+</file>
+
+<file path=ppt/slides/slide48.xml><?xml version="1.0" encoding="utf-8"?>
+<p:sld xmlns:a="http://schemas.openxmlformats.org/drawingml/2006/main" xmlns:r="http://schemas.openxmlformats.org/officeDocument/2006/relationships" xmlns:p="http://schemas.openxmlformats.org/presentationml/2006/main">
+  <p:cSld name="Slide 48">
+    <p:spTree>
+      <p:nvGrpSpPr>
+        <p:cNvPr id="1" name=""/>
+        <p:cNvGrpSpPr/>
+        <p:nvPr/>
+      </p:nvGrpSpPr>
+      <p:grpSpPr>
+        <a:xfrm>
+          <a:off x="0" y="0"/>
+          <a:ext cx="0" cy="0"/>
+          <a:chOff x="0" y="0"/>
+          <a:chExt cx="0" cy="0"/>
+        </a:xfrm>
+      </p:grpSpPr>
+      <p:sp>
+        <p:nvSpPr>
+          <p:cNvPr id="2" name="Text 0"/>
+          <p:cNvSpPr/>
+          <p:nvPr/>
+        </p:nvSpPr>
+        <p:spPr>
+          <a:xfrm>
+            <a:off x="457200" y="713232"/>
+            <a:ext cx="11368735" cy="274320"/>
+          </a:xfrm>
+          <a:prstGeom prst="rect">
+            <a:avLst/>
+          </a:prstGeom>
+          <a:noFill/>
+          <a:ln/>
+        </p:spPr>
+        <p:txBody>
+          <a:bodyPr wrap="square" lIns="0" tIns="0" rIns="0" bIns="0" rtlCol="0" anchor="ctr"/>
+          <a:lstStyle/>
+          <a:p>
+            <a:pPr algn="r" indent="0" marL="0">
+              <a:buNone/>
+            </a:pPr>
+            <a:r>
+              <a:rPr lang="en-US" sz="1400" b="1" dirty="0">
+                <a:solidFill>
+                  <a:srgbClr val="1C3F6E"/>
+                </a:solidFill>
+                <a:latin typeface="Calibri" pitchFamily="34" charset="0"/>
+                <a:ea typeface="Calibri" pitchFamily="34" charset="-122"/>
+                <a:cs typeface="Calibri" pitchFamily="34" charset="-120"/>
+              </a:rPr>
+              <a:t>FORMATIVE EVALUATION</a:t>
+            </a:r>
+            <a:endParaRPr lang="en-US" sz="1400" dirty="0"/>
+          </a:p>
+        </p:txBody>
+      </p:sp>
+      <p:pic>
+        <p:nvPicPr>
+          <p:cNvPr id="3" name="Image 0" descr="/home/claude/f4/img/minesec_sheet.png">    </p:cNvPr>
+          <p:cNvPicPr>
+            <a:picLocks noChangeAspect="1"/>
+          </p:cNvPicPr>
+          <p:nvPr/>
+        </p:nvPicPr>
+        <p:blipFill>
+          <a:blip r:embed="rId1"/>
+          <a:stretch>
+            <a:fillRect/>
+          </a:stretch>
+        </p:blipFill>
+        <p:spPr>
+          <a:xfrm>
+            <a:off x="0" y="658368"/>
+            <a:ext cx="5120640" cy="5833872"/>
+          </a:xfrm>
+          <a:prstGeom prst="rect">
+            <a:avLst/>
+          </a:prstGeom>
+        </p:spPr>
+      </p:pic>
+      <p:sp>
+        <p:nvSpPr>
+          <p:cNvPr id="4" name="Text 1"/>
+          <p:cNvSpPr/>
+          <p:nvPr/>
+        </p:nvSpPr>
+        <p:spPr>
+          <a:xfrm>
+            <a:off x="5349240" y="1005840"/>
+            <a:ext cx="6522415" cy="731520"/>
+          </a:xfrm>
+          <a:prstGeom prst="rect">
+            <a:avLst/>
+          </a:prstGeom>
+          <a:noFill/>
+          <a:ln/>
+        </p:spPr>
+        <p:txBody>
+          <a:bodyPr wrap="square" lIns="0" tIns="0" rIns="0" bIns="0" rtlCol="0" anchor="ctr">
+            <a:normAutofit/>
+          </a:bodyPr>
+          <a:lstStyle/>
+          <a:p>
+            <a:pPr algn="ctr" indent="0" marL="0">
+              <a:buNone/>
+            </a:pPr>
+            <a:r>
+              <a:rPr lang="en-US" sz="3600" b="1" dirty="0">
+                <a:solidFill>
+                  <a:srgbClr val="990011"/>
+                </a:solidFill>
+                <a:latin typeface="Times New Roman" pitchFamily="34" charset="0"/>
+                <a:ea typeface="Times New Roman" pitchFamily="34" charset="-122"/>
+                <a:cs typeface="Times New Roman" pitchFamily="34" charset="-120"/>
+              </a:rPr>
+              <a:t>Expected Answer</a:t>
+            </a:r>
+            <a:endParaRPr lang="en-US" sz="3600" dirty="0"/>
+          </a:p>
+        </p:txBody>
+      </p:sp>
+      <p:sp>
+        <p:nvSpPr>
+          <p:cNvPr id="5" name="Text 2"/>
+          <p:cNvSpPr/>
+          <p:nvPr/>
+        </p:nvSpPr>
+        <p:spPr>
+          <a:xfrm>
+            <a:off x="5349240" y="1783080"/>
+            <a:ext cx="6522415" cy="4663440"/>
+          </a:xfrm>
+          <a:prstGeom prst="rect">
+            <a:avLst/>
+          </a:prstGeom>
+          <a:noFill/>
+          <a:ln/>
+        </p:spPr>
+        <p:txBody>
+          <a:bodyPr wrap="square" lIns="0" tIns="0" rIns="0" bIns="0" rtlCol="0" anchor="t"/>
+          <a:lstStyle/>
+          <a:p>
+            <a:pPr algn="l" indent="0" marL="0">
+              <a:spcAft>
+                <a:spcPts val="800"/>
+              </a:spcAft>
+              <a:buNone/>
+            </a:pPr>
+            <a:r>
+              <a:rPr lang="en-US" sz="4000" dirty="0">
+                <a:solidFill>
+                  <a:srgbClr val="111111"/>
+                </a:solidFill>
+                <a:latin typeface="Times New Roman" pitchFamily="34" charset="0"/>
+                <a:ea typeface="Times New Roman" pitchFamily="34" charset="-122"/>
+                <a:cs typeface="Times New Roman" pitchFamily="34" charset="-120"/>
+              </a:rPr>
+              <a:t>Grass for cattle; water of Lagdo for fishing and electricity.</a:t>
+            </a:r>
+            <a:endParaRPr lang="en-US" sz="4000" dirty="0"/>
+          </a:p>
+        </p:txBody>
+      </p:sp>
+      <p:sp>
+        <p:nvSpPr>
+          <p:cNvPr id="25" name="Slide Number Placeholder 0"/>
+          <p:cNvSpPr>
+            <a:spLocks noGrp="1"/>
+          </p:cNvSpPr>
+          <p:nvPr>
+            <p:ph type="sldNum" sz="quarter" idx="4294967295"/>
+          </p:nvPr>
+        </p:nvSpPr>
+        <p:spPr>
+          <a:xfrm>
+            <a:off x="27432" y="91440"/>
+            <a:ext cx="585216" cy="475488"/>
+          </a:xfrm>
+          <a:prstGeom prst="rect">
+            <a:avLst/>
+          </a:prstGeom>
+          <a:extLst>
+            <a:ext uri="{C572A759-6A51-4108-AA02-DFA0A04FC94B}">
+              <ma14:wrappingTextBoxFlag xmlns:ma14="http://schemas.microsoft.com/office/mac/drawingml/2011/main" val="0"/>
+            </a:ext>
+          </a:extLst>
+        </p:spPr>
+        <p:txBody>
+          <a:bodyPr/>
+          <a:lstStyle>
+            <a:lvl1pPr>
+              <a:defRPr sz="2000">
+                <a:solidFill>
+                  <a:srgbClr val="FFFFFF"/>
+                </a:solidFill>
+                <a:latin typeface="Calibri"/>
+                <a:ea typeface="Calibri"/>
+                <a:cs typeface="Calibri"/>
+              </a:defRPr>
+            </a:lvl1pPr>
+          </a:lstStyle>
+          <a:p>
+            <a:pPr algn="ctr"/>
+            <a:fld id="{F7021451-1387-4CA6-816F-3879F97B5CBC}" type="slidenum">
+              <a:rPr b="1" lang="en-US"/>
+              <a:t>48</a:t>
+            </a:fld>
+            <a:endParaRPr lang="en-US"/>
+          </a:p>
+        </p:txBody>
+      </p:sp>
+    </p:spTree>
+  </p:cSld>
+  <p:clrMapOvr>
+    <a:masterClrMapping/>
+  </p:clrMapOvr>
+</p:sld>
+</file>
+
+<file path=ppt/slides/slide49.xml><?xml version="1.0" encoding="utf-8"?>
+<p:sld xmlns:a="http://schemas.openxmlformats.org/drawingml/2006/main" xmlns:r="http://schemas.openxmlformats.org/officeDocument/2006/relationships" xmlns:p="http://schemas.openxmlformats.org/presentationml/2006/main">
+  <p:cSld name="Slide 49">
+    <p:spTree>
+      <p:nvGrpSpPr>
+        <p:cNvPr id="1" name=""/>
+        <p:cNvGrpSpPr/>
+        <p:nvPr/>
+      </p:nvGrpSpPr>
+      <p:grpSpPr>
+        <a:xfrm>
+          <a:off x="0" y="0"/>
+          <a:ext cx="0" cy="0"/>
+          <a:chOff x="0" y="0"/>
+          <a:chExt cx="0" cy="0"/>
+        </a:xfrm>
+      </p:grpSpPr>
+      <p:sp>
+        <p:nvSpPr>
+          <p:cNvPr id="2" name="Text 0"/>
+          <p:cNvSpPr/>
+          <p:nvPr/>
+        </p:nvSpPr>
+        <p:spPr>
+          <a:xfrm>
+            <a:off x="457200" y="713232"/>
+            <a:ext cx="11368735" cy="274320"/>
+          </a:xfrm>
+          <a:prstGeom prst="rect">
+            <a:avLst/>
+          </a:prstGeom>
+          <a:noFill/>
+          <a:ln/>
+        </p:spPr>
+        <p:txBody>
+          <a:bodyPr wrap="square" lIns="0" tIns="0" rIns="0" bIns="0" rtlCol="0" anchor="ctr"/>
+          <a:lstStyle/>
+          <a:p>
+            <a:pPr algn="r" indent="0" marL="0">
+              <a:buNone/>
+            </a:pPr>
+            <a:r>
+              <a:rPr lang="en-US" sz="1400" b="1" dirty="0">
+                <a:solidFill>
+                  <a:srgbClr val="1C3F6E"/>
+                </a:solidFill>
+                <a:latin typeface="Calibri" pitchFamily="34" charset="0"/>
+                <a:ea typeface="Calibri" pitchFamily="34" charset="-122"/>
+                <a:cs typeface="Calibri" pitchFamily="34" charset="-120"/>
+              </a:rPr>
+              <a:t>REMEDIATION</a:t>
+            </a:r>
+            <a:endParaRPr lang="en-US" sz="1400" dirty="0"/>
+          </a:p>
+        </p:txBody>
+      </p:sp>
+      <p:pic>
+        <p:nvPicPr>
+          <p:cNvPr id="3" name="Image 0" descr="/home/claude/f4/img/minesec_sheet.png">    </p:cNvPr>
+          <p:cNvPicPr>
+            <a:picLocks noChangeAspect="1"/>
+          </p:cNvPicPr>
+          <p:nvPr/>
+        </p:nvPicPr>
+        <p:blipFill>
+          <a:blip r:embed="rId1"/>
+          <a:stretch>
+            <a:fillRect/>
+          </a:stretch>
+        </p:blipFill>
+        <p:spPr>
+          <a:xfrm>
+            <a:off x="0" y="658368"/>
+            <a:ext cx="2468880" cy="5833872"/>
+          </a:xfrm>
+          <a:prstGeom prst="rect">
+            <a:avLst/>
+          </a:prstGeom>
+        </p:spPr>
+      </p:pic>
+      <p:sp>
+        <p:nvSpPr>
+          <p:cNvPr id="4" name="Text 1"/>
+          <p:cNvSpPr/>
+          <p:nvPr/>
+        </p:nvSpPr>
+        <p:spPr>
+          <a:xfrm>
+            <a:off x="2697480" y="1005840"/>
+            <a:ext cx="9174175" cy="731520"/>
+          </a:xfrm>
+          <a:prstGeom prst="rect">
+            <a:avLst/>
+          </a:prstGeom>
+          <a:noFill/>
+          <a:ln/>
+        </p:spPr>
+        <p:txBody>
+          <a:bodyPr wrap="square" lIns="0" tIns="0" rIns="0" bIns="0" rtlCol="0" anchor="ctr">
+            <a:normAutofit/>
+          </a:bodyPr>
+          <a:lstStyle/>
+          <a:p>
+            <a:pPr algn="ctr" indent="0" marL="0">
+              <a:buNone/>
+            </a:pPr>
+            <a:r>
+              <a:rPr lang="en-US" sz="3600" b="1" dirty="0">
+                <a:solidFill>
+                  <a:srgbClr val="990011"/>
+                </a:solidFill>
+                <a:latin typeface="Times New Roman" pitchFamily="34" charset="0"/>
+                <a:ea typeface="Times New Roman" pitchFamily="34" charset="-122"/>
+                <a:cs typeface="Times New Roman" pitchFamily="34" charset="-120"/>
+              </a:rPr>
+              <a:t>Remediation</a:t>
+            </a:r>
+            <a:endParaRPr lang="en-US" sz="3600" dirty="0"/>
+          </a:p>
+        </p:txBody>
+      </p:sp>
+      <p:sp>
+        <p:nvSpPr>
+          <p:cNvPr id="5" name="Text 2"/>
+          <p:cNvSpPr/>
+          <p:nvPr/>
+        </p:nvSpPr>
+        <p:spPr>
+          <a:xfrm>
+            <a:off x="2697480" y="1783080"/>
+            <a:ext cx="9174175" cy="4663440"/>
+          </a:xfrm>
+          <a:prstGeom prst="rect">
+            <a:avLst/>
+          </a:prstGeom>
+          <a:noFill/>
+          <a:ln/>
+        </p:spPr>
+        <p:txBody>
+          <a:bodyPr wrap="square" lIns="0" tIns="0" rIns="0" bIns="0" rtlCol="0" anchor="t"/>
+          <a:lstStyle/>
+          <a:p>
+            <a:pPr algn="l" indent="0" marL="0">
+              <a:spcAft>
+                <a:spcPts val="800"/>
+              </a:spcAft>
+              <a:buNone/>
+            </a:pPr>
+            <a:r>
+              <a:rPr lang="en-US" sz="4000" b="1" dirty="0">
+                <a:solidFill>
+                  <a:srgbClr val="111111"/>
+                </a:solidFill>
+                <a:latin typeface="Times New Roman" pitchFamily="34" charset="0"/>
+                <a:ea typeface="Times New Roman" pitchFamily="34" charset="-122"/>
+                <a:cs typeface="Times New Roman" pitchFamily="34" charset="-120"/>
+              </a:rPr>
+              <a:t>Fill in the blanks:</a:t>
+            </a:r>
+            <a:endParaRPr lang="en-US" sz="4000" dirty="0"/>
+          </a:p>
+          <a:p>
+            <a:pPr algn="l" marL="342900" indent="-342900">
+              <a:spcAft>
+                <a:spcPts val="800"/>
+              </a:spcAft>
+              <a:buSzPct val="100000"/>
+              <a:buFont typeface="+mj-lt"/>
+              <a:buAutoNum type="arabicPeriod" startAt="1"/>
+            </a:pPr>
+            <a:r>
+              <a:rPr lang="en-US" sz="4000" dirty="0">
+                <a:solidFill>
+                  <a:srgbClr val="111111"/>
+                </a:solidFill>
+                <a:latin typeface="Times New Roman" pitchFamily="34" charset="0"/>
+                <a:ea typeface="Times New Roman" pitchFamily="34" charset="-122"/>
+                <a:cs typeface="Times New Roman" pitchFamily="34" charset="-120"/>
+              </a:rPr>
+              <a:t>Anything in nature that people can use is a ______.</a:t>
+            </a:r>
+            <a:endParaRPr lang="en-US" sz="4000" dirty="0"/>
+          </a:p>
+          <a:p>
+            <a:pPr algn="l" marL="342900" indent="-342900">
+              <a:spcAft>
+                <a:spcPts val="800"/>
+              </a:spcAft>
+              <a:buSzPct val="100000"/>
+              <a:buFont typeface="+mj-lt"/>
+              <a:buAutoNum type="arabicPeriod" startAt="1"/>
+            </a:pPr>
+            <a:r>
+              <a:rPr lang="en-US" sz="4000" dirty="0">
+                <a:solidFill>
+                  <a:srgbClr val="111111"/>
+                </a:solidFill>
+                <a:latin typeface="Times New Roman" pitchFamily="34" charset="0"/>
+                <a:ea typeface="Times New Roman" pitchFamily="34" charset="-122"/>
+                <a:cs typeface="Times New Roman" pitchFamily="34" charset="-120"/>
+              </a:rPr>
+              <a:t>The grass is used to feed ______.</a:t>
+            </a:r>
+            <a:endParaRPr lang="en-US" sz="4000" dirty="0"/>
+          </a:p>
+          <a:p>
+            <a:pPr algn="l" marL="342900" indent="-342900">
+              <a:spcAft>
+                <a:spcPts val="800"/>
+              </a:spcAft>
+              <a:buSzPct val="100000"/>
+              <a:buFont typeface="+mj-lt"/>
+              <a:buAutoNum type="arabicPeriod" startAt="1"/>
+            </a:pPr>
+            <a:r>
+              <a:rPr lang="en-US" sz="4000" dirty="0">
+                <a:solidFill>
+                  <a:srgbClr val="111111"/>
+                </a:solidFill>
+                <a:latin typeface="Times New Roman" pitchFamily="34" charset="0"/>
+                <a:ea typeface="Times New Roman" pitchFamily="34" charset="-122"/>
+                <a:cs typeface="Times New Roman" pitchFamily="34" charset="-120"/>
+              </a:rPr>
+              <a:t>The Lagdo dam produces fish and ______.</a:t>
+            </a:r>
+            <a:endParaRPr lang="en-US" sz="4000" dirty="0"/>
+          </a:p>
+        </p:txBody>
+      </p:sp>
+      <p:sp>
+        <p:nvSpPr>
+          <p:cNvPr id="25" name="Slide Number Placeholder 0"/>
+          <p:cNvSpPr>
+            <a:spLocks noGrp="1"/>
+          </p:cNvSpPr>
+          <p:nvPr>
+            <p:ph type="sldNum" sz="quarter" idx="4294967295"/>
+          </p:nvPr>
+        </p:nvSpPr>
+        <p:spPr>
+          <a:xfrm>
+            <a:off x="27432" y="91440"/>
+            <a:ext cx="585216" cy="475488"/>
+          </a:xfrm>
+          <a:prstGeom prst="rect">
+            <a:avLst/>
+          </a:prstGeom>
+          <a:extLst>
+            <a:ext uri="{C572A759-6A51-4108-AA02-DFA0A04FC94B}">
+              <ma14:wrappingTextBoxFlag xmlns:ma14="http://schemas.microsoft.com/office/mac/drawingml/2011/main" val="0"/>
+            </a:ext>
+          </a:extLst>
+        </p:spPr>
+        <p:txBody>
+          <a:bodyPr/>
+          <a:lstStyle>
+            <a:lvl1pPr>
+              <a:defRPr sz="2000">
+                <a:solidFill>
+                  <a:srgbClr val="FFFFFF"/>
+                </a:solidFill>
+                <a:latin typeface="Calibri"/>
+                <a:ea typeface="Calibri"/>
+                <a:cs typeface="Calibri"/>
+              </a:defRPr>
+            </a:lvl1pPr>
+          </a:lstStyle>
+          <a:p>
+            <a:pPr algn="ctr"/>
+            <a:fld id="{F7021451-1387-4CA6-816F-3879F97B5CBC}" type="slidenum">
+              <a:rPr b="1" lang="en-US"/>
+              <a:t>49</a:t>
+            </a:fld>
+            <a:endParaRPr lang="en-US"/>
+          </a:p>
+        </p:txBody>
+      </p:sp>
+    </p:spTree>
+  </p:cSld>
+  <p:clrMapOvr>
+    <a:masterClrMapping/>
+  </p:clrMapOvr>
+</p:sld>
+</file>
+
+<file path=ppt/slides/slide5.xml><?xml version="1.0" encoding="utf-8"?>
+<p:sld xmlns:a="http://schemas.openxmlformats.org/drawingml/2006/main" xmlns:r="http://schemas.openxmlformats.org/officeDocument/2006/relationships" xmlns:p="http://schemas.openxmlformats.org/presentationml/2006/main">
+  <p:cSld name="Slide 5">
+    <p:spTree>
+      <p:nvGrpSpPr>
+        <p:cNvPr id="1" name=""/>
+        <p:cNvGrpSpPr/>
+        <p:nvPr/>
+      </p:nvGrpSpPr>
+      <p:grpSpPr>
+        <a:xfrm>
+          <a:off x="0" y="0"/>
+          <a:ext cx="0" cy="0"/>
+          <a:chOff x="0" y="0"/>
+          <a:chExt cx="0" cy="0"/>
+        </a:xfrm>
+      </p:grpSpPr>
+      <p:sp>
+        <p:nvSpPr>
+          <p:cNvPr id="2" name="Text 0"/>
+          <p:cNvSpPr/>
+          <p:nvPr/>
+        </p:nvSpPr>
+        <p:spPr>
+          <a:xfrm>
+            <a:off x="457200" y="713232"/>
+            <a:ext cx="11368735" cy="274320"/>
+          </a:xfrm>
+          <a:prstGeom prst="rect">
+            <a:avLst/>
+          </a:prstGeom>
+          <a:noFill/>
+          <a:ln/>
+        </p:spPr>
+        <p:txBody>
+          <a:bodyPr wrap="square" lIns="0" tIns="0" rIns="0" bIns="0" rtlCol="0" anchor="ctr"/>
+          <a:lstStyle/>
+          <a:p>
+            <a:pPr algn="r" indent="0" marL="0">
+              <a:buNone/>
+            </a:pPr>
+            <a:r>
+              <a:rPr lang="en-US" sz="1400" b="1" dirty="0">
+                <a:solidFill>
+                  <a:srgbClr val="1C3F6E"/>
+                </a:solidFill>
+                <a:latin typeface="Calibri" pitchFamily="34" charset="0"/>
+                <a:ea typeface="Calibri" pitchFamily="34" charset="-122"/>
+                <a:cs typeface="Calibri" pitchFamily="34" charset="-120"/>
+              </a:rPr>
+              <a:t>HOMEWORK CORRECTION</a:t>
+            </a:r>
+            <a:endParaRPr lang="en-US" sz="1400" dirty="0"/>
+          </a:p>
+        </p:txBody>
+      </p:sp>
+      <p:pic>
+        <p:nvPicPr>
+          <p:cNvPr id="3" name="Image 0" descr="/home/claude/f4/img/minesec_sheet.png">    </p:cNvPr>
+          <p:cNvPicPr>
+            <a:picLocks noChangeAspect="1"/>
+          </p:cNvPicPr>
+          <p:nvPr/>
+        </p:nvPicPr>
+        <p:blipFill>
+          <a:blip r:embed="rId1"/>
+          <a:stretch>
+            <a:fillRect/>
+          </a:stretch>
+        </p:blipFill>
+        <p:spPr>
+          <a:xfrm>
+            <a:off x="0" y="658368"/>
+            <a:ext cx="5120640" cy="5833872"/>
+          </a:xfrm>
+          <a:prstGeom prst="rect">
+            <a:avLst/>
+          </a:prstGeom>
+        </p:spPr>
+      </p:pic>
+      <p:sp>
+        <p:nvSpPr>
+          <p:cNvPr id="4" name="Text 1"/>
+          <p:cNvSpPr/>
+          <p:nvPr/>
+        </p:nvSpPr>
+        <p:spPr>
+          <a:xfrm>
+            <a:off x="5349240" y="1005840"/>
+            <a:ext cx="6522415" cy="731520"/>
+          </a:xfrm>
+          <a:prstGeom prst="rect">
+            <a:avLst/>
+          </a:prstGeom>
+          <a:noFill/>
+          <a:ln/>
+        </p:spPr>
+        <p:txBody>
+          <a:bodyPr wrap="square" lIns="0" tIns="0" rIns="0" bIns="0" rtlCol="0" anchor="ctr">
+            <a:normAutofit/>
+          </a:bodyPr>
+          <a:lstStyle/>
+          <a:p>
+            <a:pPr algn="ctr" indent="0" marL="0">
+              <a:buNone/>
+            </a:pPr>
+            <a:r>
+              <a:rPr lang="en-US" sz="3600" b="1" dirty="0">
+                <a:solidFill>
+                  <a:srgbClr val="990011"/>
+                </a:solidFill>
+                <a:latin typeface="Times New Roman" pitchFamily="34" charset="0"/>
+                <a:ea typeface="Times New Roman" pitchFamily="34" charset="-122"/>
+                <a:cs typeface="Times New Roman" pitchFamily="34" charset="-120"/>
+              </a:rPr>
+              <a:t>Correction: Possible Answer</a:t>
+            </a:r>
+            <a:endParaRPr lang="en-US" sz="3600" dirty="0"/>
+          </a:p>
+        </p:txBody>
+      </p:sp>
+      <p:sp>
+        <p:nvSpPr>
+          <p:cNvPr id="5" name="Text 2"/>
+          <p:cNvSpPr/>
+          <p:nvPr/>
+        </p:nvSpPr>
+        <p:spPr>
+          <a:xfrm>
+            <a:off x="5349240" y="1783080"/>
+            <a:ext cx="6522415" cy="4663440"/>
+          </a:xfrm>
+          <a:prstGeom prst="rect">
+            <a:avLst/>
+          </a:prstGeom>
+          <a:noFill/>
+          <a:ln/>
+        </p:spPr>
+        <p:txBody>
+          <a:bodyPr wrap="square" lIns="0" tIns="0" rIns="0" bIns="0" rtlCol="0" anchor="t"/>
+          <a:lstStyle/>
+          <a:p>
+            <a:pPr algn="l" indent="0" marL="0">
+              <a:spcAft>
+                <a:spcPts val="800"/>
+              </a:spcAft>
+              <a:buNone/>
+            </a:pPr>
+            <a:r>
+              <a:rPr lang="en-US" sz="4000" dirty="0">
+                <a:solidFill>
+                  <a:srgbClr val="111111"/>
+                </a:solidFill>
+                <a:latin typeface="Times New Roman" pitchFamily="34" charset="0"/>
+                <a:ea typeface="Times New Roman" pitchFamily="34" charset="-122"/>
+                <a:cs typeface="Times New Roman" pitchFamily="34" charset="-120"/>
+              </a:rPr>
+              <a:t>Examples: food (maize, sorghum, groundnuts, shea butter); wood (firewood, charcoal, poles for building); animals (cattle, goats, meat and milk).</a:t>
+            </a:r>
+            <a:endParaRPr lang="en-US" sz="4000" dirty="0"/>
+          </a:p>
+        </p:txBody>
+      </p:sp>
+      <p:sp>
+        <p:nvSpPr>
+          <p:cNvPr id="25" name="Slide Number Placeholder 0"/>
+          <p:cNvSpPr>
+            <a:spLocks noGrp="1"/>
+          </p:cNvSpPr>
+          <p:nvPr>
+            <p:ph type="sldNum" sz="quarter" idx="4294967295"/>
+          </p:nvPr>
+        </p:nvSpPr>
+        <p:spPr>
+          <a:xfrm>
+            <a:off x="27432" y="91440"/>
+            <a:ext cx="585216" cy="475488"/>
+          </a:xfrm>
+          <a:prstGeom prst="rect">
+            <a:avLst/>
+          </a:prstGeom>
+          <a:extLst>
+            <a:ext uri="{C572A759-6A51-4108-AA02-DFA0A04FC94B}">
+              <ma14:wrappingTextBoxFlag xmlns:ma14="http://schemas.microsoft.com/office/mac/drawingml/2011/main" val="0"/>
+            </a:ext>
+          </a:extLst>
+        </p:spPr>
+        <p:txBody>
+          <a:bodyPr/>
+          <a:lstStyle>
+            <a:lvl1pPr>
+              <a:defRPr sz="2000">
+                <a:solidFill>
+                  <a:srgbClr val="FFFFFF"/>
+                </a:solidFill>
+                <a:latin typeface="Calibri"/>
+                <a:ea typeface="Calibri"/>
+                <a:cs typeface="Calibri"/>
+              </a:defRPr>
+            </a:lvl1pPr>
+          </a:lstStyle>
+          <a:p>
+            <a:pPr algn="ctr"/>
+            <a:fld id="{F7021451-1387-4CA6-816F-3879F97B5CBC}" type="slidenum">
+              <a:rPr b="1" lang="en-US"/>
+              <a:t>5</a:t>
+            </a:fld>
+            <a:endParaRPr lang="en-US"/>
+          </a:p>
+        </p:txBody>
+      </p:sp>
+    </p:spTree>
+  </p:cSld>
+  <p:clrMapOvr>
+    <a:masterClrMapping/>
+  </p:clrMapOvr>
+</p:sld>
+</file>
+
+<file path=ppt/slides/slide50.xml><?xml version="1.0" encoding="utf-8"?>
+<p:sld xmlns:a="http://schemas.openxmlformats.org/drawingml/2006/main" xmlns:r="http://schemas.openxmlformats.org/officeDocument/2006/relationships" xmlns:p="http://schemas.openxmlformats.org/presentationml/2006/main">
+  <p:cSld name="Slide 50">
+    <p:spTree>
+      <p:nvGrpSpPr>
+        <p:cNvPr id="1" name=""/>
+        <p:cNvGrpSpPr/>
+        <p:nvPr/>
+      </p:nvGrpSpPr>
+      <p:grpSpPr>
+        <a:xfrm>
+          <a:off x="0" y="0"/>
+          <a:ext cx="0" cy="0"/>
+          <a:chOff x="0" y="0"/>
+          <a:chExt cx="0" cy="0"/>
+        </a:xfrm>
+      </p:grpSpPr>
+      <p:sp>
+        <p:nvSpPr>
+          <p:cNvPr id="2" name="Text 0"/>
+          <p:cNvSpPr/>
+          <p:nvPr/>
+        </p:nvSpPr>
+        <p:spPr>
+          <a:xfrm>
+            <a:off x="457200" y="713232"/>
+            <a:ext cx="11368735" cy="274320"/>
+          </a:xfrm>
+          <a:prstGeom prst="rect">
+            <a:avLst/>
+          </a:prstGeom>
+          <a:noFill/>
+          <a:ln/>
+        </p:spPr>
+        <p:txBody>
+          <a:bodyPr wrap="square" lIns="0" tIns="0" rIns="0" bIns="0" rtlCol="0" anchor="ctr"/>
+          <a:lstStyle/>
+          <a:p>
+            <a:pPr algn="r" indent="0" marL="0">
+              <a:buNone/>
+            </a:pPr>
+            <a:r>
+              <a:rPr lang="en-US" sz="1400" b="1" dirty="0">
+                <a:solidFill>
+                  <a:srgbClr val="1C3F6E"/>
+                </a:solidFill>
+                <a:latin typeface="Calibri" pitchFamily="34" charset="0"/>
+                <a:ea typeface="Calibri" pitchFamily="34" charset="-122"/>
+                <a:cs typeface="Calibri" pitchFamily="34" charset="-120"/>
+              </a:rPr>
+              <a:t>HOMEWORK</a:t>
+            </a:r>
+            <a:endParaRPr lang="en-US" sz="1400" dirty="0"/>
+          </a:p>
+        </p:txBody>
+      </p:sp>
+      <p:pic>
+        <p:nvPicPr>
+          <p:cNvPr id="3" name="Image 0" descr="/home/claude/f4/img/minesec_sheet.png">    </p:cNvPr>
+          <p:cNvPicPr>
+            <a:picLocks noChangeAspect="1"/>
+          </p:cNvPicPr>
+          <p:nvPr/>
+        </p:nvPicPr>
+        <p:blipFill>
+          <a:blip r:embed="rId1"/>
+          <a:stretch>
+            <a:fillRect/>
+          </a:stretch>
+        </p:blipFill>
+        <p:spPr>
+          <a:xfrm>
+            <a:off x="0" y="658368"/>
+            <a:ext cx="5120640" cy="5833872"/>
+          </a:xfrm>
+          <a:prstGeom prst="rect">
+            <a:avLst/>
+          </a:prstGeom>
+        </p:spPr>
+      </p:pic>
+      <p:sp>
+        <p:nvSpPr>
+          <p:cNvPr id="4" name="Text 1"/>
+          <p:cNvSpPr/>
+          <p:nvPr/>
+        </p:nvSpPr>
+        <p:spPr>
+          <a:xfrm>
+            <a:off x="5349240" y="1005840"/>
+            <a:ext cx="6522415" cy="731520"/>
+          </a:xfrm>
+          <a:prstGeom prst="rect">
+            <a:avLst/>
+          </a:prstGeom>
+          <a:noFill/>
+          <a:ln/>
+        </p:spPr>
+        <p:txBody>
+          <a:bodyPr wrap="square" lIns="0" tIns="0" rIns="0" bIns="0" rtlCol="0" anchor="ctr">
+            <a:normAutofit/>
+          </a:bodyPr>
+          <a:lstStyle/>
+          <a:p>
+            <a:pPr algn="ctr" indent="0" marL="0">
+              <a:buNone/>
+            </a:pPr>
+            <a:r>
+              <a:rPr lang="en-US" sz="3600" b="1" dirty="0">
+                <a:solidFill>
+                  <a:srgbClr val="990011"/>
+                </a:solidFill>
+                <a:latin typeface="Times New Roman" pitchFamily="34" charset="0"/>
+                <a:ea typeface="Times New Roman" pitchFamily="34" charset="-122"/>
+                <a:cs typeface="Times New Roman" pitchFamily="34" charset="-120"/>
+              </a:rPr>
+              <a:t>Homework</a:t>
+            </a:r>
+            <a:endParaRPr lang="en-US" sz="3600" dirty="0"/>
+          </a:p>
+        </p:txBody>
+      </p:sp>
+      <p:sp>
+        <p:nvSpPr>
+          <p:cNvPr id="5" name="Text 2"/>
+          <p:cNvSpPr/>
+          <p:nvPr/>
+        </p:nvSpPr>
+        <p:spPr>
+          <a:xfrm>
+            <a:off x="5349240" y="1783080"/>
+            <a:ext cx="6522415" cy="4663440"/>
+          </a:xfrm>
+          <a:prstGeom prst="rect">
+            <a:avLst/>
+          </a:prstGeom>
+          <a:noFill/>
+          <a:ln/>
+        </p:spPr>
+        <p:txBody>
+          <a:bodyPr wrap="square" lIns="0" tIns="0" rIns="0" bIns="0" rtlCol="0" anchor="t"/>
+          <a:lstStyle/>
+          <a:p>
+            <a:pPr algn="l" indent="0" marL="0">
+              <a:spcAft>
+                <a:spcPts val="800"/>
+              </a:spcAft>
+              <a:buNone/>
+            </a:pPr>
+            <a:r>
+              <a:rPr lang="en-US" sz="4000" dirty="0">
+                <a:solidFill>
+                  <a:srgbClr val="111111"/>
+                </a:solidFill>
+                <a:latin typeface="Times New Roman" pitchFamily="34" charset="0"/>
+                <a:ea typeface="Times New Roman" pitchFamily="34" charset="-122"/>
+                <a:cs typeface="Times New Roman" pitchFamily="34" charset="-120"/>
+              </a:rPr>
+              <a:t>Ask a farmer or a herder in your area about his work: what he produces, which tools he uses and where he sells his products.</a:t>
+            </a:r>
+            <a:endParaRPr lang="en-US" sz="4000" dirty="0"/>
+          </a:p>
+        </p:txBody>
+      </p:sp>
+      <p:sp>
+        <p:nvSpPr>
+          <p:cNvPr id="25" name="Slide Number Placeholder 0"/>
+          <p:cNvSpPr>
+            <a:spLocks noGrp="1"/>
+          </p:cNvSpPr>
+          <p:nvPr>
+            <p:ph type="sldNum" sz="quarter" idx="4294967295"/>
+          </p:nvPr>
+        </p:nvSpPr>
+        <p:spPr>
+          <a:xfrm>
+            <a:off x="27432" y="91440"/>
+            <a:ext cx="585216" cy="475488"/>
+          </a:xfrm>
+          <a:prstGeom prst="rect">
+            <a:avLst/>
+          </a:prstGeom>
+          <a:extLst>
+            <a:ext uri="{C572A759-6A51-4108-AA02-DFA0A04FC94B}">
+              <ma14:wrappingTextBoxFlag xmlns:ma14="http://schemas.microsoft.com/office/mac/drawingml/2011/main" val="0"/>
+            </a:ext>
+          </a:extLst>
+        </p:spPr>
+        <p:txBody>
+          <a:bodyPr/>
+          <a:lstStyle>
+            <a:lvl1pPr>
+              <a:defRPr sz="2000">
+                <a:solidFill>
+                  <a:srgbClr val="FFFFFF"/>
+                </a:solidFill>
+                <a:latin typeface="Calibri"/>
+                <a:ea typeface="Calibri"/>
+                <a:cs typeface="Calibri"/>
+              </a:defRPr>
+            </a:lvl1pPr>
+          </a:lstStyle>
+          <a:p>
+            <a:pPr algn="ctr"/>
+            <a:fld id="{F7021451-1387-4CA6-816F-3879F97B5CBC}" type="slidenum">
+              <a:rPr b="1" lang="en-US"/>
+              <a:t>50</a:t>
+            </a:fld>
+            <a:endParaRPr lang="en-US"/>
+          </a:p>
+        </p:txBody>
+      </p:sp>
+    </p:spTree>
+  </p:cSld>
+  <p:clrMapOvr>
+    <a:masterClrMapping/>
+  </p:clrMapOvr>
+</p:sld>
+</file>
+
+<file path=ppt/slides/slide51.xml><?xml version="1.0" encoding="utf-8"?>
+<p:sld xmlns:a="http://schemas.openxmlformats.org/drawingml/2006/main" xmlns:r="http://schemas.openxmlformats.org/officeDocument/2006/relationships" xmlns:p="http://schemas.openxmlformats.org/presentationml/2006/main">
+  <p:cSld name="Slide 51">
+    <p:spTree>
+      <p:nvGrpSpPr>
+        <p:cNvPr id="1" name=""/>
+        <p:cNvGrpSpPr/>
+        <p:nvPr/>
+      </p:nvGrpSpPr>
+      <p:grpSpPr>
+        <a:xfrm>
+          <a:off x="0" y="0"/>
+          <a:ext cx="0" cy="0"/>
+          <a:chOff x="0" y="0"/>
+          <a:chExt cx="0" cy="0"/>
+        </a:xfrm>
+      </p:grpSpPr>
+      <p:sp>
+        <p:nvSpPr>
+          <p:cNvPr id="2" name="Text 0"/>
+          <p:cNvSpPr/>
+          <p:nvPr/>
+        </p:nvSpPr>
+        <p:spPr>
+          <a:xfrm>
+            <a:off x="457200" y="713232"/>
+            <a:ext cx="11368735" cy="274320"/>
+          </a:xfrm>
+          <a:prstGeom prst="rect">
+            <a:avLst/>
+          </a:prstGeom>
+          <a:noFill/>
+          <a:ln/>
+        </p:spPr>
+        <p:txBody>
+          <a:bodyPr wrap="square" lIns="0" tIns="0" rIns="0" bIns="0" rtlCol="0" anchor="ctr"/>
+          <a:lstStyle/>
+          <a:p>
+            <a:pPr algn="r" indent="0" marL="0">
+              <a:buNone/>
+            </a:pPr>
+            <a:r>
+              <a:rPr lang="en-US" sz="1400" b="1" dirty="0">
+                <a:solidFill>
+                  <a:srgbClr val="1C3F6E"/>
+                </a:solidFill>
+                <a:latin typeface="Calibri" pitchFamily="34" charset="0"/>
+                <a:ea typeface="Calibri" pitchFamily="34" charset="-122"/>
+                <a:cs typeface="Calibri" pitchFamily="34" charset="-120"/>
+              </a:rPr>
+              <a:t>NEXT LESSON</a:t>
+            </a:r>
+            <a:endParaRPr lang="en-US" sz="1400" dirty="0"/>
+          </a:p>
+        </p:txBody>
+      </p:sp>
+      <p:pic>
+        <p:nvPicPr>
+          <p:cNvPr id="3" name="Image 0" descr="/home/claude/f4/img/minesec_sheet.png">    </p:cNvPr>
+          <p:cNvPicPr>
+            <a:picLocks noChangeAspect="1"/>
+          </p:cNvPicPr>
+          <p:nvPr/>
+        </p:nvPicPr>
+        <p:blipFill>
+          <a:blip r:embed="rId1"/>
+          <a:stretch>
+            <a:fillRect/>
+          </a:stretch>
+        </p:blipFill>
+        <p:spPr>
+          <a:xfrm>
+            <a:off x="0" y="658368"/>
+            <a:ext cx="5120640" cy="5833872"/>
+          </a:xfrm>
+          <a:prstGeom prst="rect">
+            <a:avLst/>
+          </a:prstGeom>
+        </p:spPr>
+      </p:pic>
+      <p:sp>
+        <p:nvSpPr>
+          <p:cNvPr id="4" name="Text 1"/>
+          <p:cNvSpPr/>
+          <p:nvPr/>
+        </p:nvSpPr>
+        <p:spPr>
+          <a:xfrm>
+            <a:off x="5349240" y="1005840"/>
+            <a:ext cx="6522415" cy="731520"/>
+          </a:xfrm>
+          <a:prstGeom prst="rect">
+            <a:avLst/>
+          </a:prstGeom>
+          <a:noFill/>
+          <a:ln/>
+        </p:spPr>
+        <p:txBody>
+          <a:bodyPr wrap="square" lIns="0" tIns="0" rIns="0" bIns="0" rtlCol="0" anchor="ctr">
+            <a:normAutofit/>
+          </a:bodyPr>
+          <a:lstStyle/>
+          <a:p>
+            <a:pPr algn="ctr" indent="0" marL="0">
+              <a:buNone/>
+            </a:pPr>
+            <a:r>
+              <a:rPr lang="en-US" sz="3600" b="1" dirty="0">
+                <a:solidFill>
+                  <a:srgbClr val="990011"/>
+                </a:solidFill>
+                <a:latin typeface="Times New Roman" pitchFamily="34" charset="0"/>
+                <a:ea typeface="Times New Roman" pitchFamily="34" charset="-122"/>
+                <a:cs typeface="Times New Roman" pitchFamily="34" charset="-120"/>
+              </a:rPr>
+              <a:t>Next Lesson</a:t>
+            </a:r>
+            <a:endParaRPr lang="en-US" sz="3600" dirty="0"/>
+          </a:p>
+        </p:txBody>
+      </p:sp>
+      <p:sp>
+        <p:nvSpPr>
+          <p:cNvPr id="5" name="Text 2"/>
+          <p:cNvSpPr/>
+          <p:nvPr/>
+        </p:nvSpPr>
+        <p:spPr>
+          <a:xfrm>
+            <a:off x="5349240" y="1783080"/>
+            <a:ext cx="6522415" cy="4663440"/>
+          </a:xfrm>
+          <a:prstGeom prst="rect">
+            <a:avLst/>
+          </a:prstGeom>
+          <a:noFill/>
+          <a:ln/>
+        </p:spPr>
+        <p:txBody>
+          <a:bodyPr wrap="square" lIns="0" tIns="0" rIns="0" bIns="0" rtlCol="0" anchor="ctr"/>
+          <a:lstStyle/>
+          <a:p>
+            <a:pPr algn="ctr" indent="0" marL="0">
+              <a:spcAft>
+                <a:spcPts val="800"/>
+              </a:spcAft>
+              <a:buNone/>
+            </a:pPr>
+            <a:r>
+              <a:rPr lang="en-US" sz="4000" b="1" dirty="0">
+                <a:solidFill>
+                  <a:srgbClr val="111111"/>
+                </a:solidFill>
+                <a:latin typeface="Times New Roman" pitchFamily="34" charset="0"/>
+                <a:ea typeface="Times New Roman" pitchFamily="34" charset="-122"/>
+                <a:cs typeface="Times New Roman" pitchFamily="34" charset="-120"/>
+              </a:rPr>
+              <a:t>Our next lesson will be on:</a:t>
+            </a:r>
+            <a:endParaRPr lang="en-US" sz="4000" dirty="0"/>
+          </a:p>
+          <a:p>
+            <a:pPr algn="ctr" indent="0" marL="0">
+              <a:spcAft>
+                <a:spcPts val="800"/>
+              </a:spcAft>
+              <a:buNone/>
+            </a:pPr>
+            <a:r>
+              <a:rPr lang="en-US" sz="4000" b="1" dirty="0">
+                <a:solidFill>
+                  <a:srgbClr val="990011"/>
+                </a:solidFill>
+                <a:latin typeface="Times New Roman" pitchFamily="34" charset="0"/>
+                <a:ea typeface="Times New Roman" pitchFamily="34" charset="-122"/>
+                <a:cs typeface="Times New Roman" pitchFamily="34" charset="-120"/>
+              </a:rPr>
+              <a:t>Lesson 2 (Part 4): The Tropical Grassland Region: Human Activities</a:t>
+            </a:r>
+            <a:endParaRPr lang="en-US" sz="4000" dirty="0"/>
+          </a:p>
+        </p:txBody>
+      </p:sp>
+      <p:sp>
+        <p:nvSpPr>
+          <p:cNvPr id="25" name="Slide Number Placeholder 0"/>
+          <p:cNvSpPr>
+            <a:spLocks noGrp="1"/>
+          </p:cNvSpPr>
+          <p:nvPr>
+            <p:ph type="sldNum" sz="quarter" idx="4294967295"/>
+          </p:nvPr>
+        </p:nvSpPr>
+        <p:spPr>
+          <a:xfrm>
+            <a:off x="27432" y="91440"/>
+            <a:ext cx="585216" cy="475488"/>
+          </a:xfrm>
+          <a:prstGeom prst="rect">
+            <a:avLst/>
+          </a:prstGeom>
+          <a:extLst>
+            <a:ext uri="{C572A759-6A51-4108-AA02-DFA0A04FC94B}">
+              <ma14:wrappingTextBoxFlag xmlns:ma14="http://schemas.microsoft.com/office/mac/drawingml/2011/main" val="0"/>
+            </a:ext>
+          </a:extLst>
+        </p:spPr>
+        <p:txBody>
+          <a:bodyPr/>
+          <a:lstStyle>
+            <a:lvl1pPr>
+              <a:defRPr sz="2000">
+                <a:solidFill>
+                  <a:srgbClr val="FFFFFF"/>
+                </a:solidFill>
+                <a:latin typeface="Calibri"/>
+                <a:ea typeface="Calibri"/>
+                <a:cs typeface="Calibri"/>
+              </a:defRPr>
+            </a:lvl1pPr>
+          </a:lstStyle>
+          <a:p>
+            <a:pPr algn="ctr"/>
+            <a:fld id="{F7021451-1387-4CA6-816F-3879F97B5CBC}" type="slidenum">
+              <a:rPr b="1" lang="en-US"/>
+              <a:t>51</a:t>
+            </a:fld>
+            <a:endParaRPr lang="en-US"/>
+          </a:p>
+        </p:txBody>
+      </p:sp>
+    </p:spTree>
+  </p:cSld>
+  <p:clrMapOvr>
+    <a:masterClrMapping/>
+  </p:clrMapOvr>
+</p:sld>
+</file>
+
+<file path=ppt/slides/slide52.xml><?xml version="1.0" encoding="utf-8"?>
+<p:sld xmlns:a="http://schemas.openxmlformats.org/drawingml/2006/main" xmlns:r="http://schemas.openxmlformats.org/officeDocument/2006/relationships" xmlns:p="http://schemas.openxmlformats.org/presentationml/2006/main">
+  <p:cSld name="Slide 52">
+    <p:spTree>
+      <p:nvGrpSpPr>
+        <p:cNvPr id="1" name=""/>
+        <p:cNvGrpSpPr/>
+        <p:nvPr/>
+      </p:nvGrpSpPr>
+      <p:grpSpPr>
+        <a:xfrm>
+          <a:off x="0" y="0"/>
+          <a:ext cx="0" cy="0"/>
+          <a:chOff x="0" y="0"/>
+          <a:chExt cx="0" cy="0"/>
+        </a:xfrm>
+      </p:grpSpPr>
+      <p:sp>
+        <p:nvSpPr>
+          <p:cNvPr id="2" name="Text 0"/>
+          <p:cNvSpPr/>
+          <p:nvPr/>
+        </p:nvSpPr>
+        <p:spPr>
+          <a:xfrm>
+            <a:off x="457200" y="713232"/>
+            <a:ext cx="11368735" cy="274320"/>
+          </a:xfrm>
+          <a:prstGeom prst="rect">
+            <a:avLst/>
+          </a:prstGeom>
+          <a:noFill/>
+          <a:ln/>
+        </p:spPr>
+        <p:txBody>
+          <a:bodyPr wrap="square" lIns="0" tIns="0" rIns="0" bIns="0" rtlCol="0" anchor="ctr"/>
+          <a:lstStyle/>
+          <a:p>
+            <a:pPr algn="r" indent="0" marL="0">
+              <a:buNone/>
+            </a:pPr>
+            <a:r>
+              <a:rPr lang="en-US" sz="1400" b="1" dirty="0">
+                <a:solidFill>
+                  <a:srgbClr val="1C3F6E"/>
+                </a:solidFill>
+                <a:latin typeface="Calibri" pitchFamily="34" charset="0"/>
+                <a:ea typeface="Calibri" pitchFamily="34" charset="-122"/>
+                <a:cs typeface="Calibri" pitchFamily="34" charset="-120"/>
+              </a:rPr>
               <a:t>BILINGUAL GAME</a:t>
             </a:r>
             <a:endParaRPr lang="en-US" sz="1400" dirty="0"/>
@@ -16115,7 +18735,7 @@
       </p:sp>
       <p:graphicFrame>
         <p:nvGraphicFramePr>
-          <p:cNvPr id="46" name="Table 0"/>
+          <p:cNvPr id="53" name="Table 0"/>
           <p:cNvGraphicFramePr>
             <a:graphicFrameLocks noGrp="1"/>
           </p:cNvGraphicFramePr>
@@ -17427,7 +20047,7 @@
             <a:pPr algn="ctr"/>
             <a:fld id="{F7021451-1387-4CA6-816F-3879F97B5CBC}" type="slidenum">
               <a:rPr b="1" lang="en-US"/>
-              <a:t>45</a:t>
+              <a:t>52</a:t>
             </a:fld>
             <a:endParaRPr lang="en-US"/>
           </a:p>
@@ -17441,9 +20061,9 @@
 </p:sld>
 </file>
 
-<file path=ppt/slides/slide46.xml><?xml version="1.0" encoding="utf-8"?>
+<file path=ppt/slides/slide53.xml><?xml version="1.0" encoding="utf-8"?>
 <p:sld xmlns:a="http://schemas.openxmlformats.org/drawingml/2006/main" xmlns:r="http://schemas.openxmlformats.org/officeDocument/2006/relationships" xmlns:p="http://schemas.openxmlformats.org/presentationml/2006/main">
-  <p:cSld name="Slide 46">
+  <p:cSld name="Slide 53">
     <p:spTree>
       <p:nvGrpSpPr>
         <p:cNvPr id="1" name=""/>
@@ -17538,7 +20158,7 @@
       </p:sp>
       <p:graphicFrame>
         <p:nvGraphicFramePr>
-          <p:cNvPr id="47" name="Table 0"/>
+          <p:cNvPr id="54" name="Table 0"/>
           <p:cNvGraphicFramePr>
             <a:graphicFrameLocks noGrp="1"/>
           </p:cNvGraphicFramePr>
@@ -18160,7 +20780,7 @@
             <a:pPr algn="ctr"/>
             <a:fld id="{F7021451-1387-4CA6-816F-3879F97B5CBC}" type="slidenum">
               <a:rPr b="1" lang="en-US"/>
-              <a:t>46</a:t>
+              <a:t>53</a:t>
             </a:fld>
             <a:endParaRPr lang="en-US"/>
           </a:p>
@@ -18174,9 +20794,9 @@
 </p:sld>
 </file>
 
-<file path=ppt/slides/slide47.xml><?xml version="1.0" encoding="utf-8"?>
+<file path=ppt/slides/slide54.xml><?xml version="1.0" encoding="utf-8"?>
 <p:sld xmlns:a="http://schemas.openxmlformats.org/drawingml/2006/main" xmlns:r="http://schemas.openxmlformats.org/officeDocument/2006/relationships" xmlns:p="http://schemas.openxmlformats.org/presentationml/2006/main">
-  <p:cSld name="Slide 47">
+  <p:cSld name="Slide 54">
     <p:spTree>
       <p:nvGrpSpPr>
         <p:cNvPr id="1" name=""/>
@@ -18271,7 +20891,7 @@
       </p:sp>
       <p:graphicFrame>
         <p:nvGraphicFramePr>
-          <p:cNvPr id="48" name="Table 0"/>
+          <p:cNvPr id="55" name="Table 0"/>
           <p:cNvGraphicFramePr>
             <a:graphicFrameLocks noGrp="1"/>
           </p:cNvGraphicFramePr>
@@ -18381,7 +21001,7 @@
                           <a:ea typeface="Calibri" pitchFamily="34" charset="-122"/>
                           <a:cs typeface="Calibri" pitchFamily="34" charset="-120"/>
                         </a:rPr>
-                        <a:t>DEFINITIONS; Resources and Methods of Exploitation.</a:t>
+                        <a:t>DEFINITIONS; Types of Resources; Methods of Exploitation.</a:t>
                       </a:r>
                       <a:endParaRPr lang="en-US" sz="1600" dirty="0">
                         <a:latin typeface="Calibri" charset="0"/>
@@ -19031,7 +21651,7 @@
             <a:pPr algn="ctr"/>
             <a:fld id="{F7021451-1387-4CA6-816F-3879F97B5CBC}" type="slidenum">
               <a:rPr b="1" lang="en-US"/>
-              <a:t>47</a:t>
+              <a:t>54</a:t>
             </a:fld>
             <a:endParaRPr lang="en-US"/>
           </a:p>
@@ -19045,9 +21665,9 @@
 </p:sld>
 </file>
 
-<file path=ppt/slides/slide48.xml><?xml version="1.0" encoding="utf-8"?>
+<file path=ppt/slides/slide55.xml><?xml version="1.0" encoding="utf-8"?>
 <p:sld xmlns:a="http://schemas.openxmlformats.org/drawingml/2006/main" xmlns:r="http://schemas.openxmlformats.org/officeDocument/2006/relationships" xmlns:p="http://schemas.openxmlformats.org/presentationml/2006/main">
-  <p:cSld name="Slide 48">
+  <p:cSld name="Slide 55">
     <p:spTree>
       <p:nvGrpSpPr>
         <p:cNvPr id="1" name=""/>
@@ -19118,7 +21738,7 @@
         <p:spPr>
           <a:xfrm>
             <a:off x="0" y="658368"/>
-            <a:ext cx="1463040" cy="5833872"/>
+            <a:ext cx="3840480" cy="5833872"/>
           </a:xfrm>
           <a:prstGeom prst="rect">
             <a:avLst/>
@@ -19133,8 +21753,8 @@
         </p:nvSpPr>
         <p:spPr>
           <a:xfrm>
-            <a:off x="1691640" y="1005840"/>
-            <a:ext cx="10180015" cy="731520"/>
+            <a:off x="4069080" y="1005840"/>
+            <a:ext cx="7802575" cy="731520"/>
           </a:xfrm>
           <a:prstGeom prst="rect">
             <a:avLst/>
@@ -19174,8 +21794,8 @@
         </p:nvSpPr>
         <p:spPr>
           <a:xfrm>
-            <a:off x="1691640" y="1783080"/>
-            <a:ext cx="10180015" cy="4663440"/>
+            <a:off x="4069080" y="1783080"/>
+            <a:ext cx="7802575" cy="4663440"/>
           </a:xfrm>
           <a:prstGeom prst="rect">
             <a:avLst/>
@@ -19245,7 +21865,7 @@
                 <a:ea typeface="Calibri" pitchFamily="34" charset="-122"/>
                 <a:cs typeface="Calibri" pitchFamily="34" charset="-120"/>
               </a:rPr>
-              <a:t>Without the projector (Activity 1): ask learners who rears cattle in their area.</a:t>
+              <a:t>Without the projector (Activity 1): describe cattle near Garoua.</a:t>
             </a:r>
             <a:endParaRPr lang="en-US" sz="2000" dirty="0"/>
           </a:p>
@@ -19266,7 +21886,7 @@
                 <a:ea typeface="Calibri" pitchFamily="34" charset="-122"/>
                 <a:cs typeface="Calibri" pitchFamily="34" charset="-120"/>
               </a:rPr>
-              <a:t>Without the projector (Activity 2): bring a piece of raw cotton to class.</a:t>
+              <a:t>Without the projector (Activity 2): name products made of cotton.</a:t>
             </a:r>
             <a:endParaRPr lang="en-US" sz="2000" dirty="0"/>
           </a:p>
@@ -19287,7 +21907,7 @@
                 <a:ea typeface="Calibri" pitchFamily="34" charset="-122"/>
                 <a:cs typeface="Calibri" pitchFamily="34" charset="-120"/>
               </a:rPr>
-              <a:t>Without the projector (Activity 3): ask learners to name wild animals of the savanna.</a:t>
+              <a:t>Without the projector (Activity 3): name the parks.</a:t>
             </a:r>
             <a:endParaRPr lang="en-US" sz="2000" dirty="0"/>
           </a:p>
@@ -19308,7 +21928,7 @@
                 <a:ea typeface="Calibri" pitchFamily="34" charset="-122"/>
                 <a:cs typeface="Calibri" pitchFamily="34" charset="-120"/>
               </a:rPr>
-              <a:t>Without the projector (Activity 4): ask learners where the electricity of Garoua comes from.</a:t>
+              <a:t>Without the projector (Activity 4): describe the lake.</a:t>
             </a:r>
             <a:endParaRPr lang="en-US" sz="2000" dirty="0"/>
           </a:p>
@@ -19329,7 +21949,7 @@
                 <a:ea typeface="Calibri" pitchFamily="34" charset="-122"/>
                 <a:cs typeface="Calibri" pitchFamily="34" charset="-120"/>
               </a:rPr>
-              <a:t>Without the projector (Activity 5): ask learners what their mother uses to cook.</a:t>
+              <a:t>Without the projector (Activity 5): ask how families cook.</a:t>
             </a:r>
             <a:endParaRPr lang="en-US" sz="2000" dirty="0"/>
           </a:p>
@@ -19377,7 +21997,7 @@
             <a:pPr algn="ctr"/>
             <a:fld id="{F7021451-1387-4CA6-816F-3879F97B5CBC}" type="slidenum">
               <a:rPr b="1" lang="en-US"/>
-              <a:t>48</a:t>
+              <a:t>55</a:t>
             </a:fld>
             <a:endParaRPr lang="en-US"/>
           </a:p>
@@ -19391,9 +22011,9 @@
 </p:sld>
 </file>
 
-<file path=ppt/slides/slide49.xml><?xml version="1.0" encoding="utf-8"?>
+<file path=ppt/slides/slide56.xml><?xml version="1.0" encoding="utf-8"?>
 <p:sld xmlns:a="http://schemas.openxmlformats.org/drawingml/2006/main" xmlns:r="http://schemas.openxmlformats.org/officeDocument/2006/relationships" xmlns:p="http://schemas.openxmlformats.org/presentationml/2006/main">
-  <p:cSld name="Slide 49">
+  <p:cSld name="Slide 56">
     <p:spTree>
       <p:nvGrpSpPr>
         <p:cNvPr id="1" name=""/>
@@ -19744,7 +22364,7 @@
             <a:pPr algn="ctr"/>
             <a:fld id="{F7021451-1387-4CA6-816F-3879F97B5CBC}" type="slidenum">
               <a:rPr b="1" lang="en-US"/>
-              <a:t>49</a:t>
+              <a:t>56</a:t>
             </a:fld>
             <a:endParaRPr lang="en-US"/>
           </a:p>
@@ -19758,9 +22378,9 @@
 </p:sld>
 </file>
 
-<file path=ppt/slides/slide5.xml><?xml version="1.0" encoding="utf-8"?>
+<file path=ppt/slides/slide57.xml><?xml version="1.0" encoding="utf-8"?>
 <p:sld xmlns:a="http://schemas.openxmlformats.org/drawingml/2006/main" xmlns:r="http://schemas.openxmlformats.org/officeDocument/2006/relationships" xmlns:p="http://schemas.openxmlformats.org/presentationml/2006/main">
-  <p:cSld name="Slide 5">
+  <p:cSld name="Slide 57">
     <p:spTree>
       <p:nvGrpSpPr>
         <p:cNvPr id="1" name=""/>
@@ -19808,7 +22428,7 @@
                 <a:ea typeface="Calibri" pitchFamily="34" charset="-122"/>
                 <a:cs typeface="Calibri" pitchFamily="34" charset="-120"/>
               </a:rPr>
-              <a:t>HOMEWORK CORRECTION</a:t>
+              <a:t>REFERENCES</a:t>
             </a:r>
             <a:endParaRPr lang="en-US" sz="1400" dirty="0"/>
           </a:p>
@@ -19873,7 +22493,7 @@
                 <a:ea typeface="Times New Roman" pitchFamily="34" charset="-122"/>
                 <a:cs typeface="Times New Roman" pitchFamily="34" charset="-120"/>
               </a:rPr>
-              <a:t>Correction: Possible Answer</a:t>
+              <a:t>References (continued)</a:t>
             </a:r>
             <a:endParaRPr lang="en-US" sz="3600" dirty="0"/>
           </a:p>
@@ -19900,24 +22520,25 @@
           <a:bodyPr wrap="square" lIns="0" tIns="0" rIns="0" bIns="0" rtlCol="0" anchor="t"/>
           <a:lstStyle/>
           <a:p>
-            <a:pPr algn="l" indent="0" marL="0">
+            <a:pPr algn="l" marL="342900" indent="-342900">
               <a:spcAft>
                 <a:spcPts val="800"/>
               </a:spcAft>
-              <a:buNone/>
+              <a:buSzPct val="100000"/>
+              <a:buChar char="•"/>
             </a:pPr>
             <a:r>
-              <a:rPr lang="en-US" sz="4000" dirty="0">
+              <a:rPr lang="en-US" sz="1800" dirty="0">
                 <a:solidFill>
                   <a:srgbClr val="111111"/>
                 </a:solidFill>
-                <a:latin typeface="Times New Roman" pitchFamily="34" charset="0"/>
-                <a:ea typeface="Times New Roman" pitchFamily="34" charset="-122"/>
-                <a:cs typeface="Times New Roman" pitchFamily="34" charset="-120"/>
+                <a:latin typeface="Calibri" pitchFamily="34" charset="0"/>
+                <a:ea typeface="Calibri" pitchFamily="34" charset="-122"/>
+                <a:cs typeface="Calibri" pitchFamily="34" charset="-120"/>
               </a:rPr>
-              <a:t>Examples: food (maize, sorghum, groundnuts, shea butter); wood (firewood, charcoal, poles for building); animals (cattle, goats, meat and milk).</a:t>
-            </a:r>
-            <a:endParaRPr lang="en-US" sz="4000" dirty="0"/>
+              <a:t>Diagrams and animations: drawn for this lesson (Geography Department).</a:t>
+            </a:r>
+            <a:endParaRPr lang="en-US" sz="1800" dirty="0"/>
           </a:p>
         </p:txBody>
       </p:sp>
@@ -19963,227 +22584,7 @@
             <a:pPr algn="ctr"/>
             <a:fld id="{F7021451-1387-4CA6-816F-3879F97B5CBC}" type="slidenum">
               <a:rPr b="1" lang="en-US"/>
-              <a:t>5</a:t>
-            </a:fld>
-            <a:endParaRPr lang="en-US"/>
-          </a:p>
-        </p:txBody>
-      </p:sp>
-    </p:spTree>
-  </p:cSld>
-  <p:clrMapOvr>
-    <a:masterClrMapping/>
-  </p:clrMapOvr>
-</p:sld>
-</file>
-
-<file path=ppt/slides/slide50.xml><?xml version="1.0" encoding="utf-8"?>
-<p:sld xmlns:a="http://schemas.openxmlformats.org/drawingml/2006/main" xmlns:r="http://schemas.openxmlformats.org/officeDocument/2006/relationships" xmlns:p="http://schemas.openxmlformats.org/presentationml/2006/main">
-  <p:cSld name="Slide 50">
-    <p:spTree>
-      <p:nvGrpSpPr>
-        <p:cNvPr id="1" name=""/>
-        <p:cNvGrpSpPr/>
-        <p:nvPr/>
-      </p:nvGrpSpPr>
-      <p:grpSpPr>
-        <a:xfrm>
-          <a:off x="0" y="0"/>
-          <a:ext cx="0" cy="0"/>
-          <a:chOff x="0" y="0"/>
-          <a:chExt cx="0" cy="0"/>
-        </a:xfrm>
-      </p:grpSpPr>
-      <p:sp>
-        <p:nvSpPr>
-          <p:cNvPr id="2" name="Text 0"/>
-          <p:cNvSpPr/>
-          <p:nvPr/>
-        </p:nvSpPr>
-        <p:spPr>
-          <a:xfrm>
-            <a:off x="457200" y="713232"/>
-            <a:ext cx="11368735" cy="274320"/>
-          </a:xfrm>
-          <a:prstGeom prst="rect">
-            <a:avLst/>
-          </a:prstGeom>
-          <a:noFill/>
-          <a:ln/>
-        </p:spPr>
-        <p:txBody>
-          <a:bodyPr wrap="square" lIns="0" tIns="0" rIns="0" bIns="0" rtlCol="0" anchor="ctr"/>
-          <a:lstStyle/>
-          <a:p>
-            <a:pPr algn="r" indent="0" marL="0">
-              <a:buNone/>
-            </a:pPr>
-            <a:r>
-              <a:rPr lang="en-US" sz="1400" b="1" dirty="0">
-                <a:solidFill>
-                  <a:srgbClr val="1C3F6E"/>
-                </a:solidFill>
-                <a:latin typeface="Calibri" pitchFamily="34" charset="0"/>
-                <a:ea typeface="Calibri" pitchFamily="34" charset="-122"/>
-                <a:cs typeface="Calibri" pitchFamily="34" charset="-120"/>
-              </a:rPr>
-              <a:t>REFERENCES</a:t>
-            </a:r>
-            <a:endParaRPr lang="en-US" sz="1400" dirty="0"/>
-          </a:p>
-        </p:txBody>
-      </p:sp>
-      <p:pic>
-        <p:nvPicPr>
-          <p:cNvPr id="3" name="Image 0" descr="/home/claude/f4/img/minesec_sheet.png">    </p:cNvPr>
-          <p:cNvPicPr>
-            <a:picLocks noChangeAspect="1"/>
-          </p:cNvPicPr>
-          <p:nvPr/>
-        </p:nvPicPr>
-        <p:blipFill>
-          <a:blip r:embed="rId1"/>
-          <a:stretch>
-            <a:fillRect/>
-          </a:stretch>
-        </p:blipFill>
-        <p:spPr>
-          <a:xfrm>
-            <a:off x="0" y="658368"/>
-            <a:ext cx="5120640" cy="5833872"/>
-          </a:xfrm>
-          <a:prstGeom prst="rect">
-            <a:avLst/>
-          </a:prstGeom>
-        </p:spPr>
-      </p:pic>
-      <p:sp>
-        <p:nvSpPr>
-          <p:cNvPr id="4" name="Text 1"/>
-          <p:cNvSpPr/>
-          <p:nvPr/>
-        </p:nvSpPr>
-        <p:spPr>
-          <a:xfrm>
-            <a:off x="5349240" y="1005840"/>
-            <a:ext cx="6522415" cy="731520"/>
-          </a:xfrm>
-          <a:prstGeom prst="rect">
-            <a:avLst/>
-          </a:prstGeom>
-          <a:noFill/>
-          <a:ln/>
-        </p:spPr>
-        <p:txBody>
-          <a:bodyPr wrap="square" lIns="0" tIns="0" rIns="0" bIns="0" rtlCol="0" anchor="ctr">
-            <a:normAutofit/>
-          </a:bodyPr>
-          <a:lstStyle/>
-          <a:p>
-            <a:pPr algn="ctr" indent="0" marL="0">
-              <a:buNone/>
-            </a:pPr>
-            <a:r>
-              <a:rPr lang="en-US" sz="3600" b="1" dirty="0">
-                <a:solidFill>
-                  <a:srgbClr val="990011"/>
-                </a:solidFill>
-                <a:latin typeface="Times New Roman" pitchFamily="34" charset="0"/>
-                <a:ea typeface="Times New Roman" pitchFamily="34" charset="-122"/>
-                <a:cs typeface="Times New Roman" pitchFamily="34" charset="-120"/>
-              </a:rPr>
-              <a:t>References (continued)</a:t>
-            </a:r>
-            <a:endParaRPr lang="en-US" sz="3600" dirty="0"/>
-          </a:p>
-        </p:txBody>
-      </p:sp>
-      <p:sp>
-        <p:nvSpPr>
-          <p:cNvPr id="5" name="Text 2"/>
-          <p:cNvSpPr/>
-          <p:nvPr/>
-        </p:nvSpPr>
-        <p:spPr>
-          <a:xfrm>
-            <a:off x="5349240" y="1783080"/>
-            <a:ext cx="6522415" cy="4663440"/>
-          </a:xfrm>
-          <a:prstGeom prst="rect">
-            <a:avLst/>
-          </a:prstGeom>
-          <a:noFill/>
-          <a:ln/>
-        </p:spPr>
-        <p:txBody>
-          <a:bodyPr wrap="square" lIns="0" tIns="0" rIns="0" bIns="0" rtlCol="0" anchor="t"/>
-          <a:lstStyle/>
-          <a:p>
-            <a:pPr algn="l" marL="342900" indent="-342900">
-              <a:spcAft>
-                <a:spcPts val="800"/>
-              </a:spcAft>
-              <a:buSzPct val="100000"/>
-              <a:buChar char="•"/>
-            </a:pPr>
-            <a:r>
-              <a:rPr lang="en-US" sz="1800" dirty="0">
-                <a:solidFill>
-                  <a:srgbClr val="111111"/>
-                </a:solidFill>
-                <a:latin typeface="Calibri" pitchFamily="34" charset="0"/>
-                <a:ea typeface="Calibri" pitchFamily="34" charset="-122"/>
-                <a:cs typeface="Calibri" pitchFamily="34" charset="-120"/>
-              </a:rPr>
-              <a:t>Diagrams and animations: drawn for this lesson (Geography Department).</a:t>
-            </a:r>
-            <a:endParaRPr lang="en-US" sz="1800" dirty="0"/>
-          </a:p>
-        </p:txBody>
-      </p:sp>
-      <p:sp>
-        <p:nvSpPr>
-          <p:cNvPr id="25" name="Slide Number Placeholder 0"/>
-          <p:cNvSpPr>
-            <a:spLocks noGrp="1"/>
-          </p:cNvSpPr>
-          <p:nvPr>
-            <p:ph type="sldNum" sz="quarter" idx="4294967295"/>
-          </p:nvPr>
-        </p:nvSpPr>
-        <p:spPr>
-          <a:xfrm>
-            <a:off x="27432" y="91440"/>
-            <a:ext cx="585216" cy="475488"/>
-          </a:xfrm>
-          <a:prstGeom prst="rect">
-            <a:avLst/>
-          </a:prstGeom>
-          <a:extLst>
-            <a:ext uri="{C572A759-6A51-4108-AA02-DFA0A04FC94B}">
-              <ma14:wrappingTextBoxFlag xmlns:ma14="http://schemas.microsoft.com/office/mac/drawingml/2011/main" val="0"/>
-            </a:ext>
-          </a:extLst>
-        </p:spPr>
-        <p:txBody>
-          <a:bodyPr/>
-          <a:lstStyle>
-            <a:lvl1pPr>
-              <a:defRPr sz="2000">
-                <a:solidFill>
-                  <a:srgbClr val="FFFFFF"/>
-                </a:solidFill>
-                <a:latin typeface="Calibri"/>
-                <a:ea typeface="Calibri"/>
-                <a:cs typeface="Calibri"/>
-              </a:defRPr>
-            </a:lvl1pPr>
-          </a:lstStyle>
-          <a:p>
-            <a:pPr algn="ctr"/>
-            <a:fld id="{F7021451-1387-4CA6-816F-3879F97B5CBC}" type="slidenum">
-              <a:rPr b="1" lang="en-US"/>
-              <a:t>50</a:t>
+              <a:t>57</a:t>
             </a:fld>
             <a:endParaRPr lang="en-US"/>
           </a:p>

--- a/lecons/F2T/08_S02_L2_P3_Tropical_Grassland_Resources.pptx
+++ b/lecons/F2T/08_S02_L2_P3_Tropical_Grassland_Resources.pptx
@@ -3462,7 +3462,7 @@
           <a:p>
             <a:r>
               <a:rPr lang="en-US" dirty="0"/>
-              <a:t>Before we start the new lesson, let us correct the homework I gave you at the end of Lesson 2 (Part 2): The Tropical Grassland Region: Characteristics (Soils and Vegetation). The question was: List three things that people in your family get from the savanna around Garoua, for example food, wood or animals. Take out your exercise books.</a:t>
+              <a:t>Before we start the new lesson, let us correct the homework I gave you at the end of Lesson 2 (Part 2): The Tropical Grassland Region: Characteristics (Soils and Vegetation). The question was: Name three resources of the savanna. Take out your exercise books.</a:t>
             </a:r>
             <a:endParaRPr lang="en-US" dirty="0"/>
           </a:p>
@@ -4430,7 +4430,7 @@
           <a:p>
             <a:r>
               <a:rPr lang="en-US" dirty="0"/>
-              <a:t>Here is a good answer. Examples: food (maize, sorghum, groundnuts, shea butter); wood (firewood, charcoal, poles for building); animals (cattle, goats, meat and milk). Compare it with your own answer and correct your work in red.</a:t>
+              <a:t>Here is a good answer. Pasture, farmland and wildlife (also water and wood). Compare it with your own answer and correct your work in red.</a:t>
             </a:r>
             <a:endParaRPr lang="en-US" dirty="0"/>
           </a:p>
@@ -4518,7 +4518,7 @@
           <a:p>
             <a:r>
               <a:rPr lang="en-US" dirty="0"/>
-              <a:t>For your homework: Ask a farmer or a herder in your area about his work: what he produces, which tools he uses and where he sells his products. We shall correct it at the beginning of our next lesson.</a:t>
+              <a:t>For your homework: Define transhumance. We shall correct it at the beginning of our next lesson.</a:t>
             </a:r>
             <a:endParaRPr lang="en-US" dirty="0"/>
           </a:p>
@@ -15346,7 +15346,7 @@
         <p:spPr>
           <a:xfrm>
             <a:off x="0" y="658368"/>
-            <a:ext cx="2468880" cy="5833872"/>
+            <a:ext cx="5120640" cy="5833872"/>
           </a:xfrm>
           <a:prstGeom prst="rect">
             <a:avLst/>
@@ -15361,8 +15361,8 @@
         </p:nvSpPr>
         <p:spPr>
           <a:xfrm>
-            <a:off x="2697480" y="1005840"/>
-            <a:ext cx="9174175" cy="731520"/>
+            <a:off x="5349240" y="1005840"/>
+            <a:ext cx="6522415" cy="731520"/>
           </a:xfrm>
           <a:prstGeom prst="rect">
             <a:avLst/>
@@ -15402,8 +15402,8 @@
         </p:nvSpPr>
         <p:spPr>
           <a:xfrm>
-            <a:off x="2697480" y="1783080"/>
-            <a:ext cx="9174175" cy="4663440"/>
+            <a:off x="5349240" y="1783080"/>
+            <a:ext cx="6522415" cy="4663440"/>
           </a:xfrm>
           <a:prstGeom prst="rect">
             <a:avLst/>
@@ -15450,7 +15450,7 @@
                 <a:ea typeface="Times New Roman" pitchFamily="34" charset="-122"/>
                 <a:cs typeface="Times New Roman" pitchFamily="34" charset="-120"/>
               </a:rPr>
-              <a:t>List three things that people in your family get from the savanna around Garoua, for example food, wood or animals.</a:t>
+              <a:t>Name three resources of the savanna.</a:t>
             </a:r>
             <a:endParaRPr lang="en-US" sz="4000" dirty="0"/>
           </a:p>
@@ -18118,7 +18118,7 @@
                 <a:ea typeface="Times New Roman" pitchFamily="34" charset="-122"/>
                 <a:cs typeface="Times New Roman" pitchFamily="34" charset="-120"/>
               </a:rPr>
-              <a:t>Examples: food (maize, sorghum, groundnuts, shea butter); wood (firewood, charcoal, poles for building); animals (cattle, goats, meat and milk).</a:t>
+              <a:t>Pasture, farmland and wildlife (also water and wood).</a:t>
             </a:r>
             <a:endParaRPr lang="en-US" sz="4000" dirty="0"/>
           </a:p>
@@ -18337,7 +18337,7 @@
                 <a:ea typeface="Times New Roman" pitchFamily="34" charset="-122"/>
                 <a:cs typeface="Times New Roman" pitchFamily="34" charset="-120"/>
               </a:rPr>
-              <a:t>Ask a farmer or a herder in your area about his work: what he produces, which tools he uses and where he sells his products.</a:t>
+              <a:t>Define transhumance.</a:t>
             </a:r>
             <a:endParaRPr lang="en-US" sz="4000" dirty="0"/>
           </a:p>
@@ -21277,7 +21277,7 @@
                           <a:ea typeface="Calibri" pitchFamily="34" charset="-122"/>
                           <a:cs typeface="Calibri" pitchFamily="34" charset="-120"/>
                         </a:rPr>
-                        <a:t>Ask a farmer or a herder in your area about his work: what he produces, which tools he uses and where he sells his products.</a:t>
+                        <a:t>Define transhumance.</a:t>
                       </a:r>
                       <a:endParaRPr lang="en-US" sz="1600" dirty="0">
                         <a:latin typeface="Calibri" charset="0"/>
